--- a/artifacts/claude-code-sourcemap-deck.pptx
+++ b/artifacts/claude-code-sourcemap-deck.pptx
@@ -29,9 +29,13 @@
     <p:sldId id="277" r:id="rId23"/>
     <p:sldId id="278" r:id="rId24"/>
     <p:sldId id="279" r:id="rId25"/>
+    <p:sldId id="280" r:id="rId26"/>
+    <p:sldId id="281" r:id="rId27"/>
+    <p:sldId id="282" r:id="rId28"/>
+    <p:sldId id="283" r:id="rId29"/>
   </p:sldIdLst>
   <p:notesMasterIdLst>
-    <p:notesMasterId r:id="rId26"/>
+    <p:notesMasterId r:id="rId30"/>
   </p:notesMasterIdLst>
   <p:sldSz cx="12192000" cy="6858000"/>
   <p:notesSz cx="6858000" cy="12192000"/>
@@ -1818,12 +1822,10 @@
             <a:r>
               <a:rPr lang="en-US" dirty="0"/>
               <a:t>[Sources]
-- restored-src/src/entrypoints/cli.tsx
-- restored-src/src/main.tsx
-- restored-src/src/QueryEngine.ts
-- restored-src/src/query.ts
-- restored-src/src/services/tools/toolExecution.ts
-- restored-src/src/tools/AgentTool/
+- restored-src/src/services/voice.ts
+- restored-src/src/services/voiceStreamSTT.ts
+- restored-src/src/services/voiceKeyterms.ts
+- restored-src/src/voice/voiceModeEnabled.ts
 [/Sources]</a:t>
             </a:r>
             <a:endParaRPr lang="en-US" dirty="0"/>
@@ -1913,12 +1915,11 @@
             <a:r>
               <a:rPr lang="en-US" dirty="0"/>
               <a:t>[Sources]
-- restored-src/src/QueryEngine.ts
-- restored-src/src/query.ts
-- restored-src/src/services/tools/toolExecution.ts
-- restored-src/src/tools/AgentTool/runAgent.ts
-- restored-src/src/utils/swarm/inProcessRunner.ts
-- https://code.claude.com/docs/en/overview
+- restored-src/src/vim/types.ts
+- restored-src/src/vim/transitions.ts
+- restored-src/src/vim/operators.ts
+- restored-src/src/vim/textObjects.ts
+- restored-src/src/vim/motions.ts
 [/Sources]</a:t>
             </a:r>
             <a:endParaRPr lang="en-US" dirty="0"/>
@@ -2008,9 +2009,12 @@
             <a:r>
               <a:rPr lang="en-US" dirty="0"/>
               <a:t>[Sources]
-- README.md
-- /Users/phodal/Downloads/claude-code-sourcemap-main/artifacts/qrcode_for_gh_2afe73fc7b4a_258.jpg
-- /Users/phodal/Downloads/claude-code-sourcemap-main/.agents/skills/slide-skill/slide_templates/template.pptx
+- restored-src/src/buddy/types.ts
+- restored-src/src/buddy/companion.ts
+- restored-src/src/buddy/sprites.ts
+- restored-src/src/buddy/CompanionSprite.tsx
+- restored-src/src/buddy/useBuddyNotification.tsx
+- restored-src/src/buddy/prompt.ts
 [/Sources]</a:t>
             </a:r>
             <a:endParaRPr lang="en-US" dirty="0"/>
@@ -2035,6 +2039,380 @@
             <a:fld id="{F7021451-1387-4CA6-816F-3879F97B5CBC}" type="slidenum">
               <a:rPr lang="en-US"/>
               <a:t>24</a:t>
+            </a:fld>
+            <a:endParaRPr lang="en-US"/>
+          </a:p>
+        </p:txBody>
+      </p:sp>
+    </p:spTree>
+    <p:extLst>
+      <p:ext uri="{BB962C8B-B14F-4D97-AF65-F5344CB8AC3E}">
+        <p14:creationId xmlns:p14="http://schemas.microsoft.com/office/powerpoint/2010/main" val="1024086991"/>
+      </p:ext>
+    </p:extLst>
+  </p:cSld>
+  <p:clrMapOvr>
+    <a:masterClrMapping/>
+  </p:clrMapOvr>
+</p:notes>
+</file>
+
+<file path=ppt/notesSlides/notesSlide25.xml><?xml version="1.0" encoding="utf-8"?>
+<p:notes xmlns:a="http://schemas.openxmlformats.org/drawingml/2006/main" xmlns:r="http://schemas.openxmlformats.org/officeDocument/2006/relationships" xmlns:p="http://schemas.openxmlformats.org/presentationml/2006/main">
+  <p:cSld>
+    <p:spTree>
+      <p:nvGrpSpPr>
+        <p:cNvPr id="1" name=""/>
+        <p:cNvGrpSpPr/>
+        <p:nvPr/>
+      </p:nvGrpSpPr>
+      <p:grpSpPr>
+        <a:xfrm>
+          <a:off x="0" y="0"/>
+          <a:ext cx="0" cy="0"/>
+          <a:chOff x="0" y="0"/>
+          <a:chExt cx="0" cy="0"/>
+        </a:xfrm>
+      </p:grpSpPr>
+      <p:sp>
+        <p:nvSpPr>
+          <p:cNvPr id="2" name="Slide Image Placeholder 1"/>
+          <p:cNvSpPr>
+            <a:spLocks noGrp="1" noRot="1" noChangeAspect="1"/>
+          </p:cNvSpPr>
+          <p:nvPr>
+            <p:ph type="sldImg"/>
+          </p:nvPr>
+        </p:nvSpPr>
+        <p:spPr/>
+      </p:sp>
+      <p:sp>
+        <p:nvSpPr>
+          <p:cNvPr id="3" name="Notes Placeholder 2"/>
+          <p:cNvSpPr>
+            <a:spLocks noGrp="1"/>
+          </p:cNvSpPr>
+          <p:nvPr>
+            <p:ph type="body" idx="1"/>
+          </p:nvPr>
+        </p:nvSpPr>
+        <p:spPr/>
+        <p:txBody>
+          <a:bodyPr/>
+          <a:lstStyle/>
+          <a:p>
+            <a:r>
+              <a:rPr lang="en-US" dirty="0"/>
+              <a:t>[Sources]
+- restored-src/src/main.tsx (lines 78-81, 1049-1086, 1642, 2184-2206)
+- restored-src/src/assistant/sessionHistory.ts
+- restored-src/src/tools/AskUserQuestionTool/AskUserQuestionTool.tsx
+[/Sources]</a:t>
+            </a:r>
+            <a:endParaRPr lang="en-US" dirty="0"/>
+          </a:p>
+        </p:txBody>
+      </p:sp>
+      <p:sp>
+        <p:nvSpPr>
+          <p:cNvPr id="4" name="Slide Number Placeholder 3"/>
+          <p:cNvSpPr>
+            <a:spLocks noGrp="1"/>
+          </p:cNvSpPr>
+          <p:nvPr>
+            <p:ph type="sldNum" sz="quarter" idx="10"/>
+          </p:nvPr>
+        </p:nvSpPr>
+        <p:spPr/>
+        <p:txBody>
+          <a:bodyPr/>
+          <a:lstStyle/>
+          <a:p>
+            <a:fld id="{F7021451-1387-4CA6-816F-3879F97B5CBC}" type="slidenum">
+              <a:rPr lang="en-US"/>
+              <a:t>25</a:t>
+            </a:fld>
+            <a:endParaRPr lang="en-US"/>
+          </a:p>
+        </p:txBody>
+      </p:sp>
+    </p:spTree>
+    <p:extLst>
+      <p:ext uri="{BB962C8B-B14F-4D97-AF65-F5344CB8AC3E}">
+        <p14:creationId xmlns:p14="http://schemas.microsoft.com/office/powerpoint/2010/main" val="1024086991"/>
+      </p:ext>
+    </p:extLst>
+  </p:cSld>
+  <p:clrMapOvr>
+    <a:masterClrMapping/>
+  </p:clrMapOvr>
+</p:notes>
+</file>
+
+<file path=ppt/notesSlides/notesSlide26.xml><?xml version="1.0" encoding="utf-8"?>
+<p:notes xmlns:a="http://schemas.openxmlformats.org/drawingml/2006/main" xmlns:r="http://schemas.openxmlformats.org/officeDocument/2006/relationships" xmlns:p="http://schemas.openxmlformats.org/presentationml/2006/main">
+  <p:cSld>
+    <p:spTree>
+      <p:nvGrpSpPr>
+        <p:cNvPr id="1" name=""/>
+        <p:cNvGrpSpPr/>
+        <p:nvPr/>
+      </p:nvGrpSpPr>
+      <p:grpSpPr>
+        <a:xfrm>
+          <a:off x="0" y="0"/>
+          <a:ext cx="0" cy="0"/>
+          <a:chOff x="0" y="0"/>
+          <a:chExt cx="0" cy="0"/>
+        </a:xfrm>
+      </p:grpSpPr>
+      <p:sp>
+        <p:nvSpPr>
+          <p:cNvPr id="2" name="Slide Image Placeholder 1"/>
+          <p:cNvSpPr>
+            <a:spLocks noGrp="1" noRot="1" noChangeAspect="1"/>
+          </p:cNvSpPr>
+          <p:nvPr>
+            <p:ph type="sldImg"/>
+          </p:nvPr>
+        </p:nvSpPr>
+        <p:spPr/>
+      </p:sp>
+      <p:sp>
+        <p:nvSpPr>
+          <p:cNvPr id="3" name="Notes Placeholder 2"/>
+          <p:cNvSpPr>
+            <a:spLocks noGrp="1"/>
+          </p:cNvSpPr>
+          <p:nvPr>
+            <p:ph type="body" idx="1"/>
+          </p:nvPr>
+        </p:nvSpPr>
+        <p:spPr/>
+        <p:txBody>
+          <a:bodyPr/>
+          <a:lstStyle/>
+          <a:p>
+            <a:r>
+              <a:rPr lang="en-US" dirty="0"/>
+              <a:t>[Sources]
+- restored-src/src/entrypoints/cli.tsx
+- restored-src/src/main.tsx
+- restored-src/src/QueryEngine.ts
+- restored-src/src/query.ts
+- restored-src/src/services/tools/toolExecution.ts
+- restored-src/src/tools/AgentTool/
+[/Sources]</a:t>
+            </a:r>
+            <a:endParaRPr lang="en-US" dirty="0"/>
+          </a:p>
+        </p:txBody>
+      </p:sp>
+      <p:sp>
+        <p:nvSpPr>
+          <p:cNvPr id="4" name="Slide Number Placeholder 3"/>
+          <p:cNvSpPr>
+            <a:spLocks noGrp="1"/>
+          </p:cNvSpPr>
+          <p:nvPr>
+            <p:ph type="sldNum" sz="quarter" idx="10"/>
+          </p:nvPr>
+        </p:nvSpPr>
+        <p:spPr/>
+        <p:txBody>
+          <a:bodyPr/>
+          <a:lstStyle/>
+          <a:p>
+            <a:fld id="{F7021451-1387-4CA6-816F-3879F97B5CBC}" type="slidenum">
+              <a:rPr lang="en-US"/>
+              <a:t>26</a:t>
+            </a:fld>
+            <a:endParaRPr lang="en-US"/>
+          </a:p>
+        </p:txBody>
+      </p:sp>
+    </p:spTree>
+    <p:extLst>
+      <p:ext uri="{BB962C8B-B14F-4D97-AF65-F5344CB8AC3E}">
+        <p14:creationId xmlns:p14="http://schemas.microsoft.com/office/powerpoint/2010/main" val="1024086991"/>
+      </p:ext>
+    </p:extLst>
+  </p:cSld>
+  <p:clrMapOvr>
+    <a:masterClrMapping/>
+  </p:clrMapOvr>
+</p:notes>
+</file>
+
+<file path=ppt/notesSlides/notesSlide27.xml><?xml version="1.0" encoding="utf-8"?>
+<p:notes xmlns:a="http://schemas.openxmlformats.org/drawingml/2006/main" xmlns:r="http://schemas.openxmlformats.org/officeDocument/2006/relationships" xmlns:p="http://schemas.openxmlformats.org/presentationml/2006/main">
+  <p:cSld>
+    <p:spTree>
+      <p:nvGrpSpPr>
+        <p:cNvPr id="1" name=""/>
+        <p:cNvGrpSpPr/>
+        <p:nvPr/>
+      </p:nvGrpSpPr>
+      <p:grpSpPr>
+        <a:xfrm>
+          <a:off x="0" y="0"/>
+          <a:ext cx="0" cy="0"/>
+          <a:chOff x="0" y="0"/>
+          <a:chExt cx="0" cy="0"/>
+        </a:xfrm>
+      </p:grpSpPr>
+      <p:sp>
+        <p:nvSpPr>
+          <p:cNvPr id="2" name="Slide Image Placeholder 1"/>
+          <p:cNvSpPr>
+            <a:spLocks noGrp="1" noRot="1" noChangeAspect="1"/>
+          </p:cNvSpPr>
+          <p:nvPr>
+            <p:ph type="sldImg"/>
+          </p:nvPr>
+        </p:nvSpPr>
+        <p:spPr/>
+      </p:sp>
+      <p:sp>
+        <p:nvSpPr>
+          <p:cNvPr id="3" name="Notes Placeholder 2"/>
+          <p:cNvSpPr>
+            <a:spLocks noGrp="1"/>
+          </p:cNvSpPr>
+          <p:nvPr>
+            <p:ph type="body" idx="1"/>
+          </p:nvPr>
+        </p:nvSpPr>
+        <p:spPr/>
+        <p:txBody>
+          <a:bodyPr/>
+          <a:lstStyle/>
+          <a:p>
+            <a:r>
+              <a:rPr lang="en-US" dirty="0"/>
+              <a:t>[Sources]
+- restored-src/src/QueryEngine.ts
+- restored-src/src/query.ts
+- restored-src/src/services/tools/toolExecution.ts
+- restored-src/src/tools/AgentTool/runAgent.ts
+- restored-src/src/utils/swarm/inProcessRunner.ts
+- https://code.claude.com/docs/en/overview
+[/Sources]</a:t>
+            </a:r>
+            <a:endParaRPr lang="en-US" dirty="0"/>
+          </a:p>
+        </p:txBody>
+      </p:sp>
+      <p:sp>
+        <p:nvSpPr>
+          <p:cNvPr id="4" name="Slide Number Placeholder 3"/>
+          <p:cNvSpPr>
+            <a:spLocks noGrp="1"/>
+          </p:cNvSpPr>
+          <p:nvPr>
+            <p:ph type="sldNum" sz="quarter" idx="10"/>
+          </p:nvPr>
+        </p:nvSpPr>
+        <p:spPr/>
+        <p:txBody>
+          <a:bodyPr/>
+          <a:lstStyle/>
+          <a:p>
+            <a:fld id="{F7021451-1387-4CA6-816F-3879F97B5CBC}" type="slidenum">
+              <a:rPr lang="en-US"/>
+              <a:t>27</a:t>
+            </a:fld>
+            <a:endParaRPr lang="en-US"/>
+          </a:p>
+        </p:txBody>
+      </p:sp>
+    </p:spTree>
+    <p:extLst>
+      <p:ext uri="{BB962C8B-B14F-4D97-AF65-F5344CB8AC3E}">
+        <p14:creationId xmlns:p14="http://schemas.microsoft.com/office/powerpoint/2010/main" val="1024086991"/>
+      </p:ext>
+    </p:extLst>
+  </p:cSld>
+  <p:clrMapOvr>
+    <a:masterClrMapping/>
+  </p:clrMapOvr>
+</p:notes>
+</file>
+
+<file path=ppt/notesSlides/notesSlide28.xml><?xml version="1.0" encoding="utf-8"?>
+<p:notes xmlns:a="http://schemas.openxmlformats.org/drawingml/2006/main" xmlns:r="http://schemas.openxmlformats.org/officeDocument/2006/relationships" xmlns:p="http://schemas.openxmlformats.org/presentationml/2006/main">
+  <p:cSld>
+    <p:spTree>
+      <p:nvGrpSpPr>
+        <p:cNvPr id="1" name=""/>
+        <p:cNvGrpSpPr/>
+        <p:nvPr/>
+      </p:nvGrpSpPr>
+      <p:grpSpPr>
+        <a:xfrm>
+          <a:off x="0" y="0"/>
+          <a:ext cx="0" cy="0"/>
+          <a:chOff x="0" y="0"/>
+          <a:chExt cx="0" cy="0"/>
+        </a:xfrm>
+      </p:grpSpPr>
+      <p:sp>
+        <p:nvSpPr>
+          <p:cNvPr id="2" name="Slide Image Placeholder 1"/>
+          <p:cNvSpPr>
+            <a:spLocks noGrp="1" noRot="1" noChangeAspect="1"/>
+          </p:cNvSpPr>
+          <p:nvPr>
+            <p:ph type="sldImg"/>
+          </p:nvPr>
+        </p:nvSpPr>
+        <p:spPr/>
+      </p:sp>
+      <p:sp>
+        <p:nvSpPr>
+          <p:cNvPr id="3" name="Notes Placeholder 2"/>
+          <p:cNvSpPr>
+            <a:spLocks noGrp="1"/>
+          </p:cNvSpPr>
+          <p:nvPr>
+            <p:ph type="body" idx="1"/>
+          </p:nvPr>
+        </p:nvSpPr>
+        <p:spPr/>
+        <p:txBody>
+          <a:bodyPr/>
+          <a:lstStyle/>
+          <a:p>
+            <a:r>
+              <a:rPr lang="en-US" dirty="0"/>
+              <a:t>[Sources]
+- README.md
+- /Users/phodal/Downloads/claude-code-sourcemap-main/artifacts/qrcode_for_gh_2afe73fc7b4a_258.jpg
+- /Users/phodal/Downloads/claude-code-sourcemap-main/.agents/skills/slide-skill/slide_templates/template.pptx
+[/Sources]</a:t>
+            </a:r>
+            <a:endParaRPr lang="en-US" dirty="0"/>
+          </a:p>
+        </p:txBody>
+      </p:sp>
+      <p:sp>
+        <p:nvSpPr>
+          <p:cNvPr id="4" name="Slide Number Placeholder 3"/>
+          <p:cNvSpPr>
+            <a:spLocks noGrp="1"/>
+          </p:cNvSpPr>
+          <p:nvPr>
+            <p:ph type="sldNum" sz="quarter" idx="10"/>
+          </p:nvPr>
+        </p:nvSpPr>
+        <p:spPr/>
+        <p:txBody>
+          <a:bodyPr/>
+          <a:lstStyle/>
+          <a:p>
+            <a:fld id="{F7021451-1387-4CA6-816F-3879F97B5CBC}" type="slidenum">
+              <a:rPr lang="en-US"/>
+              <a:t>28</a:t>
             </a:fld>
             <a:endParaRPr lang="en-US"/>
           </a:p>
@@ -18519,11 +18897,11 @@
             <a:avLst/>
           </a:prstGeom>
           <a:solidFill>
-            <a:srgbClr val="4B8EF5"/>
-          </a:solidFill>
-          <a:ln w="12700">
-            <a:solidFill>
-              <a:srgbClr val="4B8EF5">
+            <a:srgbClr val="22D3EE"/>
+          </a:solidFill>
+          <a:ln w="12700">
+            <a:solidFill>
+              <a:srgbClr val="22D3EE">
                 <a:alpha val="0"/>
               </a:srgbClr>
             </a:solidFill>
@@ -18540,7 +18918,7 @@
         <p:spPr>
           <a:xfrm>
             <a:off x="621792" y="274320"/>
-            <a:ext cx="909828" cy="201168"/>
+            <a:ext cx="1065276" cy="201168"/>
           </a:xfrm>
           <a:prstGeom prst="roundRect">
             <a:avLst>
@@ -18552,7 +18930,7 @@
           </a:solidFill>
           <a:ln w="12700">
             <a:solidFill>
-              <a:srgbClr val="4B8EF5"/>
+              <a:srgbClr val="22D3EE"/>
             </a:solidFill>
             <a:prstDash val="solid"/>
           </a:ln>
@@ -18585,10 +18963,10 @@
             <a:r>
               <a:rPr lang="en-US" sz="950" b="1" dirty="0">
                 <a:solidFill>
-                  <a:srgbClr val="4B8EF5"/>
-                </a:solidFill>
-              </a:rPr>
-              <a:t>总结 · 01</a:t>
+                  <a:srgbClr val="22D3EE"/>
+                </a:solidFill>
+              </a:rPr>
+              <a:t>特色功能 · 02</a:t>
             </a:r>
             <a:endParaRPr lang="en-US" sz="950" dirty="0"/>
           </a:p>
@@ -18626,7 +19004,7 @@
                   <a:srgbClr val="E8EDF5"/>
                 </a:solidFill>
               </a:rPr>
-              <a:t>如何继续阅读源码：建议按这条顺序推进</a:t>
+              <a:t>Voice 模式：Push-to-Talk，接入 Anthropic 语音流服务</a:t>
             </a:r>
             <a:endParaRPr lang="en-US" sz="2200" dirty="0"/>
           </a:p>
@@ -18662,7 +19040,7 @@
                   <a:srgbClr val="8A9BB5"/>
                 </a:solidFill>
               </a:rPr>
-              <a:t>先建立全局模型，再逐层下钻——避免在细节里迷失。</a:t>
+              <a:t>不是通用 TTS/STT 库封装——而是直连 claude.ai voice_stream WebSocket，要求 OAuth 登录。</a:t>
             </a:r>
             <a:endParaRPr lang="en-US" sz="1150" dirty="0"/>
           </a:p>
@@ -18746,11 +19124,11 @@
             <a:avLst/>
           </a:prstGeom>
           <a:solidFill>
-            <a:srgbClr val="4B8EF5"/>
-          </a:solidFill>
-          <a:ln w="12700">
-            <a:solidFill>
-              <a:srgbClr val="4B8EF5">
+            <a:srgbClr val="22D3EE"/>
+          </a:solidFill>
+          <a:ln w="12700">
+            <a:solidFill>
+              <a:srgbClr val="22D3EE">
                 <a:alpha val="0"/>
               </a:srgbClr>
             </a:solidFill>
@@ -18803,11 +19181,11 @@
         <p:spPr>
           <a:xfrm>
             <a:off x="621792" y="1536192"/>
-            <a:ext cx="5623560" cy="4480560"/>
+            <a:ext cx="5230368" cy="4462272"/>
           </a:xfrm>
           <a:prstGeom prst="roundRect">
             <a:avLst>
-              <a:gd name="adj" fmla="val 1633"/>
+              <a:gd name="adj" fmla="val 1434"/>
             </a:avLst>
           </a:prstGeom>
           <a:solidFill>
@@ -18815,10 +19193,17 @@
           </a:solidFill>
           <a:ln w="12700">
             <a:solidFill>
-              <a:srgbClr val="F5A623"/>
-            </a:solidFill>
-            <a:prstDash val="solid"/>
-          </a:ln>
+              <a:srgbClr val="2A3F5F"/>
+            </a:solidFill>
+            <a:prstDash val="solid"/>
+          </a:ln>
+          <a:effectLst>
+            <a:outerShdw sx="100000" sy="100000" kx="0" ky="0" algn="bl" rotWithShape="0" blurRad="19050" dist="4445" dir="2700000">
+              <a:srgbClr val="000000">
+                <a:alpha val="10000"/>
+              </a:srgbClr>
+            </a:outerShdw>
+          </a:effectLst>
         </p:spPr>
       </p:sp>
       <p:sp>
@@ -18830,7 +19215,7 @@
         <p:spPr>
           <a:xfrm>
             <a:off x="804672" y="1664208"/>
-            <a:ext cx="2286000" cy="256032"/>
+            <a:ext cx="4864608" cy="219456"/>
           </a:xfrm>
           <a:prstGeom prst="rect">
             <a:avLst/>
@@ -18846,14 +19231,14 @@
               <a:buNone/>
             </a:pPr>
             <a:r>
-              <a:rPr lang="en-US" sz="1300" b="1" dirty="0">
-                <a:solidFill>
-                  <a:srgbClr val="F5A623"/>
-                </a:solidFill>
-              </a:rPr>
-              <a:t>第一轮</a:t>
-            </a:r>
-            <a:endParaRPr lang="en-US" sz="1300" dirty="0"/>
+              <a:rPr lang="en-US" sz="1250" b="1" dirty="0">
+                <a:solidFill>
+                  <a:srgbClr val="22D3EE"/>
+                </a:solidFill>
+              </a:rPr>
+              <a:t>实现架构</a:t>
+            </a:r>
+            <a:endParaRPr lang="en-US" sz="1250" dirty="0"/>
           </a:p>
         </p:txBody>
       </p:sp>
@@ -18866,16 +19251,18 @@
         <p:spPr>
           <a:xfrm>
             <a:off x="804672" y="1956816"/>
-            <a:ext cx="5257800" cy="237744"/>
-          </a:xfrm>
-          <a:prstGeom prst="rect">
-            <a:avLst/>
-          </a:prstGeom>
-          <a:noFill/>
-          <a:ln/>
-        </p:spPr>
-        <p:txBody>
-          <a:bodyPr wrap="square" rtlCol="0" anchor="ctr"/>
+            <a:ext cx="4864608" cy="3950208"/>
+          </a:xfrm>
+          <a:prstGeom prst="rect">
+            <a:avLst/>
+          </a:prstGeom>
+          <a:noFill/>
+          <a:ln/>
+        </p:spPr>
+        <p:txBody>
+          <a:bodyPr wrap="square" lIns="0" tIns="0" rIns="0" bIns="0" rtlCol="0" anchor="t">
+            <a:normAutofit/>
+          </a:bodyPr>
           <a:lstStyle/>
           <a:p>
             <a:pPr indent="0" marL="0">
@@ -18884,13 +19271,181 @@
             <a:r>
               <a:rPr lang="en-US" sz="1050" dirty="0">
                 <a:solidFill>
-                  <a:srgbClr val="8A9BB5"/>
-                </a:solidFill>
-              </a:rPr>
-              <a:t>建立系统大图（理解 70% 行为）</a:t>
+                  <a:srgbClr val="C4CDD8"/>
+                </a:solidFill>
+              </a:rPr>
+              <a:t>• services/voice.ts — 音频录制主服务（525 行）</a:t>
             </a:r>
             <a:endParaRPr lang="en-US" sz="1050" dirty="0"/>
           </a:p>
+          <a:p>
+            <a:pPr indent="0" marL="0">
+              <a:buNone/>
+            </a:pPr>
+            <a:r>
+              <a:rPr lang="en-US" sz="1050" dirty="0">
+                <a:solidFill>
+                  <a:srgbClr val="C4CDD8"/>
+                </a:solidFill>
+              </a:rPr>
+              <a:t>•   原生 audio-capture-napi（CoreAudio / ALSA）</a:t>
+            </a:r>
+            <a:endParaRPr lang="en-US" sz="1050" dirty="0"/>
+          </a:p>
+          <a:p>
+            <a:pPr indent="0" marL="0">
+              <a:buNone/>
+            </a:pPr>
+            <a:r>
+              <a:rPr lang="en-US" sz="1050" dirty="0">
+                <a:solidFill>
+                  <a:srgbClr val="C4CDD8"/>
+                </a:solidFill>
+              </a:rPr>
+              <a:t>•   fallback：SoX rec 或 arecord (Linux)</a:t>
+            </a:r>
+            <a:endParaRPr lang="en-US" sz="1050" dirty="0"/>
+          </a:p>
+          <a:p>
+            <a:pPr indent="0" marL="0">
+              <a:buNone/>
+            </a:pPr>
+            <a:r>
+              <a:rPr lang="en-US" sz="1050" dirty="0">
+                <a:solidFill>
+                  <a:srgbClr val="C4CDD8"/>
+                </a:solidFill>
+              </a:rPr>
+              <a:t>•   dlopen 懒加载——首次按键触发，避免启动卡顿</a:t>
+            </a:r>
+            <a:endParaRPr lang="en-US" sz="1050" dirty="0"/>
+          </a:p>
+          <a:p>
+            <a:pPr indent="0" marL="0">
+              <a:buNone/>
+            </a:pPr>
+            <a:r>
+              <a:rPr lang="en-US" sz="1050" dirty="0">
+                <a:solidFill>
+                  <a:srgbClr val="C4CDD8"/>
+                </a:solidFill>
+              </a:rPr>
+              <a:t>• </a:t>
+            </a:r>
+            <a:endParaRPr lang="en-US" sz="1050" dirty="0"/>
+          </a:p>
+          <a:p>
+            <a:pPr indent="0" marL="0">
+              <a:buNone/>
+            </a:pPr>
+            <a:r>
+              <a:rPr lang="en-US" sz="1050" dirty="0">
+                <a:solidFill>
+                  <a:srgbClr val="C4CDD8"/>
+                </a:solidFill>
+              </a:rPr>
+              <a:t>• services/voiceStreamSTT.ts — 流式 STT（544 行）</a:t>
+            </a:r>
+            <a:endParaRPr lang="en-US" sz="1050" dirty="0"/>
+          </a:p>
+          <a:p>
+            <a:pPr indent="0" marL="0">
+              <a:buNone/>
+            </a:pPr>
+            <a:r>
+              <a:rPr lang="en-US" sz="1050" dirty="0">
+                <a:solidFill>
+                  <a:srgbClr val="C4CDD8"/>
+                </a:solidFill>
+              </a:rPr>
+              <a:t>•   WebSocket 连接 /api/ws/speech_to_text/voice_stream</a:t>
+            </a:r>
+            <a:endParaRPr lang="en-US" sz="1050" dirty="0"/>
+          </a:p>
+          <a:p>
+            <a:pPr indent="0" marL="0">
+              <a:buNone/>
+            </a:pPr>
+            <a:r>
+              <a:rPr lang="en-US" sz="1050" dirty="0">
+                <a:solidFill>
+                  <a:srgbClr val="C4CDD8"/>
+                </a:solidFill>
+              </a:rPr>
+              <a:t>•   协议：JSON 控制帧 + 二进制音频帧</a:t>
+            </a:r>
+            <a:endParaRPr lang="en-US" sz="1050" dirty="0"/>
+          </a:p>
+          <a:p>
+            <a:pPr indent="0" marL="0">
+              <a:buNone/>
+            </a:pPr>
+            <a:r>
+              <a:rPr lang="en-US" sz="1050" dirty="0">
+                <a:solidFill>
+                  <a:srgbClr val="C4CDD8"/>
+                </a:solidFill>
+              </a:rPr>
+              <a:t>•   服务端响应 TranscriptText / TranscriptEndpoint</a:t>
+            </a:r>
+            <a:endParaRPr lang="en-US" sz="1050" dirty="0"/>
+          </a:p>
+          <a:p>
+            <a:pPr indent="0" marL="0">
+              <a:buNone/>
+            </a:pPr>
+            <a:r>
+              <a:rPr lang="en-US" sz="1050" dirty="0">
+                <a:solidFill>
+                  <a:srgbClr val="C4CDD8"/>
+                </a:solidFill>
+              </a:rPr>
+              <a:t>•   8s KeepAlive 保活，5s safety timeout</a:t>
+            </a:r>
+            <a:endParaRPr lang="en-US" sz="1050" dirty="0"/>
+          </a:p>
+          <a:p>
+            <a:pPr indent="0" marL="0">
+              <a:buNone/>
+            </a:pPr>
+            <a:r>
+              <a:rPr lang="en-US" sz="1050" dirty="0">
+                <a:solidFill>
+                  <a:srgbClr val="C4CDD8"/>
+                </a:solidFill>
+              </a:rPr>
+              <a:t>• </a:t>
+            </a:r>
+            <a:endParaRPr lang="en-US" sz="1050" dirty="0"/>
+          </a:p>
+          <a:p>
+            <a:pPr indent="0" marL="0">
+              <a:buNone/>
+            </a:pPr>
+            <a:r>
+              <a:rPr lang="en-US" sz="1050" dirty="0">
+                <a:solidFill>
+                  <a:srgbClr val="C4CDD8"/>
+                </a:solidFill>
+              </a:rPr>
+              <a:t>• services/voiceKeyterms.ts — 关键词识别优化（106 行）</a:t>
+            </a:r>
+            <a:endParaRPr lang="en-US" sz="1050" dirty="0"/>
+          </a:p>
+          <a:p>
+            <a:pPr indent="0" marL="0">
+              <a:buNone/>
+            </a:pPr>
+            <a:r>
+              <a:rPr lang="en-US" sz="1050" dirty="0">
+                <a:solidFill>
+                  <a:srgbClr val="C4CDD8"/>
+                </a:solidFill>
+              </a:rPr>
+              <a:t>•   voice/voiceModeEnabled.ts — GrowthBook 开关</a:t>
+            </a:r>
+            <a:endParaRPr lang="en-US" sz="1050" dirty="0"/>
+          </a:p>
         </p:txBody>
       </p:sp>
       <p:sp>
@@ -18901,437 +19456,192 @@
         </p:nvSpPr>
         <p:spPr>
           <a:xfrm>
-            <a:off x="804672" y="2249424"/>
-            <a:ext cx="5257800" cy="9144"/>
-          </a:xfrm>
-          <a:prstGeom prst="rect">
-            <a:avLst/>
-          </a:prstGeom>
-          <a:solidFill>
-            <a:srgbClr val="2A3F5F"/>
-          </a:solidFill>
-          <a:ln w="12700">
-            <a:solidFill>
-              <a:srgbClr val="2A3F5F">
-                <a:alpha val="0"/>
-              </a:srgbClr>
-            </a:solidFill>
-            <a:prstDash val="solid"/>
-          </a:ln>
-        </p:spPr>
-      </p:sp>
-      <p:sp>
-        <p:nvSpPr>
-          <p:cNvPr id="15" name="Text 13"/>
-          <p:cNvSpPr/>
-          <p:nvPr/>
-        </p:nvSpPr>
-        <p:spPr>
-          <a:xfrm>
-            <a:off x="822960" y="2340864"/>
-            <a:ext cx="5212080" cy="219456"/>
-          </a:xfrm>
-          <a:prstGeom prst="rect">
-            <a:avLst/>
-          </a:prstGeom>
-          <a:noFill/>
-          <a:ln/>
-        </p:spPr>
-        <p:txBody>
-          <a:bodyPr wrap="square" rtlCol="0" anchor="ctr"/>
-          <a:lstStyle/>
-          <a:p>
-            <a:pPr indent="0" marL="0">
-              <a:buNone/>
-            </a:pPr>
-            <a:r>
-              <a:rPr lang="en-US" sz="1020" b="1" dirty="0">
-                <a:solidFill>
-                  <a:srgbClr val="F5A623"/>
-                </a:solidFill>
-                <a:latin typeface="Menlo" pitchFamily="34" charset="0"/>
-                <a:ea typeface="Menlo" pitchFamily="34" charset="-122"/>
-                <a:cs typeface="Menlo" pitchFamily="34" charset="-120"/>
-              </a:rPr>
-              <a:t>entrypoints/cli.tsx</a:t>
-            </a:r>
-            <a:endParaRPr lang="en-US" sz="1020" dirty="0"/>
-          </a:p>
-        </p:txBody>
-      </p:sp>
-      <p:sp>
-        <p:nvSpPr>
-          <p:cNvPr id="16" name="Text 14"/>
-          <p:cNvSpPr/>
-          <p:nvPr/>
-        </p:nvSpPr>
-        <p:spPr>
-          <a:xfrm>
-            <a:off x="822960" y="2569464"/>
-            <a:ext cx="5212080" cy="274320"/>
-          </a:xfrm>
-          <a:prstGeom prst="rect">
-            <a:avLst/>
-          </a:prstGeom>
-          <a:noFill/>
-          <a:ln/>
-        </p:spPr>
-        <p:txBody>
-          <a:bodyPr wrap="square" rtlCol="0" anchor="ctr"/>
-          <a:lstStyle/>
-          <a:p>
-            <a:pPr indent="0" marL="0">
-              <a:buNone/>
-            </a:pPr>
-            <a:r>
-              <a:rPr lang="en-US" sz="980" dirty="0">
-                <a:solidFill>
-                  <a:srgbClr val="C4CDD8"/>
-                </a:solidFill>
-              </a:rPr>
-              <a:t>入口分流逻辑与启动策略</a:t>
-            </a:r>
-            <a:endParaRPr lang="en-US" sz="980" dirty="0"/>
-          </a:p>
-        </p:txBody>
-      </p:sp>
-      <p:sp>
-        <p:nvSpPr>
-          <p:cNvPr id="17" name="Text 15"/>
-          <p:cNvSpPr/>
-          <p:nvPr/>
-        </p:nvSpPr>
-        <p:spPr>
-          <a:xfrm>
-            <a:off x="822960" y="3054096"/>
-            <a:ext cx="5212080" cy="219456"/>
-          </a:xfrm>
-          <a:prstGeom prst="rect">
-            <a:avLst/>
-          </a:prstGeom>
-          <a:noFill/>
-          <a:ln/>
-        </p:spPr>
-        <p:txBody>
-          <a:bodyPr wrap="square" rtlCol="0" anchor="ctr"/>
-          <a:lstStyle/>
-          <a:p>
-            <a:pPr indent="0" marL="0">
-              <a:buNone/>
-            </a:pPr>
-            <a:r>
-              <a:rPr lang="en-US" sz="1020" b="1" dirty="0">
-                <a:solidFill>
-                  <a:srgbClr val="F5A623"/>
-                </a:solidFill>
-                <a:latin typeface="Menlo" pitchFamily="34" charset="0"/>
-                <a:ea typeface="Menlo" pitchFamily="34" charset="-122"/>
-                <a:cs typeface="Menlo" pitchFamily="34" charset="-120"/>
-              </a:rPr>
-              <a:t>main.tsx</a:t>
-            </a:r>
-            <a:endParaRPr lang="en-US" sz="1020" dirty="0"/>
-          </a:p>
-        </p:txBody>
-      </p:sp>
-      <p:sp>
-        <p:nvSpPr>
-          <p:cNvPr id="18" name="Text 16"/>
-          <p:cNvSpPr/>
-          <p:nvPr/>
-        </p:nvSpPr>
-        <p:spPr>
-          <a:xfrm>
-            <a:off x="822960" y="3282696"/>
-            <a:ext cx="5212080" cy="274320"/>
-          </a:xfrm>
-          <a:prstGeom prst="rect">
-            <a:avLst/>
-          </a:prstGeom>
-          <a:noFill/>
-          <a:ln/>
-        </p:spPr>
-        <p:txBody>
-          <a:bodyPr wrap="square" rtlCol="0" anchor="ctr"/>
-          <a:lstStyle/>
-          <a:p>
-            <a:pPr indent="0" marL="0">
-              <a:buNone/>
-            </a:pPr>
-            <a:r>
-              <a:rPr lang="en-US" sz="980" dirty="0">
-                <a:solidFill>
-                  <a:srgbClr val="C4CDD8"/>
-                </a:solidFill>
-              </a:rPr>
-              <a:t>startup 编排全景（4,683 行，建议用 outline view）</a:t>
-            </a:r>
-            <a:endParaRPr lang="en-US" sz="980" dirty="0"/>
-          </a:p>
-        </p:txBody>
-      </p:sp>
-      <p:sp>
-        <p:nvSpPr>
-          <p:cNvPr id="19" name="Text 17"/>
-          <p:cNvSpPr/>
-          <p:nvPr/>
-        </p:nvSpPr>
-        <p:spPr>
-          <a:xfrm>
-            <a:off x="822960" y="3767328"/>
-            <a:ext cx="5212080" cy="219456"/>
-          </a:xfrm>
-          <a:prstGeom prst="rect">
-            <a:avLst/>
-          </a:prstGeom>
-          <a:noFill/>
-          <a:ln/>
-        </p:spPr>
-        <p:txBody>
-          <a:bodyPr wrap="square" rtlCol="0" anchor="ctr"/>
-          <a:lstStyle/>
-          <a:p>
-            <a:pPr indent="0" marL="0">
-              <a:buNone/>
-            </a:pPr>
-            <a:r>
-              <a:rPr lang="en-US" sz="1020" b="1" dirty="0">
-                <a:solidFill>
-                  <a:srgbClr val="F5A623"/>
-                </a:solidFill>
-                <a:latin typeface="Menlo" pitchFamily="34" charset="0"/>
-                <a:ea typeface="Menlo" pitchFamily="34" charset="-122"/>
-                <a:cs typeface="Menlo" pitchFamily="34" charset="-120"/>
-              </a:rPr>
-              <a:t>QueryEngine.ts</a:t>
-            </a:r>
-            <a:endParaRPr lang="en-US" sz="1020" dirty="0"/>
-          </a:p>
-        </p:txBody>
-      </p:sp>
-      <p:sp>
-        <p:nvSpPr>
-          <p:cNvPr id="20" name="Text 18"/>
-          <p:cNvSpPr/>
-          <p:nvPr/>
-        </p:nvSpPr>
-        <p:spPr>
-          <a:xfrm>
-            <a:off x="822960" y="3995928"/>
-            <a:ext cx="5212080" cy="274320"/>
-          </a:xfrm>
-          <a:prstGeom prst="rect">
-            <a:avLst/>
-          </a:prstGeom>
-          <a:noFill/>
-          <a:ln/>
-        </p:spPr>
-        <p:txBody>
-          <a:bodyPr wrap="square" rtlCol="0" anchor="ctr"/>
-          <a:lstStyle/>
-          <a:p>
-            <a:pPr indent="0" marL="0">
-              <a:buNone/>
-            </a:pPr>
-            <a:r>
-              <a:rPr lang="en-US" sz="980" dirty="0">
-                <a:solidFill>
-                  <a:srgbClr val="C4CDD8"/>
-                </a:solidFill>
-              </a:rPr>
-              <a:t>会话对象设计与 SDK 接口</a:t>
-            </a:r>
-            <a:endParaRPr lang="en-US" sz="980" dirty="0"/>
-          </a:p>
-        </p:txBody>
-      </p:sp>
-      <p:sp>
-        <p:nvSpPr>
-          <p:cNvPr id="21" name="Text 19"/>
-          <p:cNvSpPr/>
-          <p:nvPr/>
-        </p:nvSpPr>
-        <p:spPr>
-          <a:xfrm>
-            <a:off x="822960" y="4480560"/>
-            <a:ext cx="5212080" cy="219456"/>
-          </a:xfrm>
-          <a:prstGeom prst="rect">
-            <a:avLst/>
-          </a:prstGeom>
-          <a:noFill/>
-          <a:ln/>
-        </p:spPr>
-        <p:txBody>
-          <a:bodyPr wrap="square" rtlCol="0" anchor="ctr"/>
-          <a:lstStyle/>
-          <a:p>
-            <a:pPr indent="0" marL="0">
-              <a:buNone/>
-            </a:pPr>
-            <a:r>
-              <a:rPr lang="en-US" sz="1020" b="1" dirty="0">
-                <a:solidFill>
-                  <a:srgbClr val="F5A623"/>
-                </a:solidFill>
-                <a:latin typeface="Menlo" pitchFamily="34" charset="0"/>
-                <a:ea typeface="Menlo" pitchFamily="34" charset="-122"/>
-                <a:cs typeface="Menlo" pitchFamily="34" charset="-120"/>
-              </a:rPr>
-              <a:t>query.ts</a:t>
-            </a:r>
-            <a:endParaRPr lang="en-US" sz="1020" dirty="0"/>
-          </a:p>
-        </p:txBody>
-      </p:sp>
-      <p:sp>
-        <p:nvSpPr>
-          <p:cNvPr id="22" name="Text 20"/>
-          <p:cNvSpPr/>
-          <p:nvPr/>
-        </p:nvSpPr>
-        <p:spPr>
-          <a:xfrm>
-            <a:off x="822960" y="4709160"/>
-            <a:ext cx="5212080" cy="274320"/>
-          </a:xfrm>
-          <a:prstGeom prst="rect">
-            <a:avLst/>
-          </a:prstGeom>
-          <a:noFill/>
-          <a:ln/>
-        </p:spPr>
-        <p:txBody>
-          <a:bodyPr wrap="square" rtlCol="0" anchor="ctr"/>
-          <a:lstStyle/>
-          <a:p>
-            <a:pPr indent="0" marL="0">
-              <a:buNone/>
-            </a:pPr>
-            <a:r>
-              <a:rPr lang="en-US" sz="980" dirty="0">
-                <a:solidFill>
-                  <a:srgbClr val="C4CDD8"/>
-                </a:solidFill>
-              </a:rPr>
-              <a:t>agent loop 的真正核心，递归状态机</a:t>
-            </a:r>
-            <a:endParaRPr lang="en-US" sz="980" dirty="0"/>
-          </a:p>
-        </p:txBody>
-      </p:sp>
-      <p:sp>
-        <p:nvSpPr>
-          <p:cNvPr id="23" name="Text 21"/>
-          <p:cNvSpPr/>
-          <p:nvPr/>
-        </p:nvSpPr>
-        <p:spPr>
-          <a:xfrm>
-            <a:off x="822960" y="5193792"/>
-            <a:ext cx="5212080" cy="219456"/>
-          </a:xfrm>
-          <a:prstGeom prst="rect">
-            <a:avLst/>
-          </a:prstGeom>
-          <a:noFill/>
-          <a:ln/>
-        </p:spPr>
-        <p:txBody>
-          <a:bodyPr wrap="square" rtlCol="0" anchor="ctr"/>
-          <a:lstStyle/>
-          <a:p>
-            <a:pPr indent="0" marL="0">
-              <a:buNone/>
-            </a:pPr>
-            <a:r>
-              <a:rPr lang="en-US" sz="1020" b="1" dirty="0">
-                <a:solidFill>
-                  <a:srgbClr val="F5A623"/>
-                </a:solidFill>
-                <a:latin typeface="Menlo" pitchFamily="34" charset="0"/>
-                <a:ea typeface="Menlo" pitchFamily="34" charset="-122"/>
-                <a:cs typeface="Menlo" pitchFamily="34" charset="-120"/>
-              </a:rPr>
-              <a:t>Tool.ts + tools.ts</a:t>
-            </a:r>
-            <a:endParaRPr lang="en-US" sz="1020" dirty="0"/>
-          </a:p>
-        </p:txBody>
-      </p:sp>
-      <p:sp>
-        <p:nvSpPr>
-          <p:cNvPr id="24" name="Text 22"/>
-          <p:cNvSpPr/>
-          <p:nvPr/>
-        </p:nvSpPr>
-        <p:spPr>
-          <a:xfrm>
-            <a:off x="822960" y="5422392"/>
-            <a:ext cx="5212080" cy="274320"/>
-          </a:xfrm>
-          <a:prstGeom prst="rect">
-            <a:avLst/>
-          </a:prstGeom>
-          <a:noFill/>
-          <a:ln/>
-        </p:spPr>
-        <p:txBody>
-          <a:bodyPr wrap="square" rtlCol="0" anchor="ctr"/>
-          <a:lstStyle/>
-          <a:p>
-            <a:pPr indent="0" marL="0">
-              <a:buNone/>
-            </a:pPr>
-            <a:r>
-              <a:rPr lang="en-US" sz="980" dirty="0">
-                <a:solidFill>
-                  <a:srgbClr val="C4CDD8"/>
-                </a:solidFill>
-              </a:rPr>
-              <a:t>tool 抽象模型与 registry</a:t>
-            </a:r>
-            <a:endParaRPr lang="en-US" sz="980" dirty="0"/>
-          </a:p>
-        </p:txBody>
-      </p:sp>
-      <p:sp>
-        <p:nvSpPr>
-          <p:cNvPr id="25" name="Shape 23"/>
-          <p:cNvSpPr/>
-          <p:nvPr/>
-        </p:nvSpPr>
-        <p:spPr>
-          <a:xfrm>
-            <a:off x="6492240" y="1536192"/>
-            <a:ext cx="5623560" cy="4480560"/>
+            <a:off x="5998464" y="1536192"/>
+            <a:ext cx="5577840" cy="2048256"/>
           </a:xfrm>
           <a:prstGeom prst="roundRect">
             <a:avLst>
-              <a:gd name="adj" fmla="val 1633"/>
+              <a:gd name="adj" fmla="val 3125"/>
             </a:avLst>
           </a:prstGeom>
           <a:solidFill>
+            <a:srgbClr val="1A2640"/>
+          </a:solidFill>
+          <a:ln w="12700">
+            <a:solidFill>
+              <a:srgbClr val="2A3F5F"/>
+            </a:solidFill>
+            <a:prstDash val="solid"/>
+          </a:ln>
+          <a:effectLst>
+            <a:outerShdw sx="100000" sy="100000" kx="0" ky="0" algn="bl" rotWithShape="0" blurRad="19050" dist="4445" dir="2700000">
+              <a:srgbClr val="000000">
+                <a:alpha val="10000"/>
+              </a:srgbClr>
+            </a:outerShdw>
+          </a:effectLst>
+        </p:spPr>
+      </p:sp>
+      <p:sp>
+        <p:nvSpPr>
+          <p:cNvPr id="15" name="Text 13"/>
+          <p:cNvSpPr/>
+          <p:nvPr/>
+        </p:nvSpPr>
+        <p:spPr>
+          <a:xfrm>
+            <a:off x="6181344" y="1664208"/>
+            <a:ext cx="5212080" cy="219456"/>
+          </a:xfrm>
+          <a:prstGeom prst="rect">
+            <a:avLst/>
+          </a:prstGeom>
+          <a:noFill/>
+          <a:ln/>
+        </p:spPr>
+        <p:txBody>
+          <a:bodyPr wrap="square" rtlCol="0" anchor="ctr"/>
+          <a:lstStyle/>
+          <a:p>
+            <a:pPr indent="0" marL="0">
+              <a:buNone/>
+            </a:pPr>
+            <a:r>
+              <a:rPr lang="en-US" sz="1250" b="1" dirty="0">
+                <a:solidFill>
+                  <a:srgbClr val="4B8EF5"/>
+                </a:solidFill>
+              </a:rPr>
+              <a:t>Push-to-Talk 工作方式</a:t>
+            </a:r>
+            <a:endParaRPr lang="en-US" sz="1250" dirty="0"/>
+          </a:p>
+        </p:txBody>
+      </p:sp>
+      <p:sp>
+        <p:nvSpPr>
+          <p:cNvPr id="16" name="Text 14"/>
+          <p:cNvSpPr/>
+          <p:nvPr/>
+        </p:nvSpPr>
+        <p:spPr>
+          <a:xfrm>
+            <a:off x="6181344" y="1956816"/>
+            <a:ext cx="5212080" cy="1536192"/>
+          </a:xfrm>
+          <a:prstGeom prst="rect">
+            <a:avLst/>
+          </a:prstGeom>
+          <a:noFill/>
+          <a:ln/>
+        </p:spPr>
+        <p:txBody>
+          <a:bodyPr wrap="square" lIns="0" tIns="0" rIns="0" bIns="0" rtlCol="0" anchor="t">
+            <a:normAutofit/>
+          </a:bodyPr>
+          <a:lstStyle/>
+          <a:p>
+            <a:pPr indent="0" marL="0">
+              <a:buNone/>
+            </a:pPr>
+            <a:r>
+              <a:rPr lang="en-US" sz="1100" dirty="0">
+                <a:solidFill>
+                  <a:srgbClr val="C4CDD8"/>
+                </a:solidFill>
+              </a:rPr>
+              <a:t>• 按住快捷键 → 开始录音（16kHz 单声道）</a:t>
+            </a:r>
+            <a:endParaRPr lang="en-US" sz="1100" dirty="0"/>
+          </a:p>
+          <a:p>
+            <a:pPr indent="0" marL="0">
+              <a:buNone/>
+            </a:pPr>
+            <a:r>
+              <a:rPr lang="en-US" sz="1100" dirty="0">
+                <a:solidFill>
+                  <a:srgbClr val="C4CDD8"/>
+                </a:solidFill>
+              </a:rPr>
+              <a:t>• 松开 → 发送 CloseStream，等待 finalize()</a:t>
+            </a:r>
+            <a:endParaRPr lang="en-US" sz="1100" dirty="0"/>
+          </a:p>
+          <a:p>
+            <a:pPr indent="0" marL="0">
+              <a:buNone/>
+            </a:pPr>
+            <a:r>
+              <a:rPr lang="en-US" sz="1100" dirty="0">
+                <a:solidFill>
+                  <a:srgbClr val="C4CDD8"/>
+                </a:solidFill>
+              </a:rPr>
+              <a:t>• 沉默检测：SoX 2s / 3% 阈值（自动停止模式）</a:t>
+            </a:r>
+            <a:endParaRPr lang="en-US" sz="1100" dirty="0"/>
+          </a:p>
+          <a:p>
+            <a:pPr indent="0" marL="0">
+              <a:buNone/>
+            </a:pPr>
+            <a:r>
+              <a:rPr lang="en-US" sz="1100" dirty="0">
+                <a:solidFill>
+                  <a:srgbClr val="C4CDD8"/>
+                </a:solidFill>
+              </a:rPr>
+              <a:t>• 连接音频帧流式推送，边录边传，降低延迟</a:t>
+            </a:r>
+            <a:endParaRPr lang="en-US" sz="1100" dirty="0"/>
+          </a:p>
+        </p:txBody>
+      </p:sp>
+      <p:sp>
+        <p:nvSpPr>
+          <p:cNvPr id="17" name="Shape 15"/>
+          <p:cNvSpPr/>
+          <p:nvPr/>
+        </p:nvSpPr>
+        <p:spPr>
+          <a:xfrm>
+            <a:off x="5998464" y="3730752"/>
+            <a:ext cx="5577840" cy="2267712"/>
+          </a:xfrm>
+          <a:prstGeom prst="roundRect">
+            <a:avLst>
+              <a:gd name="adj" fmla="val 2823"/>
+            </a:avLst>
+          </a:prstGeom>
+          <a:solidFill>
             <a:srgbClr val="162035"/>
           </a:solidFill>
           <a:ln w="12700">
             <a:solidFill>
-              <a:srgbClr val="4B8EF5"/>
-            </a:solidFill>
-            <a:prstDash val="solid"/>
-          </a:ln>
-        </p:spPr>
-      </p:sp>
-      <p:sp>
-        <p:nvSpPr>
-          <p:cNvPr id="26" name="Text 24"/>
-          <p:cNvSpPr/>
-          <p:nvPr/>
-        </p:nvSpPr>
-        <p:spPr>
-          <a:xfrm>
-            <a:off x="6675120" y="1664208"/>
-            <a:ext cx="2286000" cy="256032"/>
+              <a:srgbClr val="2A3F5F"/>
+            </a:solidFill>
+            <a:prstDash val="solid"/>
+          </a:ln>
+          <a:effectLst>
+            <a:outerShdw sx="100000" sy="100000" kx="0" ky="0" algn="bl" rotWithShape="0" blurRad="19050" dist="4445" dir="2700000">
+              <a:srgbClr val="000000">
+                <a:alpha val="10000"/>
+              </a:srgbClr>
+            </a:outerShdw>
+          </a:effectLst>
+        </p:spPr>
+      </p:sp>
+      <p:sp>
+        <p:nvSpPr>
+          <p:cNvPr id="18" name="Text 16"/>
+          <p:cNvSpPr/>
+          <p:nvPr/>
+        </p:nvSpPr>
+        <p:spPr>
+          <a:xfrm>
+            <a:off x="6181344" y="3858768"/>
+            <a:ext cx="5212080" cy="219456"/>
           </a:xfrm>
           <a:prstGeom prst="rect">
             <a:avLst/>
@@ -19347,452 +19657,122 @@
               <a:buNone/>
             </a:pPr>
             <a:r>
-              <a:rPr lang="en-US" sz="1300" b="1" dirty="0">
-                <a:solidFill>
-                  <a:srgbClr val="4B8EF5"/>
-                </a:solidFill>
-              </a:rPr>
-              <a:t>第二轮</a:t>
-            </a:r>
-            <a:endParaRPr lang="en-US" sz="1300" dirty="0"/>
-          </a:p>
-        </p:txBody>
-      </p:sp>
-      <p:sp>
-        <p:nvSpPr>
-          <p:cNvPr id="27" name="Text 25"/>
-          <p:cNvSpPr/>
-          <p:nvPr/>
-        </p:nvSpPr>
-        <p:spPr>
-          <a:xfrm>
-            <a:off x="6675120" y="1956816"/>
-            <a:ext cx="5257800" cy="237744"/>
-          </a:xfrm>
-          <a:prstGeom prst="rect">
-            <a:avLst/>
-          </a:prstGeom>
-          <a:noFill/>
-          <a:ln/>
-        </p:spPr>
-        <p:txBody>
-          <a:bodyPr wrap="square" rtlCol="0" anchor="ctr"/>
-          <a:lstStyle/>
-          <a:p>
-            <a:pPr indent="0" marL="0">
-              <a:buNone/>
-            </a:pPr>
-            <a:r>
-              <a:rPr lang="en-US" sz="1050" dirty="0">
-                <a:solidFill>
-                  <a:srgbClr val="8A9BB5"/>
-                </a:solidFill>
-              </a:rPr>
-              <a:t>攻克执行与扩展层（理解剩余 30%）</a:t>
-            </a:r>
-            <a:endParaRPr lang="en-US" sz="1050" dirty="0"/>
-          </a:p>
-        </p:txBody>
-      </p:sp>
-      <p:sp>
-        <p:nvSpPr>
-          <p:cNvPr id="28" name="Shape 26"/>
-          <p:cNvSpPr/>
-          <p:nvPr/>
-        </p:nvSpPr>
-        <p:spPr>
-          <a:xfrm>
-            <a:off x="6675120" y="2249424"/>
-            <a:ext cx="5257800" cy="9144"/>
-          </a:xfrm>
-          <a:prstGeom prst="rect">
-            <a:avLst/>
-          </a:prstGeom>
-          <a:solidFill>
-            <a:srgbClr val="2A3F5F"/>
-          </a:solidFill>
-          <a:ln w="12700">
-            <a:solidFill>
-              <a:srgbClr val="2A3F5F">
-                <a:alpha val="0"/>
-              </a:srgbClr>
-            </a:solidFill>
-            <a:prstDash val="solid"/>
-          </a:ln>
-        </p:spPr>
-      </p:sp>
-      <p:sp>
-        <p:nvSpPr>
-          <p:cNvPr id="29" name="Text 27"/>
-          <p:cNvSpPr/>
-          <p:nvPr/>
-        </p:nvSpPr>
-        <p:spPr>
-          <a:xfrm>
-            <a:off x="6693408" y="2340864"/>
-            <a:ext cx="5212080" cy="219456"/>
-          </a:xfrm>
-          <a:prstGeom prst="rect">
-            <a:avLst/>
-          </a:prstGeom>
-          <a:noFill/>
-          <a:ln/>
-        </p:spPr>
-        <p:txBody>
-          <a:bodyPr wrap="square" rtlCol="0" anchor="ctr"/>
-          <a:lstStyle/>
-          <a:p>
-            <a:pPr indent="0" marL="0">
-              <a:buNone/>
-            </a:pPr>
-            <a:r>
-              <a:rPr lang="en-US" sz="1020" b="1" dirty="0">
-                <a:solidFill>
-                  <a:srgbClr val="4B8EF5"/>
-                </a:solidFill>
-                <a:latin typeface="Menlo" pitchFamily="34" charset="0"/>
-                <a:ea typeface="Menlo" pitchFamily="34" charset="-122"/>
-                <a:cs typeface="Menlo" pitchFamily="34" charset="-120"/>
-              </a:rPr>
-              <a:t>services/tools/toolExecution.ts</a:t>
-            </a:r>
-            <a:endParaRPr lang="en-US" sz="1020" dirty="0"/>
-          </a:p>
-        </p:txBody>
-      </p:sp>
-      <p:sp>
-        <p:nvSpPr>
-          <p:cNvPr id="30" name="Text 28"/>
-          <p:cNvSpPr/>
-          <p:nvPr/>
-        </p:nvSpPr>
-        <p:spPr>
-          <a:xfrm>
-            <a:off x="6693408" y="2569464"/>
-            <a:ext cx="5212080" cy="274320"/>
-          </a:xfrm>
-          <a:prstGeom prst="rect">
-            <a:avLst/>
-          </a:prstGeom>
-          <a:noFill/>
-          <a:ln/>
-        </p:spPr>
-        <p:txBody>
-          <a:bodyPr wrap="square" rtlCol="0" anchor="ctr"/>
-          <a:lstStyle/>
-          <a:p>
-            <a:pPr indent="0" marL="0">
-              <a:buNone/>
-            </a:pPr>
-            <a:r>
-              <a:rPr lang="en-US" sz="980" dirty="0">
+              <a:rPr lang="en-US" sz="1250" b="1" dirty="0">
+                <a:solidFill>
+                  <a:srgbClr val="F5A623"/>
+                </a:solidFill>
+              </a:rPr>
+              <a:t>权限与限制（源码直接说明）</a:t>
+            </a:r>
+            <a:endParaRPr lang="en-US" sz="1250" dirty="0"/>
+          </a:p>
+        </p:txBody>
+      </p:sp>
+      <p:sp>
+        <p:nvSpPr>
+          <p:cNvPr id="19" name="Text 17"/>
+          <p:cNvSpPr/>
+          <p:nvPr/>
+        </p:nvSpPr>
+        <p:spPr>
+          <a:xfrm>
+            <a:off x="6181344" y="4151376"/>
+            <a:ext cx="5212080" cy="1755648"/>
+          </a:xfrm>
+          <a:prstGeom prst="rect">
+            <a:avLst/>
+          </a:prstGeom>
+          <a:noFill/>
+          <a:ln/>
+        </p:spPr>
+        <p:txBody>
+          <a:bodyPr wrap="square" lIns="0" tIns="0" rIns="0" bIns="0" rtlCol="0" anchor="t">
+            <a:normAutofit/>
+          </a:bodyPr>
+          <a:lstStyle/>
+          <a:p>
+            <a:pPr indent="0" marL="0">
+              <a:buNone/>
+            </a:pPr>
+            <a:r>
+              <a:rPr lang="en-US" sz="1100" dirty="0">
                 <a:solidFill>
                   <a:srgbClr val="C4CDD8"/>
                 </a:solidFill>
               </a:rPr>
-              <a:t>工具执行主路径与 hook 编排</a:t>
-            </a:r>
-            <a:endParaRPr lang="en-US" sz="980" dirty="0"/>
-          </a:p>
-        </p:txBody>
-      </p:sp>
-      <p:sp>
-        <p:nvSpPr>
-          <p:cNvPr id="31" name="Text 29"/>
-          <p:cNvSpPr/>
-          <p:nvPr/>
-        </p:nvSpPr>
-        <p:spPr>
-          <a:xfrm>
-            <a:off x="6693408" y="3054096"/>
-            <a:ext cx="5212080" cy="219456"/>
-          </a:xfrm>
-          <a:prstGeom prst="rect">
-            <a:avLst/>
-          </a:prstGeom>
-          <a:noFill/>
-          <a:ln/>
-        </p:spPr>
-        <p:txBody>
-          <a:bodyPr wrap="square" rtlCol="0" anchor="ctr"/>
-          <a:lstStyle/>
-          <a:p>
-            <a:pPr indent="0" marL="0">
-              <a:buNone/>
-            </a:pPr>
-            <a:r>
-              <a:rPr lang="en-US" sz="1020" b="1" dirty="0">
-                <a:solidFill>
-                  <a:srgbClr val="4B8EF5"/>
-                </a:solidFill>
-                <a:latin typeface="Menlo" pitchFamily="34" charset="0"/>
-                <a:ea typeface="Menlo" pitchFamily="34" charset="-122"/>
-                <a:cs typeface="Menlo" pitchFamily="34" charset="-120"/>
-              </a:rPr>
-              <a:t>services/tools/toolHooks.ts</a:t>
-            </a:r>
-            <a:endParaRPr lang="en-US" sz="1020" dirty="0"/>
-          </a:p>
-        </p:txBody>
-      </p:sp>
-      <p:sp>
-        <p:nvSpPr>
-          <p:cNvPr id="32" name="Text 30"/>
-          <p:cNvSpPr/>
-          <p:nvPr/>
-        </p:nvSpPr>
-        <p:spPr>
-          <a:xfrm>
-            <a:off x="6693408" y="3282696"/>
-            <a:ext cx="5212080" cy="274320"/>
-          </a:xfrm>
-          <a:prstGeom prst="rect">
-            <a:avLst/>
-          </a:prstGeom>
-          <a:noFill/>
-          <a:ln/>
-        </p:spPr>
-        <p:txBody>
-          <a:bodyPr wrap="square" rtlCol="0" anchor="ctr"/>
-          <a:lstStyle/>
-          <a:p>
-            <a:pPr indent="0" marL="0">
-              <a:buNone/>
-            </a:pPr>
-            <a:r>
-              <a:rPr lang="en-US" sz="980" dirty="0">
+              <a:t>• 必须 Anthropic OAuth 登录——API key 不支持</a:t>
+            </a:r>
+            <a:endParaRPr lang="en-US" sz="1100" dirty="0"/>
+          </a:p>
+          <a:p>
+            <a:pPr indent="0" marL="0">
+              <a:buNone/>
+            </a:pPr>
+            <a:r>
+              <a:rPr lang="en-US" sz="1100" dirty="0">
                 <a:solidFill>
                   <a:srgbClr val="C4CDD8"/>
                 </a:solidFill>
               </a:rPr>
-              <a:t>Pre/Post hook 协议细节</a:t>
-            </a:r>
-            <a:endParaRPr lang="en-US" sz="980" dirty="0"/>
-          </a:p>
-        </p:txBody>
-      </p:sp>
-      <p:sp>
-        <p:nvSpPr>
-          <p:cNvPr id="33" name="Text 31"/>
-          <p:cNvSpPr/>
-          <p:nvPr/>
-        </p:nvSpPr>
-        <p:spPr>
-          <a:xfrm>
-            <a:off x="6693408" y="3767328"/>
-            <a:ext cx="5212080" cy="219456"/>
-          </a:xfrm>
-          <a:prstGeom prst="rect">
-            <a:avLst/>
-          </a:prstGeom>
-          <a:noFill/>
-          <a:ln/>
-        </p:spPr>
-        <p:txBody>
-          <a:bodyPr wrap="square" rtlCol="0" anchor="ctr"/>
-          <a:lstStyle/>
-          <a:p>
-            <a:pPr indent="0" marL="0">
-              <a:buNone/>
-            </a:pPr>
-            <a:r>
-              <a:rPr lang="en-US" sz="1020" b="1" dirty="0">
-                <a:solidFill>
-                  <a:srgbClr val="4B8EF5"/>
-                </a:solidFill>
-                <a:latin typeface="Menlo" pitchFamily="34" charset="0"/>
-                <a:ea typeface="Menlo" pitchFamily="34" charset="-122"/>
-                <a:cs typeface="Menlo" pitchFamily="34" charset="-120"/>
-              </a:rPr>
-              <a:t>tools/AgentTool/ + utils/swarm/</a:t>
-            </a:r>
-            <a:endParaRPr lang="en-US" sz="1020" dirty="0"/>
-          </a:p>
-        </p:txBody>
-      </p:sp>
-      <p:sp>
-        <p:nvSpPr>
-          <p:cNvPr id="34" name="Text 32"/>
-          <p:cNvSpPr/>
-          <p:nvPr/>
-        </p:nvSpPr>
-        <p:spPr>
-          <a:xfrm>
-            <a:off x="6693408" y="3995928"/>
-            <a:ext cx="5212080" cy="274320"/>
-          </a:xfrm>
-          <a:prstGeom prst="rect">
-            <a:avLst/>
-          </a:prstGeom>
-          <a:noFill/>
-          <a:ln/>
-        </p:spPr>
-        <p:txBody>
-          <a:bodyPr wrap="square" rtlCol="0" anchor="ctr"/>
-          <a:lstStyle/>
-          <a:p>
-            <a:pPr indent="0" marL="0">
-              <a:buNone/>
-            </a:pPr>
-            <a:r>
-              <a:rPr lang="en-US" sz="980" dirty="0">
+              <a:t>• Bedrock / Vertex / Foundry 均不可用</a:t>
+            </a:r>
+            <a:endParaRPr lang="en-US" sz="1100" dirty="0"/>
+          </a:p>
+          <a:p>
+            <a:pPr indent="0" marL="0">
+              <a:buNone/>
+            </a:pPr>
+            <a:r>
+              <a:rPr lang="en-US" sz="1100" dirty="0">
                 <a:solidFill>
                   <a:srgbClr val="C4CDD8"/>
                 </a:solidFill>
               </a:rPr>
-              <a:t>多 Agent 运行时</a:t>
-            </a:r>
-            <a:endParaRPr lang="en-US" sz="980" dirty="0"/>
-          </a:p>
-        </p:txBody>
-      </p:sp>
-      <p:sp>
-        <p:nvSpPr>
-          <p:cNvPr id="35" name="Text 33"/>
-          <p:cNvSpPr/>
-          <p:nvPr/>
-        </p:nvSpPr>
-        <p:spPr>
-          <a:xfrm>
-            <a:off x="6693408" y="4480560"/>
-            <a:ext cx="5212080" cy="219456"/>
-          </a:xfrm>
-          <a:prstGeom prst="rect">
-            <a:avLst/>
-          </a:prstGeom>
-          <a:noFill/>
-          <a:ln/>
-        </p:spPr>
-        <p:txBody>
-          <a:bodyPr wrap="square" rtlCol="0" anchor="ctr"/>
-          <a:lstStyle/>
-          <a:p>
-            <a:pPr indent="0" marL="0">
-              <a:buNone/>
-            </a:pPr>
-            <a:r>
-              <a:rPr lang="en-US" sz="1020" b="1" dirty="0">
-                <a:solidFill>
-                  <a:srgbClr val="4B8EF5"/>
-                </a:solidFill>
-                <a:latin typeface="Menlo" pitchFamily="34" charset="0"/>
-                <a:ea typeface="Menlo" pitchFamily="34" charset="-122"/>
-                <a:cs typeface="Menlo" pitchFamily="34" charset="-120"/>
-              </a:rPr>
-              <a:t>services/mcp/client.ts</a:t>
-            </a:r>
-            <a:endParaRPr lang="en-US" sz="1020" dirty="0"/>
-          </a:p>
-        </p:txBody>
-      </p:sp>
-      <p:sp>
-        <p:nvSpPr>
-          <p:cNvPr id="36" name="Text 34"/>
-          <p:cNvSpPr/>
-          <p:nvPr/>
-        </p:nvSpPr>
-        <p:spPr>
-          <a:xfrm>
-            <a:off x="6693408" y="4709160"/>
-            <a:ext cx="5212080" cy="274320"/>
-          </a:xfrm>
-          <a:prstGeom prst="rect">
-            <a:avLst/>
-          </a:prstGeom>
-          <a:noFill/>
-          <a:ln/>
-        </p:spPr>
-        <p:txBody>
-          <a:bodyPr wrap="square" rtlCol="0" anchor="ctr"/>
-          <a:lstStyle/>
-          <a:p>
-            <a:pPr indent="0" marL="0">
-              <a:buNone/>
-            </a:pPr>
-            <a:r>
-              <a:rPr lang="en-US" sz="980" dirty="0">
+              <a:t>• tengu_amber_quartz_disabled GrowthBook 紧急关闭开关</a:t>
+            </a:r>
+            <a:endParaRPr lang="en-US" sz="1100" dirty="0"/>
+          </a:p>
+          <a:p>
+            <a:pPr indent="0" marL="0">
+              <a:buNone/>
+            </a:pPr>
+            <a:r>
+              <a:rPr lang="en-US" sz="1100" dirty="0">
                 <a:solidFill>
                   <a:srgbClr val="C4CDD8"/>
                 </a:solidFill>
               </a:rPr>
-              <a:t>外部能力接入协议</a:t>
-            </a:r>
-            <a:endParaRPr lang="en-US" sz="980" dirty="0"/>
-          </a:p>
-        </p:txBody>
-      </p:sp>
-      <p:sp>
-        <p:nvSpPr>
-          <p:cNvPr id="37" name="Text 35"/>
-          <p:cNvSpPr/>
-          <p:nvPr/>
-        </p:nvSpPr>
-        <p:spPr>
-          <a:xfrm>
-            <a:off x="6693408" y="5193792"/>
-            <a:ext cx="5212080" cy="219456"/>
-          </a:xfrm>
-          <a:prstGeom prst="rect">
-            <a:avLst/>
-          </a:prstGeom>
-          <a:noFill/>
-          <a:ln/>
-        </p:spPr>
-        <p:txBody>
-          <a:bodyPr wrap="square" rtlCol="0" anchor="ctr"/>
-          <a:lstStyle/>
-          <a:p>
-            <a:pPr indent="0" marL="0">
-              <a:buNone/>
-            </a:pPr>
-            <a:r>
-              <a:rPr lang="en-US" sz="1020" b="1" dirty="0">
-                <a:solidFill>
-                  <a:srgbClr val="4B8EF5"/>
-                </a:solidFill>
-                <a:latin typeface="Menlo" pitchFamily="34" charset="0"/>
-                <a:ea typeface="Menlo" pitchFamily="34" charset="-122"/>
-                <a:cs typeface="Menlo" pitchFamily="34" charset="-120"/>
-              </a:rPr>
-              <a:t>utils/permissions/</a:t>
-            </a:r>
-            <a:endParaRPr lang="en-US" sz="1020" dirty="0"/>
-          </a:p>
-        </p:txBody>
-      </p:sp>
-      <p:sp>
-        <p:nvSpPr>
-          <p:cNvPr id="38" name="Text 36"/>
-          <p:cNvSpPr/>
-          <p:nvPr/>
-        </p:nvSpPr>
-        <p:spPr>
-          <a:xfrm>
-            <a:off x="6693408" y="5422392"/>
-            <a:ext cx="5212080" cy="274320"/>
-          </a:xfrm>
-          <a:prstGeom prst="rect">
-            <a:avLst/>
-          </a:prstGeom>
-          <a:noFill/>
-          <a:ln/>
-        </p:spPr>
-        <p:txBody>
-          <a:bodyPr wrap="square" rtlCol="0" anchor="ctr"/>
-          <a:lstStyle/>
-          <a:p>
-            <a:pPr indent="0" marL="0">
-              <a:buNone/>
-            </a:pPr>
-            <a:r>
-              <a:rPr lang="en-US" sz="980" dirty="0">
+              <a:t>• WSL1 / headless Linux：arecord 需 ALSA/PulseAudio</a:t>
+            </a:r>
+            <a:endParaRPr lang="en-US" sz="1100" dirty="0"/>
+          </a:p>
+          <a:p>
+            <a:pPr indent="0" marL="0">
+              <a:buNone/>
+            </a:pPr>
+            <a:r>
+              <a:rPr lang="en-US" sz="1100" dirty="0">
                 <a:solidFill>
                   <a:srgbClr val="C4CDD8"/>
                 </a:solidFill>
               </a:rPr>
-              <a:t>权限系统全景</a:t>
-            </a:r>
-            <a:endParaRPr lang="en-US" sz="980" dirty="0"/>
+              <a:t>• WSL2+WSLg（Win11）通过 RDP pipes 支持</a:t>
+            </a:r>
+            <a:endParaRPr lang="en-US" sz="1100" dirty="0"/>
+          </a:p>
+          <a:p>
+            <a:pPr indent="0" marL="0">
+              <a:buNone/>
+            </a:pPr>
+            <a:r>
+              <a:rPr lang="en-US" sz="1100" dirty="0">
+                <a:solidFill>
+                  <a:srgbClr val="C4CDD8"/>
+                </a:solidFill>
+              </a:rPr>
+              <a:t>• 冷启动 dlopen 可能阻塞事件循环 1–8s（已有注释说明）</a:t>
+            </a:r>
+            <a:endParaRPr lang="en-US" sz="1100" dirty="0"/>
           </a:p>
         </p:txBody>
       </p:sp>
@@ -19843,11 +19823,11 @@
             <a:avLst/>
           </a:prstGeom>
           <a:solidFill>
-            <a:srgbClr val="F5A623"/>
-          </a:solidFill>
-          <a:ln w="12700">
-            <a:solidFill>
-              <a:srgbClr val="F5A623">
+            <a:srgbClr val="34D399"/>
+          </a:solidFill>
+          <a:ln w="12700">
+            <a:solidFill>
+              <a:srgbClr val="34D399">
                 <a:alpha val="0"/>
               </a:srgbClr>
             </a:solidFill>
@@ -19864,7 +19844,7 @@
         <p:spPr>
           <a:xfrm>
             <a:off x="621792" y="274320"/>
-            <a:ext cx="909828" cy="201168"/>
+            <a:ext cx="1065276" cy="201168"/>
           </a:xfrm>
           <a:prstGeom prst="roundRect">
             <a:avLst>
@@ -19876,7 +19856,7 @@
           </a:solidFill>
           <a:ln w="12700">
             <a:solidFill>
-              <a:srgbClr val="F5A623"/>
+              <a:srgbClr val="34D399"/>
             </a:solidFill>
             <a:prstDash val="solid"/>
           </a:ln>
@@ -19909,10 +19889,10 @@
             <a:r>
               <a:rPr lang="en-US" sz="950" b="1" dirty="0">
                 <a:solidFill>
-                  <a:srgbClr val="F5A623"/>
-                </a:solidFill>
-              </a:rPr>
-              <a:t>总结 · 02</a:t>
+                  <a:srgbClr val="34D399"/>
+                </a:solidFill>
+              </a:rPr>
+              <a:t>特色功能 · 03</a:t>
             </a:r>
             <a:endParaRPr lang="en-US" sz="950" dirty="0"/>
           </a:p>
@@ -19950,7 +19930,7 @@
                   <a:srgbClr val="E8EDF5"/>
                 </a:solidFill>
               </a:rPr>
-              <a:t>三个可以直接带走的结论</a:t>
+              <a:t>Vim 模式：1,513 行的完整终端编辑器状态机</a:t>
             </a:r>
             <a:endParaRPr lang="en-US" sz="2200" dirty="0"/>
           </a:p>
@@ -19986,7 +19966,7 @@
                   <a:srgbClr val="8A9BB5"/>
                 </a:solidFill>
               </a:rPr>
-              <a:t>这些结论由源码事实支撑，不是主观评价。</a:t>
+              <a:t>不是「支持几个快捷键」——而是严格的 INSERT / NORMAL 双模式状态机，含 dot-repeat 和 text objects。</a:t>
             </a:r>
             <a:endParaRPr lang="en-US" sz="1150" dirty="0"/>
           </a:p>
@@ -20070,11 +20050,11 @@
             <a:avLst/>
           </a:prstGeom>
           <a:solidFill>
-            <a:srgbClr val="F5A623"/>
-          </a:solidFill>
-          <a:ln w="12700">
-            <a:solidFill>
-              <a:srgbClr val="F5A623">
+            <a:srgbClr val="34D399"/>
+          </a:solidFill>
+          <a:ln w="12700">
+            <a:solidFill>
+              <a:srgbClr val="34D399">
                 <a:alpha val="0"/>
               </a:srgbClr>
             </a:solidFill>
@@ -20126,12 +20106,12 @@
         </p:nvSpPr>
         <p:spPr>
           <a:xfrm>
-            <a:off x="621792" y="1554480"/>
-            <a:ext cx="10954512" cy="1389888"/>
+            <a:off x="621792" y="1536192"/>
+            <a:ext cx="5230368" cy="4462272"/>
           </a:xfrm>
           <a:prstGeom prst="roundRect">
             <a:avLst>
-              <a:gd name="adj" fmla="val 4605"/>
+              <a:gd name="adj" fmla="val 1434"/>
             </a:avLst>
           </a:prstGeom>
           <a:solidFill>
@@ -20139,51 +20119,354 @@
           </a:solidFill>
           <a:ln w="12700">
             <a:solidFill>
-              <a:srgbClr val="F5A623"/>
-            </a:solidFill>
-            <a:prstDash val="solid"/>
-          </a:ln>
-        </p:spPr>
-      </p:sp>
-      <p:sp>
-        <p:nvSpPr>
-          <p:cNvPr id="12" name="Shape 10"/>
-          <p:cNvSpPr/>
-          <p:nvPr/>
-        </p:nvSpPr>
-        <p:spPr>
-          <a:xfrm>
-            <a:off x="621792" y="1554480"/>
-            <a:ext cx="804672" cy="1389888"/>
+              <a:srgbClr val="2A3F5F"/>
+            </a:solidFill>
+            <a:prstDash val="solid"/>
+          </a:ln>
+          <a:effectLst>
+            <a:outerShdw sx="100000" sy="100000" kx="0" ky="0" algn="bl" rotWithShape="0" blurRad="19050" dist="4445" dir="2700000">
+              <a:srgbClr val="000000">
+                <a:alpha val="10000"/>
+              </a:srgbClr>
+            </a:outerShdw>
+          </a:effectLst>
+        </p:spPr>
+      </p:sp>
+      <p:sp>
+        <p:nvSpPr>
+          <p:cNvPr id="12" name="Text 10"/>
+          <p:cNvSpPr/>
+          <p:nvPr/>
+        </p:nvSpPr>
+        <p:spPr>
+          <a:xfrm>
+            <a:off x="804672" y="1664208"/>
+            <a:ext cx="4864608" cy="219456"/>
+          </a:xfrm>
+          <a:prstGeom prst="rect">
+            <a:avLst/>
+          </a:prstGeom>
+          <a:noFill/>
+          <a:ln/>
+        </p:spPr>
+        <p:txBody>
+          <a:bodyPr wrap="square" rtlCol="0" anchor="ctr"/>
+          <a:lstStyle/>
+          <a:p>
+            <a:pPr indent="0" marL="0">
+              <a:buNone/>
+            </a:pPr>
+            <a:r>
+              <a:rPr lang="en-US" sz="1250" b="1" dirty="0">
+                <a:solidFill>
+                  <a:srgbClr val="34D399"/>
+                </a:solidFill>
+              </a:rPr>
+              <a:t>状态机设计（types.ts 注释原文）</a:t>
+            </a:r>
+            <a:endParaRPr lang="en-US" sz="1250" dirty="0"/>
+          </a:p>
+        </p:txBody>
+      </p:sp>
+      <p:sp>
+        <p:nvSpPr>
+          <p:cNvPr id="13" name="Text 11"/>
+          <p:cNvSpPr/>
+          <p:nvPr/>
+        </p:nvSpPr>
+        <p:spPr>
+          <a:xfrm>
+            <a:off x="804672" y="1956816"/>
+            <a:ext cx="4864608" cy="3913632"/>
+          </a:xfrm>
+          <a:prstGeom prst="rect">
+            <a:avLst/>
+          </a:prstGeom>
+          <a:noFill/>
+          <a:ln/>
+        </p:spPr>
+        <p:txBody>
+          <a:bodyPr wrap="square" rtlCol="0" anchor="t"/>
+          <a:lstStyle/>
+          <a:p>
+            <a:pPr indent="0" marL="0">
+              <a:buNone/>
+            </a:pPr>
+            <a:r>
+              <a:rPr lang="en-US" sz="980" dirty="0">
+                <a:solidFill>
+                  <a:srgbClr val="34D399"/>
+                </a:solidFill>
+                <a:latin typeface="Menlo" pitchFamily="34" charset="0"/>
+                <a:ea typeface="Menlo" pitchFamily="34" charset="-122"/>
+                <a:cs typeface="Menlo" pitchFamily="34" charset="-120"/>
+              </a:rPr>
+              <a:t>VimState</a:t>
+            </a:r>
+            <a:endParaRPr lang="en-US" sz="980" dirty="0"/>
+          </a:p>
+          <a:p>
+            <a:pPr indent="0" marL="0">
+              <a:buNone/>
+            </a:pPr>
+            <a:r>
+              <a:rPr lang="en-US" sz="980" dirty="0">
+                <a:solidFill>
+                  <a:srgbClr val="34D399"/>
+                </a:solidFill>
+                <a:latin typeface="Menlo" pitchFamily="34" charset="0"/>
+                <a:ea typeface="Menlo" pitchFamily="34" charset="-122"/>
+                <a:cs typeface="Menlo" pitchFamily="34" charset="-120"/>
+              </a:rPr>
+              <a:t>  INSERT  (tracks insertedText)</a:t>
+            </a:r>
+            <a:endParaRPr lang="en-US" sz="980" dirty="0"/>
+          </a:p>
+          <a:p>
+            <a:pPr indent="0" marL="0">
+              <a:buNone/>
+            </a:pPr>
+            <a:r>
+              <a:rPr lang="en-US" sz="980" dirty="0">
+                <a:solidFill>
+                  <a:srgbClr val="34D399"/>
+                </a:solidFill>
+                <a:latin typeface="Menlo" pitchFamily="34" charset="0"/>
+                <a:ea typeface="Menlo" pitchFamily="34" charset="-122"/>
+                <a:cs typeface="Menlo" pitchFamily="34" charset="-120"/>
+              </a:rPr>
+              <a:t>  NORMAL  — CommandState 子状态机</a:t>
+            </a:r>
+            <a:endParaRPr lang="en-US" sz="980" dirty="0"/>
+          </a:p>
+          <a:p>
+            <a:pPr indent="0" marL="0">
+              <a:buNone/>
+            </a:pPr>
+            <a:endParaRPr lang="en-US" sz="980" dirty="0"/>
+          </a:p>
+          <a:p>
+            <a:pPr indent="0" marL="0">
+              <a:buNone/>
+            </a:pPr>
+            <a:r>
+              <a:rPr lang="en-US" sz="980" dirty="0">
+                <a:solidFill>
+                  <a:srgbClr val="34D399"/>
+                </a:solidFill>
+                <a:latin typeface="Menlo" pitchFamily="34" charset="0"/>
+                <a:ea typeface="Menlo" pitchFamily="34" charset="-122"/>
+                <a:cs typeface="Menlo" pitchFamily="34" charset="-120"/>
+              </a:rPr>
+              <a:t>  idle ──┬─[d/c/y]──► operator</a:t>
+            </a:r>
+            <a:endParaRPr lang="en-US" sz="980" dirty="0"/>
+          </a:p>
+          <a:p>
+            <a:pPr indent="0" marL="0">
+              <a:buNone/>
+            </a:pPr>
+            <a:r>
+              <a:rPr lang="en-US" sz="980" dirty="0">
+                <a:solidFill>
+                  <a:srgbClr val="34D399"/>
+                </a:solidFill>
+                <a:latin typeface="Menlo" pitchFamily="34" charset="0"/>
+                <a:ea typeface="Menlo" pitchFamily="34" charset="-122"/>
+                <a:cs typeface="Menlo" pitchFamily="34" charset="-120"/>
+              </a:rPr>
+              <a:t>         ├─[1-9]────► count</a:t>
+            </a:r>
+            <a:endParaRPr lang="en-US" sz="980" dirty="0"/>
+          </a:p>
+          <a:p>
+            <a:pPr indent="0" marL="0">
+              <a:buNone/>
+            </a:pPr>
+            <a:r>
+              <a:rPr lang="en-US" sz="980" dirty="0">
+                <a:solidFill>
+                  <a:srgbClr val="34D399"/>
+                </a:solidFill>
+                <a:latin typeface="Menlo" pitchFamily="34" charset="0"/>
+                <a:ea typeface="Menlo" pitchFamily="34" charset="-122"/>
+                <a:cs typeface="Menlo" pitchFamily="34" charset="-120"/>
+              </a:rPr>
+              <a:t>         ├─[fFtT]───► find</a:t>
+            </a:r>
+            <a:endParaRPr lang="en-US" sz="980" dirty="0"/>
+          </a:p>
+          <a:p>
+            <a:pPr indent="0" marL="0">
+              <a:buNone/>
+            </a:pPr>
+            <a:r>
+              <a:rPr lang="en-US" sz="980" dirty="0">
+                <a:solidFill>
+                  <a:srgbClr val="34D399"/>
+                </a:solidFill>
+                <a:latin typeface="Menlo" pitchFamily="34" charset="0"/>
+                <a:ea typeface="Menlo" pitchFamily="34" charset="-122"/>
+                <a:cs typeface="Menlo" pitchFamily="34" charset="-120"/>
+              </a:rPr>
+              <a:t>         ├─[g]──────► g</a:t>
+            </a:r>
+            <a:endParaRPr lang="en-US" sz="980" dirty="0"/>
+          </a:p>
+          <a:p>
+            <a:pPr indent="0" marL="0">
+              <a:buNone/>
+            </a:pPr>
+            <a:r>
+              <a:rPr lang="en-US" sz="980" dirty="0">
+                <a:solidFill>
+                  <a:srgbClr val="34D399"/>
+                </a:solidFill>
+                <a:latin typeface="Menlo" pitchFamily="34" charset="0"/>
+                <a:ea typeface="Menlo" pitchFamily="34" charset="-122"/>
+                <a:cs typeface="Menlo" pitchFamily="34" charset="-120"/>
+              </a:rPr>
+              <a:t>         ├─[r]──────► replace</a:t>
+            </a:r>
+            <a:endParaRPr lang="en-US" sz="980" dirty="0"/>
+          </a:p>
+          <a:p>
+            <a:pPr indent="0" marL="0">
+              <a:buNone/>
+            </a:pPr>
+            <a:r>
+              <a:rPr lang="en-US" sz="980" dirty="0">
+                <a:solidFill>
+                  <a:srgbClr val="34D399"/>
+                </a:solidFill>
+                <a:latin typeface="Menlo" pitchFamily="34" charset="0"/>
+                <a:ea typeface="Menlo" pitchFamily="34" charset="-122"/>
+                <a:cs typeface="Menlo" pitchFamily="34" charset="-120"/>
+              </a:rPr>
+              <a:t>         └─[&gt;&lt;]─────► indent</a:t>
+            </a:r>
+            <a:endParaRPr lang="en-US" sz="980" dirty="0"/>
+          </a:p>
+          <a:p>
+            <a:pPr indent="0" marL="0">
+              <a:buNone/>
+            </a:pPr>
+            <a:endParaRPr lang="en-US" sz="980" dirty="0"/>
+          </a:p>
+          <a:p>
+            <a:pPr indent="0" marL="0">
+              <a:buNone/>
+            </a:pPr>
+            <a:r>
+              <a:rPr lang="en-US" sz="980" dirty="0">
+                <a:solidFill>
+                  <a:srgbClr val="34D399"/>
+                </a:solidFill>
+                <a:latin typeface="Menlo" pitchFamily="34" charset="0"/>
+                <a:ea typeface="Menlo" pitchFamily="34" charset="-122"/>
+                <a:cs typeface="Menlo" pitchFamily="34" charset="-120"/>
+              </a:rPr>
+              <a:t>  operator ─┬─[motion]──► execute</a:t>
+            </a:r>
+            <a:endParaRPr lang="en-US" sz="980" dirty="0"/>
+          </a:p>
+          <a:p>
+            <a:pPr indent="0" marL="0">
+              <a:buNone/>
+            </a:pPr>
+            <a:r>
+              <a:rPr lang="en-US" sz="980" dirty="0">
+                <a:solidFill>
+                  <a:srgbClr val="34D399"/>
+                </a:solidFill>
+                <a:latin typeface="Menlo" pitchFamily="34" charset="0"/>
+                <a:ea typeface="Menlo" pitchFamily="34" charset="-122"/>
+                <a:cs typeface="Menlo" pitchFamily="34" charset="-120"/>
+              </a:rPr>
+              <a:t>            ├─[0-9]────► operatorCount</a:t>
+            </a:r>
+            <a:endParaRPr lang="en-US" sz="980" dirty="0"/>
+          </a:p>
+          <a:p>
+            <a:pPr indent="0" marL="0">
+              <a:buNone/>
+            </a:pPr>
+            <a:r>
+              <a:rPr lang="en-US" sz="980" dirty="0">
+                <a:solidFill>
+                  <a:srgbClr val="34D399"/>
+                </a:solidFill>
+                <a:latin typeface="Menlo" pitchFamily="34" charset="0"/>
+                <a:ea typeface="Menlo" pitchFamily="34" charset="-122"/>
+                <a:cs typeface="Menlo" pitchFamily="34" charset="-120"/>
+              </a:rPr>
+              <a:t>            ├─[ia]─────► operatorTextObj</a:t>
+            </a:r>
+            <a:endParaRPr lang="en-US" sz="980" dirty="0"/>
+          </a:p>
+          <a:p>
+            <a:pPr indent="0" marL="0">
+              <a:buNone/>
+            </a:pPr>
+            <a:r>
+              <a:rPr lang="en-US" sz="980" dirty="0">
+                <a:solidFill>
+                  <a:srgbClr val="34D399"/>
+                </a:solidFill>
+                <a:latin typeface="Menlo" pitchFamily="34" charset="0"/>
+                <a:ea typeface="Menlo" pitchFamily="34" charset="-122"/>
+                <a:cs typeface="Menlo" pitchFamily="34" charset="-120"/>
+              </a:rPr>
+              <a:t>            └─[fFtT]───► operatorFind</a:t>
+            </a:r>
+            <a:endParaRPr lang="en-US" sz="980" dirty="0"/>
+          </a:p>
+        </p:txBody>
+      </p:sp>
+      <p:sp>
+        <p:nvSpPr>
+          <p:cNvPr id="14" name="Shape 12"/>
+          <p:cNvSpPr/>
+          <p:nvPr/>
+        </p:nvSpPr>
+        <p:spPr>
+          <a:xfrm>
+            <a:off x="5998464" y="1536192"/>
+            <a:ext cx="5577840" cy="2048256"/>
           </a:xfrm>
           <a:prstGeom prst="roundRect">
             <a:avLst>
-              <a:gd name="adj" fmla="val 7955"/>
+              <a:gd name="adj" fmla="val 3125"/>
             </a:avLst>
           </a:prstGeom>
           <a:solidFill>
-            <a:srgbClr val="F5A623"/>
-          </a:solidFill>
-          <a:ln w="12700">
-            <a:solidFill>
-              <a:srgbClr val="F5A623">
-                <a:alpha val="0"/>
+            <a:srgbClr val="1A2640"/>
+          </a:solidFill>
+          <a:ln w="12700">
+            <a:solidFill>
+              <a:srgbClr val="2A3F5F"/>
+            </a:solidFill>
+            <a:prstDash val="solid"/>
+          </a:ln>
+          <a:effectLst>
+            <a:outerShdw sx="100000" sy="100000" kx="0" ky="0" algn="bl" rotWithShape="0" blurRad="19050" dist="4445" dir="2700000">
+              <a:srgbClr val="000000">
+                <a:alpha val="10000"/>
               </a:srgbClr>
-            </a:solidFill>
-            <a:prstDash val="solid"/>
-          </a:ln>
-        </p:spPr>
-      </p:sp>
-      <p:sp>
-        <p:nvSpPr>
-          <p:cNvPr id="13" name="Text 11"/>
-          <p:cNvSpPr/>
-          <p:nvPr/>
-        </p:nvSpPr>
-        <p:spPr>
-          <a:xfrm>
-            <a:off x="621792" y="2029968"/>
-            <a:ext cx="804672" cy="365760"/>
+            </a:outerShdw>
+          </a:effectLst>
+        </p:spPr>
+      </p:sp>
+      <p:sp>
+        <p:nvSpPr>
+          <p:cNvPr id="15" name="Text 13"/>
+          <p:cNvSpPr/>
+          <p:nvPr/>
+        </p:nvSpPr>
+        <p:spPr>
+          <a:xfrm>
+            <a:off x="6181344" y="1664208"/>
+            <a:ext cx="5212080" cy="219456"/>
           </a:xfrm>
           <a:prstGeom prst="rect">
             <a:avLst/>
@@ -20195,84 +20478,45 @@
           <a:bodyPr wrap="square" rtlCol="0" anchor="ctr"/>
           <a:lstStyle/>
           <a:p>
-            <a:pPr algn="ctr" indent="0" marL="0">
-              <a:buNone/>
-            </a:pPr>
-            <a:r>
-              <a:rPr lang="en-US" sz="1600" b="1" dirty="0">
-                <a:solidFill>
-                  <a:srgbClr val="09111F"/>
-                </a:solidFill>
-              </a:rPr>
-              <a:t>01</a:t>
-            </a:r>
-            <a:endParaRPr lang="en-US" sz="1600" dirty="0"/>
-          </a:p>
-        </p:txBody>
-      </p:sp>
-      <p:sp>
-        <p:nvSpPr>
-          <p:cNvPr id="14" name="Text 12"/>
-          <p:cNvSpPr/>
-          <p:nvPr/>
-        </p:nvSpPr>
-        <p:spPr>
-          <a:xfrm>
-            <a:off x="1572768" y="1664208"/>
-            <a:ext cx="9784080" cy="274320"/>
-          </a:xfrm>
-          <a:prstGeom prst="rect">
-            <a:avLst/>
-          </a:prstGeom>
-          <a:noFill/>
-          <a:ln/>
-        </p:spPr>
-        <p:txBody>
-          <a:bodyPr wrap="square" rtlCol="0" anchor="ctr"/>
-          <a:lstStyle/>
-          <a:p>
-            <a:pPr indent="0" marL="0">
-              <a:buNone/>
-            </a:pPr>
-            <a:r>
-              <a:rPr lang="en-US" sz="1350" b="1" dirty="0">
-                <a:solidFill>
-                  <a:srgbClr val="F5A623"/>
-                </a:solidFill>
-              </a:rPr>
-              <a:t>它是 Terminal Agent Runtime，不是「聊天 CLI」</a:t>
-            </a:r>
-            <a:endParaRPr lang="en-US" sz="1350" dirty="0"/>
-          </a:p>
-        </p:txBody>
-      </p:sp>
-      <p:sp>
-        <p:nvSpPr>
-          <p:cNvPr id="15" name="Text 13"/>
-          <p:cNvSpPr/>
-          <p:nvPr/>
-        </p:nvSpPr>
-        <p:spPr>
-          <a:xfrm>
-            <a:off x="1572768" y="1993392"/>
-            <a:ext cx="9692640" cy="822960"/>
-          </a:xfrm>
-          <a:prstGeom prst="rect">
-            <a:avLst/>
-          </a:prstGeom>
-          <a:noFill/>
-          <a:ln/>
-        </p:spPr>
-        <p:txBody>
-          <a:bodyPr wrap="square" rtlCol="0" anchor="ctr">
+            <a:pPr indent="0" marL="0">
+              <a:buNone/>
+            </a:pPr>
+            <a:r>
+              <a:rPr lang="en-US" sz="1250" b="1" dirty="0">
+                <a:solidFill>
+                  <a:srgbClr val="34D399"/>
+                </a:solidFill>
+              </a:rPr>
+              <a:t>实现文件（1,513 行）</a:t>
+            </a:r>
+            <a:endParaRPr lang="en-US" sz="1250" dirty="0"/>
+          </a:p>
+        </p:txBody>
+      </p:sp>
+      <p:sp>
+        <p:nvSpPr>
+          <p:cNvPr id="16" name="Text 14"/>
+          <p:cNvSpPr/>
+          <p:nvPr/>
+        </p:nvSpPr>
+        <p:spPr>
+          <a:xfrm>
+            <a:off x="6181344" y="1956816"/>
+            <a:ext cx="5212080" cy="1536192"/>
+          </a:xfrm>
+          <a:prstGeom prst="rect">
+            <a:avLst/>
+          </a:prstGeom>
+          <a:noFill/>
+          <a:ln/>
+        </p:spPr>
+        <p:txBody>
+          <a:bodyPr wrap="square" lIns="0" tIns="0" rIns="0" bIns="0" rtlCol="0" anchor="t">
             <a:normAutofit/>
           </a:bodyPr>
           <a:lstStyle/>
           <a:p>
             <a:pPr indent="0" marL="0">
-              <a:lnSpc>
-                <a:spcPct val="135000"/>
-              </a:lnSpc>
               <a:buNone/>
             </a:pPr>
             <a:r>
@@ -20281,26 +20525,82 @@
                   <a:srgbClr val="C4CDD8"/>
                 </a:solidFill>
               </a:rPr>
-              <a:t>系统中心是 QueryEngine / query.ts 构成的递归 Agent Loop，而不是终端 UI 本身。UI、Bridge、SDK 只是不同的 surface，共享同一套推理内核。4,683 行的 main.tsx 启动编排直接说明了这是平台级产品。</a:t>
+              <a:t>• types.ts（199 行）——状态机类型即文档</a:t>
             </a:r>
             <a:endParaRPr lang="en-US" sz="1100" dirty="0"/>
           </a:p>
-        </p:txBody>
-      </p:sp>
-      <p:sp>
-        <p:nvSpPr>
-          <p:cNvPr id="16" name="Shape 14"/>
-          <p:cNvSpPr/>
-          <p:nvPr/>
-        </p:nvSpPr>
-        <p:spPr>
-          <a:xfrm>
-            <a:off x="621792" y="3108960"/>
-            <a:ext cx="10954512" cy="1389888"/>
+          <a:p>
+            <a:pPr indent="0" marL="0">
+              <a:buNone/>
+            </a:pPr>
+            <a:r>
+              <a:rPr lang="en-US" sz="1100" dirty="0">
+                <a:solidFill>
+                  <a:srgbClr val="C4CDD8"/>
+                </a:solidFill>
+              </a:rPr>
+              <a:t>• transitions.ts（490 行）——状态转移核心</a:t>
+            </a:r>
+            <a:endParaRPr lang="en-US" sz="1100" dirty="0"/>
+          </a:p>
+          <a:p>
+            <a:pPr indent="0" marL="0">
+              <a:buNone/>
+            </a:pPr>
+            <a:r>
+              <a:rPr lang="en-US" sz="1100" dirty="0">
+                <a:solidFill>
+                  <a:srgbClr val="C4CDD8"/>
+                </a:solidFill>
+              </a:rPr>
+              <a:t>• operators.ts（556 行）——delete / change / yank</a:t>
+            </a:r>
+            <a:endParaRPr lang="en-US" sz="1100" dirty="0"/>
+          </a:p>
+          <a:p>
+            <a:pPr indent="0" marL="0">
+              <a:buNone/>
+            </a:pPr>
+            <a:r>
+              <a:rPr lang="en-US" sz="1100" dirty="0">
+                <a:solidFill>
+                  <a:srgbClr val="C4CDD8"/>
+                </a:solidFill>
+              </a:rPr>
+              <a:t>• textObjects.ts（186 行）——w W ( [ { &lt; " ' ` …</a:t>
+            </a:r>
+            <a:endParaRPr lang="en-US" sz="1100" dirty="0"/>
+          </a:p>
+          <a:p>
+            <a:pPr indent="0" marL="0">
+              <a:buNone/>
+            </a:pPr>
+            <a:r>
+              <a:rPr lang="en-US" sz="1100" dirty="0">
+                <a:solidFill>
+                  <a:srgbClr val="C4CDD8"/>
+                </a:solidFill>
+              </a:rPr>
+              <a:t>• motions.ts（82 行）——h j k l w b e ^ $ …</a:t>
+            </a:r>
+            <a:endParaRPr lang="en-US" sz="1100" dirty="0"/>
+          </a:p>
+        </p:txBody>
+      </p:sp>
+      <p:sp>
+        <p:nvSpPr>
+          <p:cNvPr id="17" name="Shape 15"/>
+          <p:cNvSpPr/>
+          <p:nvPr/>
+        </p:nvSpPr>
+        <p:spPr>
+          <a:xfrm>
+            <a:off x="5998464" y="3730752"/>
+            <a:ext cx="5577840" cy="2267712"/>
           </a:xfrm>
           <a:prstGeom prst="roundRect">
             <a:avLst>
-              <a:gd name="adj" fmla="val 4605"/>
+              <a:gd name="adj" fmla="val 2823"/>
             </a:avLst>
           </a:prstGeom>
           <a:solidFill>
@@ -20308,39 +20608,17 @@
           </a:solidFill>
           <a:ln w="12700">
             <a:solidFill>
-              <a:srgbClr val="FB923C"/>
-            </a:solidFill>
-            <a:prstDash val="solid"/>
-          </a:ln>
-        </p:spPr>
-      </p:sp>
-      <p:sp>
-        <p:nvSpPr>
-          <p:cNvPr id="17" name="Shape 15"/>
-          <p:cNvSpPr/>
-          <p:nvPr/>
-        </p:nvSpPr>
-        <p:spPr>
-          <a:xfrm>
-            <a:off x="621792" y="3108960"/>
-            <a:ext cx="804672" cy="1389888"/>
-          </a:xfrm>
-          <a:prstGeom prst="roundRect">
-            <a:avLst>
-              <a:gd name="adj" fmla="val 7955"/>
-            </a:avLst>
-          </a:prstGeom>
-          <a:solidFill>
-            <a:srgbClr val="FB923C"/>
-          </a:solidFill>
-          <a:ln w="12700">
-            <a:solidFill>
-              <a:srgbClr val="FB923C">
-                <a:alpha val="0"/>
+              <a:srgbClr val="2A3F5F"/>
+            </a:solidFill>
+            <a:prstDash val="solid"/>
+          </a:ln>
+          <a:effectLst>
+            <a:outerShdw sx="100000" sy="100000" kx="0" ky="0" algn="bl" rotWithShape="0" blurRad="19050" dist="4445" dir="2700000">
+              <a:srgbClr val="000000">
+                <a:alpha val="10000"/>
               </a:srgbClr>
-            </a:solidFill>
-            <a:prstDash val="solid"/>
-          </a:ln>
+            </a:outerShdw>
+          </a:effectLst>
         </p:spPr>
       </p:sp>
       <p:sp>
@@ -20351,8 +20629,8 @@
         </p:nvSpPr>
         <p:spPr>
           <a:xfrm>
-            <a:off x="621792" y="3584448"/>
-            <a:ext cx="804672" cy="365760"/>
+            <a:off x="6181344" y="3858768"/>
+            <a:ext cx="5212080" cy="219456"/>
           </a:xfrm>
           <a:prstGeom prst="rect">
             <a:avLst/>
@@ -20364,18 +20642,18 @@
           <a:bodyPr wrap="square" rtlCol="0" anchor="ctr"/>
           <a:lstStyle/>
           <a:p>
-            <a:pPr algn="ctr" indent="0" marL="0">
-              <a:buNone/>
-            </a:pPr>
-            <a:r>
-              <a:rPr lang="en-US" sz="1600" b="1" dirty="0">
-                <a:solidFill>
-                  <a:srgbClr val="09111F"/>
-                </a:solidFill>
-              </a:rPr>
-              <a:t>02</a:t>
-            </a:r>
-            <a:endParaRPr lang="en-US" sz="1600" dirty="0"/>
+            <a:pPr indent="0" marL="0">
+              <a:buNone/>
+            </a:pPr>
+            <a:r>
+              <a:rPr lang="en-US" sz="1250" b="1" dirty="0">
+                <a:solidFill>
+                  <a:srgbClr val="22D3EE"/>
+                </a:solidFill>
+              </a:rPr>
+              <a:t>支持特性（源码验证）</a:t>
+            </a:r>
+            <a:endParaRPr lang="en-US" sz="1250" dirty="0"/>
           </a:p>
         </p:txBody>
       </p:sp>
@@ -20387,61 +20665,22 @@
         </p:nvSpPr>
         <p:spPr>
           <a:xfrm>
-            <a:off x="1572768" y="3218688"/>
-            <a:ext cx="9784080" cy="274320"/>
-          </a:xfrm>
-          <a:prstGeom prst="rect">
-            <a:avLst/>
-          </a:prstGeom>
-          <a:noFill/>
-          <a:ln/>
-        </p:spPr>
-        <p:txBody>
-          <a:bodyPr wrap="square" rtlCol="0" anchor="ctr"/>
-          <a:lstStyle/>
-          <a:p>
-            <a:pPr indent="0" marL="0">
-              <a:buNone/>
-            </a:pPr>
-            <a:r>
-              <a:rPr lang="en-US" sz="1350" b="1" dirty="0">
-                <a:solidFill>
-                  <a:srgbClr val="FB923C"/>
-                </a:solidFill>
-              </a:rPr>
-              <a:t>权限系统是架构必需品，不是后期添加的防护</a:t>
-            </a:r>
-            <a:endParaRPr lang="en-US" sz="1350" dirty="0"/>
-          </a:p>
-        </p:txBody>
-      </p:sp>
-      <p:sp>
-        <p:nvSpPr>
-          <p:cNvPr id="20" name="Text 18"/>
-          <p:cNvSpPr/>
-          <p:nvPr/>
-        </p:nvSpPr>
-        <p:spPr>
-          <a:xfrm>
-            <a:off x="1572768" y="3547872"/>
-            <a:ext cx="9692640" cy="822960"/>
-          </a:xfrm>
-          <a:prstGeom prst="rect">
-            <a:avLst/>
-          </a:prstGeom>
-          <a:noFill/>
-          <a:ln/>
-        </p:spPr>
-        <p:txBody>
-          <a:bodyPr wrap="square" rtlCol="0" anchor="ctr">
+            <a:off x="6181344" y="4151376"/>
+            <a:ext cx="5212080" cy="1755648"/>
+          </a:xfrm>
+          <a:prstGeom prst="rect">
+            <a:avLst/>
+          </a:prstGeom>
+          <a:noFill/>
+          <a:ln/>
+        </p:spPr>
+        <p:txBody>
+          <a:bodyPr wrap="square" lIns="0" tIns="0" rIns="0" bIns="0" rtlCol="0" anchor="t">
             <a:normAutofit/>
           </a:bodyPr>
           <a:lstStyle/>
           <a:p>
             <a:pPr indent="0" marL="0">
-              <a:lnSpc>
-                <a:spcPct val="135000"/>
-              </a:lnSpc>
               <a:buNone/>
             </a:pPr>
             <a:r>
@@ -20450,167 +20689,12 @@
                   <a:srgbClr val="C4CDD8"/>
                 </a:solidFill>
               </a:rPr>
-              <a:t>Hook + Rules + Classifier + Mode 四层构成的权限决策树，位于工具执行的主路径上，不是可绕过的 middleware。这使它能同时服务本地开发者、企业策略和 headless 自动化场景。</a:t>
+              <a:t>• 完整 operators：delete(d) / change(c) / yank(y)</a:t>
             </a:r>
             <a:endParaRPr lang="en-US" sz="1100" dirty="0"/>
           </a:p>
-        </p:txBody>
-      </p:sp>
-      <p:sp>
-        <p:nvSpPr>
-          <p:cNvPr id="21" name="Shape 19"/>
-          <p:cNvSpPr/>
-          <p:nvPr/>
-        </p:nvSpPr>
-        <p:spPr>
-          <a:xfrm>
-            <a:off x="621792" y="4663440"/>
-            <a:ext cx="10954512" cy="1389888"/>
-          </a:xfrm>
-          <a:prstGeom prst="roundRect">
-            <a:avLst>
-              <a:gd name="adj" fmla="val 4605"/>
-            </a:avLst>
-          </a:prstGeom>
-          <a:solidFill>
-            <a:srgbClr val="162035"/>
-          </a:solidFill>
-          <a:ln w="12700">
-            <a:solidFill>
-              <a:srgbClr val="A78BFA"/>
-            </a:solidFill>
-            <a:prstDash val="solid"/>
-          </a:ln>
-        </p:spPr>
-      </p:sp>
-      <p:sp>
-        <p:nvSpPr>
-          <p:cNvPr id="22" name="Shape 20"/>
-          <p:cNvSpPr/>
-          <p:nvPr/>
-        </p:nvSpPr>
-        <p:spPr>
-          <a:xfrm>
-            <a:off x="621792" y="4663440"/>
-            <a:ext cx="804672" cy="1389888"/>
-          </a:xfrm>
-          <a:prstGeom prst="roundRect">
-            <a:avLst>
-              <a:gd name="adj" fmla="val 7955"/>
-            </a:avLst>
-          </a:prstGeom>
-          <a:solidFill>
-            <a:srgbClr val="A78BFA"/>
-          </a:solidFill>
-          <a:ln w="12700">
-            <a:solidFill>
-              <a:srgbClr val="A78BFA">
-                <a:alpha val="0"/>
-              </a:srgbClr>
-            </a:solidFill>
-            <a:prstDash val="solid"/>
-          </a:ln>
-        </p:spPr>
-      </p:sp>
-      <p:sp>
-        <p:nvSpPr>
-          <p:cNvPr id="23" name="Text 21"/>
-          <p:cNvSpPr/>
-          <p:nvPr/>
-        </p:nvSpPr>
-        <p:spPr>
-          <a:xfrm>
-            <a:off x="621792" y="5138928"/>
-            <a:ext cx="804672" cy="365760"/>
-          </a:xfrm>
-          <a:prstGeom prst="rect">
-            <a:avLst/>
-          </a:prstGeom>
-          <a:noFill/>
-          <a:ln/>
-        </p:spPr>
-        <p:txBody>
-          <a:bodyPr wrap="square" rtlCol="0" anchor="ctr"/>
-          <a:lstStyle/>
-          <a:p>
-            <a:pPr algn="ctr" indent="0" marL="0">
-              <a:buNone/>
-            </a:pPr>
-            <a:r>
-              <a:rPr lang="en-US" sz="1600" b="1" dirty="0">
-                <a:solidFill>
-                  <a:srgbClr val="09111F"/>
-                </a:solidFill>
-              </a:rPr>
-              <a:t>03</a:t>
-            </a:r>
-            <a:endParaRPr lang="en-US" sz="1600" dirty="0"/>
-          </a:p>
-        </p:txBody>
-      </p:sp>
-      <p:sp>
-        <p:nvSpPr>
-          <p:cNvPr id="24" name="Text 22"/>
-          <p:cNvSpPr/>
-          <p:nvPr/>
-        </p:nvSpPr>
-        <p:spPr>
-          <a:xfrm>
-            <a:off x="1572768" y="4773168"/>
-            <a:ext cx="9784080" cy="274320"/>
-          </a:xfrm>
-          <a:prstGeom prst="rect">
-            <a:avLst/>
-          </a:prstGeom>
-          <a:noFill/>
-          <a:ln/>
-        </p:spPr>
-        <p:txBody>
-          <a:bodyPr wrap="square" rtlCol="0" anchor="ctr"/>
-          <a:lstStyle/>
-          <a:p>
-            <a:pPr indent="0" marL="0">
-              <a:buNone/>
-            </a:pPr>
-            <a:r>
-              <a:rPr lang="en-US" sz="1350" b="1" dirty="0">
-                <a:solidFill>
-                  <a:srgbClr val="A78BFA"/>
-                </a:solidFill>
-              </a:rPr>
-              <a:t>多 Agent 是可治理的 Actor 系统，不是并发调用模型</a:t>
-            </a:r>
-            <a:endParaRPr lang="en-US" sz="1350" dirty="0"/>
-          </a:p>
-        </p:txBody>
-      </p:sp>
-      <p:sp>
-        <p:nvSpPr>
-          <p:cNvPr id="25" name="Text 23"/>
-          <p:cNvSpPr/>
-          <p:nvPr/>
-        </p:nvSpPr>
-        <p:spPr>
-          <a:xfrm>
-            <a:off x="1572768" y="5102352"/>
-            <a:ext cx="9692640" cy="822960"/>
-          </a:xfrm>
-          <a:prstGeom prst="rect">
-            <a:avLst/>
-          </a:prstGeom>
-          <a:noFill/>
-          <a:ln/>
-        </p:spPr>
-        <p:txBody>
-          <a:bodyPr wrap="square" rtlCol="0" anchor="ctr">
-            <a:normAutofit/>
-          </a:bodyPr>
-          <a:lstStyle/>
-          <a:p>
-            <a:pPr indent="0" marL="0">
-              <a:lnSpc>
-                <a:spcPct val="135000"/>
-              </a:lnSpc>
+          <a:p>
+            <a:pPr indent="0" marL="0">
               <a:buNone/>
             </a:pPr>
             <a:r>
@@ -20619,7 +20703,77 @@
                   <a:srgbClr val="C4CDD8"/>
                 </a:solidFill>
               </a:rPr>
-              <a:t>inProcessRunner 的 Actor 模型（mailbox + task claim + idle loop）+ 权限 bridge 机制，让子代理在不绕开任何治理的情况下真正协作。这才是「multi-agent」从概念变成工程的关键。</a:t>
+              <a:t>• Text objects：word / WORD / 括号 / 引号 / 花括号</a:t>
+            </a:r>
+            <a:endParaRPr lang="en-US" sz="1100" dirty="0"/>
+          </a:p>
+          <a:p>
+            <a:pPr indent="0" marL="0">
+              <a:buNone/>
+            </a:pPr>
+            <a:r>
+              <a:rPr lang="en-US" sz="1100" dirty="0">
+                <a:solidFill>
+                  <a:srgbClr val="C4CDD8"/>
+                </a:solidFill>
+              </a:rPr>
+              <a:t>• Find motions：f F t T（含反向）</a:t>
+            </a:r>
+            <a:endParaRPr lang="en-US" sz="1100" dirty="0"/>
+          </a:p>
+          <a:p>
+            <a:pPr indent="0" marL="0">
+              <a:buNone/>
+            </a:pPr>
+            <a:r>
+              <a:rPr lang="en-US" sz="1100" dirty="0">
+                <a:solidFill>
+                  <a:srgbClr val="C4CDD8"/>
+                </a:solidFill>
+              </a:rPr>
+              <a:t>• Count prefix：3dw / 2dd / 5j 等</a:t>
+            </a:r>
+            <a:endParaRPr lang="en-US" sz="1100" dirty="0"/>
+          </a:p>
+          <a:p>
+            <a:pPr indent="0" marL="0">
+              <a:buNone/>
+            </a:pPr>
+            <a:r>
+              <a:rPr lang="en-US" sz="1100" dirty="0">
+                <a:solidFill>
+                  <a:srgbClr val="C4CDD8"/>
+                </a:solidFill>
+              </a:rPr>
+              <a:t>• Dot-repeat（.）：RecordedChange 记录完整重放</a:t>
+            </a:r>
+            <a:endParaRPr lang="en-US" sz="1100" dirty="0"/>
+          </a:p>
+          <a:p>
+            <a:pPr indent="0" marL="0">
+              <a:buNone/>
+            </a:pPr>
+            <a:r>
+              <a:rPr lang="en-US" sz="1100" dirty="0">
+                <a:solidFill>
+                  <a:srgbClr val="C4CDD8"/>
+                </a:solidFill>
+              </a:rPr>
+              <a:t>• Register：yank/paste 寄存器 + linewise 标记</a:t>
+            </a:r>
+            <a:endParaRPr lang="en-US" sz="1100" dirty="0"/>
+          </a:p>
+          <a:p>
+            <a:pPr indent="0" marL="0">
+              <a:buNone/>
+            </a:pPr>
+            <a:r>
+              <a:rPr lang="en-US" sz="1100" dirty="0">
+                <a:solidFill>
+                  <a:srgbClr val="C4CDD8"/>
+                </a:solidFill>
+              </a:rPr>
+              <a:t>• MAX_VIM_COUNT = 10000（防止卡死）</a:t>
             </a:r>
             <a:endParaRPr lang="en-US" sz="1100" dirty="0"/>
           </a:p>
@@ -20672,6 +20826,4213 @@
             <a:avLst/>
           </a:prstGeom>
           <a:solidFill>
+            <a:srgbClr val="A78BFA"/>
+          </a:solidFill>
+          <a:ln w="12700">
+            <a:solidFill>
+              <a:srgbClr val="A78BFA">
+                <a:alpha val="0"/>
+              </a:srgbClr>
+            </a:solidFill>
+            <a:prstDash val="solid"/>
+          </a:ln>
+        </p:spPr>
+      </p:sp>
+      <p:sp>
+        <p:nvSpPr>
+          <p:cNvPr id="3" name="Shape 1"/>
+          <p:cNvSpPr/>
+          <p:nvPr/>
+        </p:nvSpPr>
+        <p:spPr>
+          <a:xfrm>
+            <a:off x="621792" y="274320"/>
+            <a:ext cx="1065276" cy="201168"/>
+          </a:xfrm>
+          <a:prstGeom prst="roundRect">
+            <a:avLst>
+              <a:gd name="adj" fmla="val 18182"/>
+            </a:avLst>
+          </a:prstGeom>
+          <a:solidFill>
+            <a:srgbClr val="1E2E4A"/>
+          </a:solidFill>
+          <a:ln w="12700">
+            <a:solidFill>
+              <a:srgbClr val="A78BFA"/>
+            </a:solidFill>
+            <a:prstDash val="solid"/>
+          </a:ln>
+        </p:spPr>
+      </p:sp>
+      <p:sp>
+        <p:nvSpPr>
+          <p:cNvPr id="4" name="Text 2"/>
+          <p:cNvSpPr/>
+          <p:nvPr/>
+        </p:nvSpPr>
+        <p:spPr>
+          <a:xfrm>
+            <a:off x="658368" y="288036"/>
+            <a:ext cx="3200400" cy="164592"/>
+          </a:xfrm>
+          <a:prstGeom prst="rect">
+            <a:avLst/>
+          </a:prstGeom>
+          <a:noFill/>
+          <a:ln/>
+        </p:spPr>
+        <p:txBody>
+          <a:bodyPr wrap="square" rtlCol="0" anchor="ctr"/>
+          <a:lstStyle/>
+          <a:p>
+            <a:pPr indent="0" marL="0">
+              <a:buNone/>
+            </a:pPr>
+            <a:r>
+              <a:rPr lang="en-US" sz="950" b="1" dirty="0">
+                <a:solidFill>
+                  <a:srgbClr val="A78BFA"/>
+                </a:solidFill>
+              </a:rPr>
+              <a:t>特色功能 · 04</a:t>
+            </a:r>
+            <a:endParaRPr lang="en-US" sz="950" dirty="0"/>
+          </a:p>
+        </p:txBody>
+      </p:sp>
+      <p:sp>
+        <p:nvSpPr>
+          <p:cNvPr id="5" name="Text 3"/>
+          <p:cNvSpPr/>
+          <p:nvPr/>
+        </p:nvSpPr>
+        <p:spPr>
+          <a:xfrm>
+            <a:off x="658368" y="548640"/>
+            <a:ext cx="10515600" cy="530352"/>
+          </a:xfrm>
+          <a:prstGeom prst="rect">
+            <a:avLst/>
+          </a:prstGeom>
+          <a:noFill/>
+          <a:ln/>
+        </p:spPr>
+        <p:txBody>
+          <a:bodyPr wrap="square" rtlCol="0" anchor="ctr">
+            <a:normAutofit/>
+          </a:bodyPr>
+          <a:lstStyle/>
+          <a:p>
+            <a:pPr indent="0" marL="0">
+              <a:buNone/>
+            </a:pPr>
+            <a:r>
+              <a:rPr lang="en-US" sz="2200" b="1" dirty="0">
+                <a:solidFill>
+                  <a:srgbClr val="E8EDF5"/>
+                </a:solidFill>
+              </a:rPr>
+              <a:t>Buddy：你的 AI 伴侣——18 个物种、5 个稀有度、确定性孵化算法</a:t>
+            </a:r>
+            <a:endParaRPr lang="en-US" sz="2200" dirty="0"/>
+          </a:p>
+        </p:txBody>
+      </p:sp>
+      <p:sp>
+        <p:nvSpPr>
+          <p:cNvPr id="6" name="Text 4"/>
+          <p:cNvSpPr/>
+          <p:nvPr/>
+        </p:nvSpPr>
+        <p:spPr>
+          <a:xfrm>
+            <a:off x="658368" y="1115568"/>
+            <a:ext cx="10515600" cy="256032"/>
+          </a:xfrm>
+          <a:prstGeom prst="rect">
+            <a:avLst/>
+          </a:prstGeom>
+          <a:noFill/>
+          <a:ln/>
+        </p:spPr>
+        <p:txBody>
+          <a:bodyPr wrap="square" rtlCol="0" anchor="ctr"/>
+          <a:lstStyle/>
+          <a:p>
+            <a:pPr indent="0" marL="0">
+              <a:buNone/>
+            </a:pPr>
+            <a:r>
+              <a:rPr lang="en-US" sz="1150" dirty="0">
+                <a:solidFill>
+                  <a:srgbClr val="8A9BB5"/>
+                </a:solidFill>
+              </a:rPr>
+              <a:t>源码里的隐藏彩蛋：2026 年 4 月 1 日 Teaser 窗口，基于 userId hash 生成唯一伴侣。</a:t>
+            </a:r>
+            <a:endParaRPr lang="en-US" sz="1150" dirty="0"/>
+          </a:p>
+        </p:txBody>
+      </p:sp>
+      <p:sp>
+        <p:nvSpPr>
+          <p:cNvPr id="7" name="Shape 5"/>
+          <p:cNvSpPr/>
+          <p:nvPr/>
+        </p:nvSpPr>
+        <p:spPr>
+          <a:xfrm>
+            <a:off x="594360" y="6254496"/>
+            <a:ext cx="11002975" cy="13716"/>
+          </a:xfrm>
+          <a:prstGeom prst="rect">
+            <a:avLst/>
+          </a:prstGeom>
+          <a:solidFill>
+            <a:srgbClr val="2A3F5F"/>
+          </a:solidFill>
+          <a:ln w="12700">
+            <a:solidFill>
+              <a:srgbClr val="2A3F5F">
+                <a:alpha val="0"/>
+              </a:srgbClr>
+            </a:solidFill>
+            <a:prstDash val="solid"/>
+          </a:ln>
+        </p:spPr>
+      </p:sp>
+      <p:sp>
+        <p:nvSpPr>
+          <p:cNvPr id="8" name="Text 6"/>
+          <p:cNvSpPr/>
+          <p:nvPr/>
+        </p:nvSpPr>
+        <p:spPr>
+          <a:xfrm>
+            <a:off x="658368" y="6309360"/>
+            <a:ext cx="7772400" cy="164592"/>
+          </a:xfrm>
+          <a:prstGeom prst="rect">
+            <a:avLst/>
+          </a:prstGeom>
+          <a:noFill/>
+          <a:ln/>
+        </p:spPr>
+        <p:txBody>
+          <a:bodyPr wrap="square" rtlCol="0" anchor="ctr"/>
+          <a:lstStyle/>
+          <a:p>
+            <a:pPr indent="0" marL="0">
+              <a:buNone/>
+            </a:pPr>
+            <a:r>
+              <a:rPr lang="en-US" sz="780" dirty="0">
+                <a:solidFill>
+                  <a:srgbClr val="8A9BB5"/>
+                </a:solidFill>
+              </a:rPr>
+              <a:t>Claude Code Sourcemap 源码解读 · 仅供研究</a:t>
+            </a:r>
+            <a:endParaRPr lang="en-US" sz="780" dirty="0"/>
+          </a:p>
+        </p:txBody>
+      </p:sp>
+      <p:sp>
+        <p:nvSpPr>
+          <p:cNvPr id="9" name="Shape 7"/>
+          <p:cNvSpPr/>
+          <p:nvPr/>
+        </p:nvSpPr>
+        <p:spPr>
+          <a:xfrm>
+            <a:off x="11228832" y="6364224"/>
+            <a:ext cx="73152" cy="73152"/>
+          </a:xfrm>
+          <a:prstGeom prst="rect">
+            <a:avLst/>
+          </a:prstGeom>
+          <a:solidFill>
+            <a:srgbClr val="A78BFA"/>
+          </a:solidFill>
+          <a:ln w="12700">
+            <a:solidFill>
+              <a:srgbClr val="A78BFA">
+                <a:alpha val="0"/>
+              </a:srgbClr>
+            </a:solidFill>
+            <a:prstDash val="solid"/>
+          </a:ln>
+        </p:spPr>
+      </p:sp>
+      <p:sp>
+        <p:nvSpPr>
+          <p:cNvPr id="10" name="Text 8"/>
+          <p:cNvSpPr/>
+          <p:nvPr/>
+        </p:nvSpPr>
+        <p:spPr>
+          <a:xfrm>
+            <a:off x="10698480" y="6291072"/>
+            <a:ext cx="502920" cy="164592"/>
+          </a:xfrm>
+          <a:prstGeom prst="rect">
+            <a:avLst/>
+          </a:prstGeom>
+          <a:noFill/>
+          <a:ln/>
+        </p:spPr>
+        <p:txBody>
+          <a:bodyPr wrap="square" rtlCol="0" anchor="ctr"/>
+          <a:lstStyle/>
+          <a:p>
+            <a:pPr algn="r" indent="0" marL="0">
+              <a:buNone/>
+            </a:pPr>
+            <a:r>
+              <a:rPr lang="en-US" sz="820" b="1" dirty="0">
+                <a:solidFill>
+                  <a:srgbClr val="B0BDD0"/>
+                </a:solidFill>
+              </a:rPr>
+              <a:t>24</a:t>
+            </a:r>
+            <a:endParaRPr lang="en-US" sz="820" dirty="0"/>
+          </a:p>
+        </p:txBody>
+      </p:sp>
+      <p:sp>
+        <p:nvSpPr>
+          <p:cNvPr id="11" name="Shape 9"/>
+          <p:cNvSpPr/>
+          <p:nvPr/>
+        </p:nvSpPr>
+        <p:spPr>
+          <a:xfrm>
+            <a:off x="621792" y="1536192"/>
+            <a:ext cx="5230368" cy="4462272"/>
+          </a:xfrm>
+          <a:prstGeom prst="roundRect">
+            <a:avLst>
+              <a:gd name="adj" fmla="val 1434"/>
+            </a:avLst>
+          </a:prstGeom>
+          <a:solidFill>
+            <a:srgbClr val="162035"/>
+          </a:solidFill>
+          <a:ln w="12700">
+            <a:solidFill>
+              <a:srgbClr val="2A3F5F"/>
+            </a:solidFill>
+            <a:prstDash val="solid"/>
+          </a:ln>
+          <a:effectLst>
+            <a:outerShdw sx="100000" sy="100000" kx="0" ky="0" algn="bl" rotWithShape="0" blurRad="19050" dist="4445" dir="2700000">
+              <a:srgbClr val="000000">
+                <a:alpha val="10000"/>
+              </a:srgbClr>
+            </a:outerShdw>
+          </a:effectLst>
+        </p:spPr>
+      </p:sp>
+      <p:sp>
+        <p:nvSpPr>
+          <p:cNvPr id="12" name="Text 10"/>
+          <p:cNvSpPr/>
+          <p:nvPr/>
+        </p:nvSpPr>
+        <p:spPr>
+          <a:xfrm>
+            <a:off x="804672" y="1664208"/>
+            <a:ext cx="4864608" cy="219456"/>
+          </a:xfrm>
+          <a:prstGeom prst="rect">
+            <a:avLst/>
+          </a:prstGeom>
+          <a:noFill/>
+          <a:ln/>
+        </p:spPr>
+        <p:txBody>
+          <a:bodyPr wrap="square" rtlCol="0" anchor="ctr"/>
+          <a:lstStyle/>
+          <a:p>
+            <a:pPr indent="0" marL="0">
+              <a:buNone/>
+            </a:pPr>
+            <a:r>
+              <a:rPr lang="en-US" sz="1250" b="1" dirty="0">
+                <a:solidFill>
+                  <a:srgbClr val="A78BFA"/>
+                </a:solidFill>
+              </a:rPr>
+              <a:t>角色生成系统（1,298 行）</a:t>
+            </a:r>
+            <a:endParaRPr lang="en-US" sz="1250" dirty="0"/>
+          </a:p>
+        </p:txBody>
+      </p:sp>
+      <p:sp>
+        <p:nvSpPr>
+          <p:cNvPr id="13" name="Text 11"/>
+          <p:cNvSpPr/>
+          <p:nvPr/>
+        </p:nvSpPr>
+        <p:spPr>
+          <a:xfrm>
+            <a:off x="804672" y="1956816"/>
+            <a:ext cx="4864608" cy="3950208"/>
+          </a:xfrm>
+          <a:prstGeom prst="rect">
+            <a:avLst/>
+          </a:prstGeom>
+          <a:noFill/>
+          <a:ln/>
+        </p:spPr>
+        <p:txBody>
+          <a:bodyPr wrap="square" lIns="0" tIns="0" rIns="0" bIns="0" rtlCol="0" anchor="t">
+            <a:normAutofit/>
+          </a:bodyPr>
+          <a:lstStyle/>
+          <a:p>
+            <a:pPr indent="0" marL="0">
+              <a:buNone/>
+            </a:pPr>
+            <a:r>
+              <a:rPr lang="en-US" sz="1050" dirty="0">
+                <a:solidFill>
+                  <a:srgbClr val="C4CDD8"/>
+                </a:solidFill>
+              </a:rPr>
+              <a:t>• 18 种物种：duck / goose / cat / dragon / octopus /</a:t>
+            </a:r>
+            <a:endParaRPr lang="en-US" sz="1050" dirty="0"/>
+          </a:p>
+          <a:p>
+            <a:pPr indent="0" marL="0">
+              <a:buNone/>
+            </a:pPr>
+            <a:r>
+              <a:rPr lang="en-US" sz="1050" dirty="0">
+                <a:solidFill>
+                  <a:srgbClr val="C4CDD8"/>
+                </a:solidFill>
+              </a:rPr>
+              <a:t>•   owl / penguin / turtle / snail / ghost / axolotl /</a:t>
+            </a:r>
+            <a:endParaRPr lang="en-US" sz="1050" dirty="0"/>
+          </a:p>
+          <a:p>
+            <a:pPr indent="0" marL="0">
+              <a:buNone/>
+            </a:pPr>
+            <a:r>
+              <a:rPr lang="en-US" sz="1050" dirty="0">
+                <a:solidFill>
+                  <a:srgbClr val="C4CDD8"/>
+                </a:solidFill>
+              </a:rPr>
+              <a:t>•   capybara / cactus / robot / rabbit / mushroom / chonk / blob</a:t>
+            </a:r>
+            <a:endParaRPr lang="en-US" sz="1050" dirty="0"/>
+          </a:p>
+          <a:p>
+            <a:pPr indent="0" marL="0">
+              <a:buNone/>
+            </a:pPr>
+            <a:r>
+              <a:rPr lang="en-US" sz="1050" dirty="0">
+                <a:solidFill>
+                  <a:srgbClr val="C4CDD8"/>
+                </a:solidFill>
+              </a:rPr>
+              <a:t>• </a:t>
+            </a:r>
+            <a:endParaRPr lang="en-US" sz="1050" dirty="0"/>
+          </a:p>
+          <a:p>
+            <a:pPr indent="0" marL="0">
+              <a:buNone/>
+            </a:pPr>
+            <a:r>
+              <a:rPr lang="en-US" sz="1050" dirty="0">
+                <a:solidFill>
+                  <a:srgbClr val="C4CDD8"/>
+                </a:solidFill>
+              </a:rPr>
+              <a:t>• 5 个稀有度（按权重）：</a:t>
+            </a:r>
+            <a:endParaRPr lang="en-US" sz="1050" dirty="0"/>
+          </a:p>
+          <a:p>
+            <a:pPr indent="0" marL="0">
+              <a:buNone/>
+            </a:pPr>
+            <a:r>
+              <a:rPr lang="en-US" sz="1050" dirty="0">
+                <a:solidFill>
+                  <a:srgbClr val="C4CDD8"/>
+                </a:solidFill>
+              </a:rPr>
+              <a:t>•   common 60% / uncommon 25% / rare 10%</a:t>
+            </a:r>
+            <a:endParaRPr lang="en-US" sz="1050" dirty="0"/>
+          </a:p>
+          <a:p>
+            <a:pPr indent="0" marL="0">
+              <a:buNone/>
+            </a:pPr>
+            <a:r>
+              <a:rPr lang="en-US" sz="1050" dirty="0">
+                <a:solidFill>
+                  <a:srgbClr val="C4CDD8"/>
+                </a:solidFill>
+              </a:rPr>
+              <a:t>•   epic 4% / legendary 1%</a:t>
+            </a:r>
+            <a:endParaRPr lang="en-US" sz="1050" dirty="0"/>
+          </a:p>
+          <a:p>
+            <a:pPr indent="0" marL="0">
+              <a:buNone/>
+            </a:pPr>
+            <a:r>
+              <a:rPr lang="en-US" sz="1050" dirty="0">
+                <a:solidFill>
+                  <a:srgbClr val="C4CDD8"/>
+                </a:solidFill>
+              </a:rPr>
+              <a:t>• </a:t>
+            </a:r>
+            <a:endParaRPr lang="en-US" sz="1050" dirty="0"/>
+          </a:p>
+          <a:p>
+            <a:pPr indent="0" marL="0">
+              <a:buNone/>
+            </a:pPr>
+            <a:r>
+              <a:rPr lang="en-US" sz="1050" dirty="0">
+                <a:solidFill>
+                  <a:srgbClr val="C4CDD8"/>
+                </a:solidFill>
+              </a:rPr>
+              <a:t>• 6 种眼睛：· ✦ × ◉ @ °</a:t>
+            </a:r>
+            <a:endParaRPr lang="en-US" sz="1050" dirty="0"/>
+          </a:p>
+          <a:p>
+            <a:pPr indent="0" marL="0">
+              <a:buNone/>
+            </a:pPr>
+            <a:r>
+              <a:rPr lang="en-US" sz="1050" dirty="0">
+                <a:solidFill>
+                  <a:srgbClr val="C4CDD8"/>
+                </a:solidFill>
+              </a:rPr>
+              <a:t>• 8 种帽子：crown / tophat / propeller / halo /</a:t>
+            </a:r>
+            <a:endParaRPr lang="en-US" sz="1050" dirty="0"/>
+          </a:p>
+          <a:p>
+            <a:pPr indent="0" marL="0">
+              <a:buNone/>
+            </a:pPr>
+            <a:r>
+              <a:rPr lang="en-US" sz="1050" dirty="0">
+                <a:solidFill>
+                  <a:srgbClr val="C4CDD8"/>
+                </a:solidFill>
+              </a:rPr>
+              <a:t>•   wizard / beanie / tinyduck（common 无帽子）</a:t>
+            </a:r>
+            <a:endParaRPr lang="en-US" sz="1050" dirty="0"/>
+          </a:p>
+          <a:p>
+            <a:pPr indent="0" marL="0">
+              <a:buNone/>
+            </a:pPr>
+            <a:r>
+              <a:rPr lang="en-US" sz="1050" dirty="0">
+                <a:solidFill>
+                  <a:srgbClr val="C4CDD8"/>
+                </a:solidFill>
+              </a:rPr>
+              <a:t>• Shiny 概率：1%</a:t>
+            </a:r>
+            <a:endParaRPr lang="en-US" sz="1050" dirty="0"/>
+          </a:p>
+          <a:p>
+            <a:pPr indent="0" marL="0">
+              <a:buNone/>
+            </a:pPr>
+            <a:r>
+              <a:rPr lang="en-US" sz="1050" dirty="0">
+                <a:solidFill>
+                  <a:srgbClr val="C4CDD8"/>
+                </a:solidFill>
+              </a:rPr>
+              <a:t>• </a:t>
+            </a:r>
+            <a:endParaRPr lang="en-US" sz="1050" dirty="0"/>
+          </a:p>
+          <a:p>
+            <a:pPr indent="0" marL="0">
+              <a:buNone/>
+            </a:pPr>
+            <a:r>
+              <a:rPr lang="en-US" sz="1050" dirty="0">
+                <a:solidFill>
+                  <a:srgbClr val="C4CDD8"/>
+                </a:solidFill>
+              </a:rPr>
+              <a:t>• 5 维属性：DEBUGGING / PATIENCE / CHAOS / WISDOM / SNARK</a:t>
+            </a:r>
+            <a:endParaRPr lang="en-US" sz="1050" dirty="0"/>
+          </a:p>
+        </p:txBody>
+      </p:sp>
+      <p:sp>
+        <p:nvSpPr>
+          <p:cNvPr id="14" name="Shape 12"/>
+          <p:cNvSpPr/>
+          <p:nvPr/>
+        </p:nvSpPr>
+        <p:spPr>
+          <a:xfrm>
+            <a:off x="5998464" y="1536192"/>
+            <a:ext cx="5577840" cy="2331720"/>
+          </a:xfrm>
+          <a:prstGeom prst="roundRect">
+            <a:avLst>
+              <a:gd name="adj" fmla="val 2745"/>
+            </a:avLst>
+          </a:prstGeom>
+          <a:solidFill>
+            <a:srgbClr val="1A2640"/>
+          </a:solidFill>
+          <a:ln w="12700">
+            <a:solidFill>
+              <a:srgbClr val="2A3F5F"/>
+            </a:solidFill>
+            <a:prstDash val="solid"/>
+          </a:ln>
+          <a:effectLst>
+            <a:outerShdw sx="100000" sy="100000" kx="0" ky="0" algn="bl" rotWithShape="0" blurRad="19050" dist="4445" dir="2700000">
+              <a:srgbClr val="000000">
+                <a:alpha val="10000"/>
+              </a:srgbClr>
+            </a:outerShdw>
+          </a:effectLst>
+        </p:spPr>
+      </p:sp>
+      <p:sp>
+        <p:nvSpPr>
+          <p:cNvPr id="15" name="Text 13"/>
+          <p:cNvSpPr/>
+          <p:nvPr/>
+        </p:nvSpPr>
+        <p:spPr>
+          <a:xfrm>
+            <a:off x="6181344" y="1664208"/>
+            <a:ext cx="5212080" cy="219456"/>
+          </a:xfrm>
+          <a:prstGeom prst="rect">
+            <a:avLst/>
+          </a:prstGeom>
+          <a:noFill/>
+          <a:ln/>
+        </p:spPr>
+        <p:txBody>
+          <a:bodyPr wrap="square" rtlCol="0" anchor="ctr"/>
+          <a:lstStyle/>
+          <a:p>
+            <a:pPr indent="0" marL="0">
+              <a:buNone/>
+            </a:pPr>
+            <a:r>
+              <a:rPr lang="en-US" sz="1250" b="1" dirty="0">
+                <a:solidFill>
+                  <a:srgbClr val="F5A623"/>
+                </a:solidFill>
+              </a:rPr>
+              <a:t>确定性孵化算法</a:t>
+            </a:r>
+            <a:endParaRPr lang="en-US" sz="1250" dirty="0"/>
+          </a:p>
+        </p:txBody>
+      </p:sp>
+      <p:sp>
+        <p:nvSpPr>
+          <p:cNvPr id="16" name="Text 14"/>
+          <p:cNvSpPr/>
+          <p:nvPr/>
+        </p:nvSpPr>
+        <p:spPr>
+          <a:xfrm>
+            <a:off x="6181344" y="1956816"/>
+            <a:ext cx="5212080" cy="1819656"/>
+          </a:xfrm>
+          <a:prstGeom prst="rect">
+            <a:avLst/>
+          </a:prstGeom>
+          <a:noFill/>
+          <a:ln/>
+        </p:spPr>
+        <p:txBody>
+          <a:bodyPr wrap="square" lIns="0" tIns="0" rIns="0" bIns="0" rtlCol="0" anchor="t">
+            <a:normAutofit/>
+          </a:bodyPr>
+          <a:lstStyle/>
+          <a:p>
+            <a:pPr indent="0" marL="0">
+              <a:buNone/>
+            </a:pPr>
+            <a:r>
+              <a:rPr lang="en-US" sz="1050" dirty="0">
+                <a:solidFill>
+                  <a:srgbClr val="C4CDD8"/>
+                </a:solidFill>
+              </a:rPr>
+              <a:t>• mulberry32（seeded PRNG）+ hashString(userId + SALT)</a:t>
+            </a:r>
+            <a:endParaRPr lang="en-US" sz="1050" dirty="0"/>
+          </a:p>
+          <a:p>
+            <a:pPr indent="0" marL="0">
+              <a:buNone/>
+            </a:pPr>
+            <a:r>
+              <a:rPr lang="en-US" sz="1050" dirty="0">
+                <a:solidFill>
+                  <a:srgbClr val="C4CDD8"/>
+                </a:solidFill>
+              </a:rPr>
+              <a:t>• SALT = 'friend-2026-401'（固定种子）</a:t>
+            </a:r>
+            <a:endParaRPr lang="en-US" sz="1050" dirty="0"/>
+          </a:p>
+          <a:p>
+            <a:pPr indent="0" marL="0">
+              <a:buNone/>
+            </a:pPr>
+            <a:r>
+              <a:rPr lang="en-US" sz="1050" dirty="0">
+                <a:solidFill>
+                  <a:srgbClr val="C4CDD8"/>
+                </a:solidFill>
+              </a:rPr>
+              <a:t>• 同一 userId 永远孵化同一只伴侣</a:t>
+            </a:r>
+            <a:endParaRPr lang="en-US" sz="1050" dirty="0"/>
+          </a:p>
+          <a:p>
+            <a:pPr indent="0" marL="0">
+              <a:buNone/>
+            </a:pPr>
+            <a:r>
+              <a:rPr lang="en-US" sz="1050" dirty="0">
+                <a:solidFill>
+                  <a:srgbClr val="C4CDD8"/>
+                </a:solidFill>
+              </a:rPr>
+              <a:t>• Bones 每次从 hash 重新生成，不持久化</a:t>
+            </a:r>
+            <a:endParaRPr lang="en-US" sz="1050" dirty="0"/>
+          </a:p>
+          <a:p>
+            <a:pPr indent="0" marL="0">
+              <a:buNone/>
+            </a:pPr>
+            <a:r>
+              <a:rPr lang="en-US" sz="1050" dirty="0">
+                <a:solidFill>
+                  <a:srgbClr val="C4CDD8"/>
+                </a:solidFill>
+              </a:rPr>
+              <a:t>•   — 防止用户编辑 config 作弊稀有度</a:t>
+            </a:r>
+            <a:endParaRPr lang="en-US" sz="1050" dirty="0"/>
+          </a:p>
+          <a:p>
+            <a:pPr indent="0" marL="0">
+              <a:buNone/>
+            </a:pPr>
+            <a:r>
+              <a:rPr lang="en-US" sz="1050" dirty="0">
+                <a:solidFill>
+                  <a:srgbClr val="C4CDD8"/>
+                </a:solidFill>
+              </a:rPr>
+              <a:t>• Soul（name + personality）由模型生成，持久化</a:t>
+            </a:r>
+            <a:endParaRPr lang="en-US" sz="1050" dirty="0"/>
+          </a:p>
+          <a:p>
+            <a:pPr indent="0" marL="0">
+              <a:buNone/>
+            </a:pPr>
+            <a:r>
+              <a:rPr lang="en-US" sz="1050" dirty="0">
+                <a:solidFill>
+                  <a:srgbClr val="C4CDD8"/>
+                </a:solidFill>
+              </a:rPr>
+              <a:t>• Bun.hash 加速（Bun 环境下用原生 hash）</a:t>
+            </a:r>
+            <a:endParaRPr lang="en-US" sz="1050" dirty="0"/>
+          </a:p>
+        </p:txBody>
+      </p:sp>
+      <p:sp>
+        <p:nvSpPr>
+          <p:cNvPr id="17" name="Shape 15"/>
+          <p:cNvSpPr/>
+          <p:nvPr/>
+        </p:nvSpPr>
+        <p:spPr>
+          <a:xfrm>
+            <a:off x="5998464" y="4005072"/>
+            <a:ext cx="5577840" cy="1993392"/>
+          </a:xfrm>
+          <a:prstGeom prst="roundRect">
+            <a:avLst>
+              <a:gd name="adj" fmla="val 3211"/>
+            </a:avLst>
+          </a:prstGeom>
+          <a:solidFill>
+            <a:srgbClr val="162035"/>
+          </a:solidFill>
+          <a:ln w="12700">
+            <a:solidFill>
+              <a:srgbClr val="2A3F5F"/>
+            </a:solidFill>
+            <a:prstDash val="solid"/>
+          </a:ln>
+          <a:effectLst>
+            <a:outerShdw sx="100000" sy="100000" kx="0" ky="0" algn="bl" rotWithShape="0" blurRad="19050" dist="4445" dir="2700000">
+              <a:srgbClr val="000000">
+                <a:alpha val="10000"/>
+              </a:srgbClr>
+            </a:outerShdw>
+          </a:effectLst>
+        </p:spPr>
+      </p:sp>
+      <p:sp>
+        <p:nvSpPr>
+          <p:cNvPr id="18" name="Text 16"/>
+          <p:cNvSpPr/>
+          <p:nvPr/>
+        </p:nvSpPr>
+        <p:spPr>
+          <a:xfrm>
+            <a:off x="6181344" y="4133088"/>
+            <a:ext cx="5212080" cy="219456"/>
+          </a:xfrm>
+          <a:prstGeom prst="rect">
+            <a:avLst/>
+          </a:prstGeom>
+          <a:noFill/>
+          <a:ln/>
+        </p:spPr>
+        <p:txBody>
+          <a:bodyPr wrap="square" rtlCol="0" anchor="ctr"/>
+          <a:lstStyle/>
+          <a:p>
+            <a:pPr indent="0" marL="0">
+              <a:buNone/>
+            </a:pPr>
+            <a:r>
+              <a:rPr lang="en-US" sz="1250" b="1" dirty="0">
+                <a:solidFill>
+                  <a:srgbClr val="22D3EE"/>
+                </a:solidFill>
+              </a:rPr>
+              <a:t>发布窗口（源码硬编码）</a:t>
+            </a:r>
+            <a:endParaRPr lang="en-US" sz="1250" dirty="0"/>
+          </a:p>
+        </p:txBody>
+      </p:sp>
+      <p:sp>
+        <p:nvSpPr>
+          <p:cNvPr id="19" name="Text 17"/>
+          <p:cNvSpPr/>
+          <p:nvPr/>
+        </p:nvSpPr>
+        <p:spPr>
+          <a:xfrm>
+            <a:off x="6181344" y="4425696"/>
+            <a:ext cx="5212080" cy="1481328"/>
+          </a:xfrm>
+          <a:prstGeom prst="rect">
+            <a:avLst/>
+          </a:prstGeom>
+          <a:noFill/>
+          <a:ln/>
+        </p:spPr>
+        <p:txBody>
+          <a:bodyPr wrap="square" lIns="0" tIns="0" rIns="0" bIns="0" rtlCol="0" anchor="t">
+            <a:normAutofit/>
+          </a:bodyPr>
+          <a:lstStyle/>
+          <a:p>
+            <a:pPr indent="0" marL="0">
+              <a:buNone/>
+            </a:pPr>
+            <a:r>
+              <a:rPr lang="en-US" sz="1100" dirty="0">
+                <a:solidFill>
+                  <a:srgbClr val="C4CDD8"/>
+                </a:solidFill>
+              </a:rPr>
+              <a:t>• Teaser 窗口：2026-04-01 ~ 04-07（本地时区）</a:t>
+            </a:r>
+            <a:endParaRPr lang="en-US" sz="1100" dirty="0"/>
+          </a:p>
+          <a:p>
+            <a:pPr indent="0" marL="0">
+              <a:buNone/>
+            </a:pPr>
+            <a:r>
+              <a:rPr lang="en-US" sz="1100" dirty="0">
+                <a:solidFill>
+                  <a:srgbClr val="C4CDD8"/>
+                </a:solidFill>
+              </a:rPr>
+              <a:t>•   — 跨时区滚动，避免 UTC 午夜流量峰值</a:t>
+            </a:r>
+            <a:endParaRPr lang="en-US" sz="1100" dirty="0"/>
+          </a:p>
+          <a:p>
+            <a:pPr indent="0" marL="0">
+              <a:buNone/>
+            </a:pPr>
+            <a:r>
+              <a:rPr lang="en-US" sz="1100" dirty="0">
+                <a:solidFill>
+                  <a:srgbClr val="C4CDD8"/>
+                </a:solidFill>
+              </a:rPr>
+              <a:t>• 功能永久上线：2026 年 4 月之后</a:t>
+            </a:r>
+            <a:endParaRPr lang="en-US" sz="1100" dirty="0"/>
+          </a:p>
+          <a:p>
+            <a:pPr indent="0" marL="0">
+              <a:buNone/>
+            </a:pPr>
+            <a:r>
+              <a:rPr lang="en-US" sz="1100" dirty="0">
+                <a:solidFill>
+                  <a:srgbClr val="C4CDD8"/>
+                </a:solidFill>
+              </a:rPr>
+              <a:t>• feature('BUDDY') gate 控制全局可见性</a:t>
+            </a:r>
+            <a:endParaRPr lang="en-US" sz="1100" dirty="0"/>
+          </a:p>
+          <a:p>
+            <a:pPr indent="0" marL="0">
+              <a:buNone/>
+            </a:pPr>
+            <a:r>
+              <a:rPr lang="en-US" sz="1100" dirty="0">
+                <a:solidFill>
+                  <a:srgbClr val="C4CDD8"/>
+                </a:solidFill>
+              </a:rPr>
+              <a:t>• companion.ts 注释：'good enough for picking ducks'</a:t>
+            </a:r>
+            <a:endParaRPr lang="en-US" sz="1100" dirty="0"/>
+          </a:p>
+        </p:txBody>
+      </p:sp>
+    </p:spTree>
+  </p:cSld>
+  <p:clrMapOvr>
+    <a:masterClrMapping/>
+  </p:clrMapOvr>
+</p:sld>
+</file>
+
+<file path=ppt/slides/slide25.xml><?xml version="1.0" encoding="utf-8"?>
+<p:sld xmlns:a="http://schemas.openxmlformats.org/drawingml/2006/main" xmlns:r="http://schemas.openxmlformats.org/officeDocument/2006/relationships" xmlns:p="http://schemas.openxmlformats.org/presentationml/2006/main">
+  <p:cSld name="Slide 25">
+    <p:bg>
+      <p:bgPr>
+        <a:solidFill>
+          <a:srgbClr val="09111F"/>
+        </a:solidFill>
+      </p:bgPr>
+    </p:bg>
+    <p:spTree>
+      <p:nvGrpSpPr>
+        <p:cNvPr id="1" name=""/>
+        <p:cNvGrpSpPr/>
+        <p:nvPr/>
+      </p:nvGrpSpPr>
+      <p:grpSpPr>
+        <a:xfrm>
+          <a:off x="0" y="0"/>
+          <a:ext cx="0" cy="0"/>
+          <a:chOff x="0" y="0"/>
+          <a:chExt cx="0" cy="0"/>
+        </a:xfrm>
+      </p:grpSpPr>
+      <p:sp>
+        <p:nvSpPr>
+          <p:cNvPr id="2" name="Shape 0"/>
+          <p:cNvSpPr/>
+          <p:nvPr/>
+        </p:nvSpPr>
+        <p:spPr>
+          <a:xfrm>
+            <a:off x="0" y="0"/>
+            <a:ext cx="12191695" cy="91440"/>
+          </a:xfrm>
+          <a:prstGeom prst="rect">
+            <a:avLst/>
+          </a:prstGeom>
+          <a:solidFill>
+            <a:srgbClr val="F5A623"/>
+          </a:solidFill>
+          <a:ln w="12700">
+            <a:solidFill>
+              <a:srgbClr val="F5A623">
+                <a:alpha val="0"/>
+              </a:srgbClr>
+            </a:solidFill>
+            <a:prstDash val="solid"/>
+          </a:ln>
+        </p:spPr>
+      </p:sp>
+      <p:sp>
+        <p:nvSpPr>
+          <p:cNvPr id="3" name="Shape 1"/>
+          <p:cNvSpPr/>
+          <p:nvPr/>
+        </p:nvSpPr>
+        <p:spPr>
+          <a:xfrm>
+            <a:off x="621792" y="274320"/>
+            <a:ext cx="1065276" cy="201168"/>
+          </a:xfrm>
+          <a:prstGeom prst="roundRect">
+            <a:avLst>
+              <a:gd name="adj" fmla="val 18182"/>
+            </a:avLst>
+          </a:prstGeom>
+          <a:solidFill>
+            <a:srgbClr val="1E2E4A"/>
+          </a:solidFill>
+          <a:ln w="12700">
+            <a:solidFill>
+              <a:srgbClr val="F5A623"/>
+            </a:solidFill>
+            <a:prstDash val="solid"/>
+          </a:ln>
+        </p:spPr>
+      </p:sp>
+      <p:sp>
+        <p:nvSpPr>
+          <p:cNvPr id="4" name="Text 2"/>
+          <p:cNvSpPr/>
+          <p:nvPr/>
+        </p:nvSpPr>
+        <p:spPr>
+          <a:xfrm>
+            <a:off x="658368" y="288036"/>
+            <a:ext cx="3200400" cy="164592"/>
+          </a:xfrm>
+          <a:prstGeom prst="rect">
+            <a:avLst/>
+          </a:prstGeom>
+          <a:noFill/>
+          <a:ln/>
+        </p:spPr>
+        <p:txBody>
+          <a:bodyPr wrap="square" rtlCol="0" anchor="ctr"/>
+          <a:lstStyle/>
+          <a:p>
+            <a:pPr indent="0" marL="0">
+              <a:buNone/>
+            </a:pPr>
+            <a:r>
+              <a:rPr lang="en-US" sz="950" b="1" dirty="0">
+                <a:solidFill>
+                  <a:srgbClr val="F5A623"/>
+                </a:solidFill>
+              </a:rPr>
+              <a:t>特色功能 · 05</a:t>
+            </a:r>
+            <a:endParaRPr lang="en-US" sz="950" dirty="0"/>
+          </a:p>
+        </p:txBody>
+      </p:sp>
+      <p:sp>
+        <p:nvSpPr>
+          <p:cNvPr id="5" name="Text 3"/>
+          <p:cNvSpPr/>
+          <p:nvPr/>
+        </p:nvSpPr>
+        <p:spPr>
+          <a:xfrm>
+            <a:off x="658368" y="548640"/>
+            <a:ext cx="10515600" cy="530352"/>
+          </a:xfrm>
+          <a:prstGeom prst="rect">
+            <a:avLst/>
+          </a:prstGeom>
+          <a:noFill/>
+          <a:ln/>
+        </p:spPr>
+        <p:txBody>
+          <a:bodyPr wrap="square" rtlCol="0" anchor="ctr">
+            <a:normAutofit/>
+          </a:bodyPr>
+          <a:lstStyle/>
+          <a:p>
+            <a:pPr indent="0" marL="0">
+              <a:buNone/>
+            </a:pPr>
+            <a:r>
+              <a:rPr lang="en-US" sz="2200" b="1" dirty="0">
+                <a:solidFill>
+                  <a:srgbClr val="E8EDF5"/>
+                </a:solidFill>
+              </a:rPr>
+              <a:t>KAIROS：隐藏在 feature gate 背后的 Assistant 模式</a:t>
+            </a:r>
+            <a:endParaRPr lang="en-US" sz="2200" dirty="0"/>
+          </a:p>
+        </p:txBody>
+      </p:sp>
+      <p:sp>
+        <p:nvSpPr>
+          <p:cNvPr id="6" name="Text 4"/>
+          <p:cNvSpPr/>
+          <p:nvPr/>
+        </p:nvSpPr>
+        <p:spPr>
+          <a:xfrm>
+            <a:off x="658368" y="1115568"/>
+            <a:ext cx="10515600" cy="256032"/>
+          </a:xfrm>
+          <a:prstGeom prst="rect">
+            <a:avLst/>
+          </a:prstGeom>
+          <a:noFill/>
+          <a:ln/>
+        </p:spPr>
+        <p:txBody>
+          <a:bodyPr wrap="square" rtlCol="0" anchor="ctr"/>
+          <a:lstStyle/>
+          <a:p>
+            <a:pPr indent="0" marL="0">
+              <a:buNone/>
+            </a:pPr>
+            <a:r>
+              <a:rPr lang="en-US" sz="1150" dirty="0">
+                <a:solidFill>
+                  <a:srgbClr val="8A9BB5"/>
+                </a:solidFill>
+              </a:rPr>
+              <a:t>代码里出现 20+ 次 feature('KAIROS')——这是一套与 coding agent 并列的 AI 助手运行模式。</a:t>
+            </a:r>
+            <a:endParaRPr lang="en-US" sz="1150" dirty="0"/>
+          </a:p>
+        </p:txBody>
+      </p:sp>
+      <p:sp>
+        <p:nvSpPr>
+          <p:cNvPr id="7" name="Shape 5"/>
+          <p:cNvSpPr/>
+          <p:nvPr/>
+        </p:nvSpPr>
+        <p:spPr>
+          <a:xfrm>
+            <a:off x="594360" y="6254496"/>
+            <a:ext cx="11002975" cy="13716"/>
+          </a:xfrm>
+          <a:prstGeom prst="rect">
+            <a:avLst/>
+          </a:prstGeom>
+          <a:solidFill>
+            <a:srgbClr val="2A3F5F"/>
+          </a:solidFill>
+          <a:ln w="12700">
+            <a:solidFill>
+              <a:srgbClr val="2A3F5F">
+                <a:alpha val="0"/>
+              </a:srgbClr>
+            </a:solidFill>
+            <a:prstDash val="solid"/>
+          </a:ln>
+        </p:spPr>
+      </p:sp>
+      <p:sp>
+        <p:nvSpPr>
+          <p:cNvPr id="8" name="Text 6"/>
+          <p:cNvSpPr/>
+          <p:nvPr/>
+        </p:nvSpPr>
+        <p:spPr>
+          <a:xfrm>
+            <a:off x="658368" y="6309360"/>
+            <a:ext cx="7772400" cy="164592"/>
+          </a:xfrm>
+          <a:prstGeom prst="rect">
+            <a:avLst/>
+          </a:prstGeom>
+          <a:noFill/>
+          <a:ln/>
+        </p:spPr>
+        <p:txBody>
+          <a:bodyPr wrap="square" rtlCol="0" anchor="ctr"/>
+          <a:lstStyle/>
+          <a:p>
+            <a:pPr indent="0" marL="0">
+              <a:buNone/>
+            </a:pPr>
+            <a:r>
+              <a:rPr lang="en-US" sz="780" dirty="0">
+                <a:solidFill>
+                  <a:srgbClr val="8A9BB5"/>
+                </a:solidFill>
+              </a:rPr>
+              <a:t>Claude Code Sourcemap 源码解读 · 仅供研究</a:t>
+            </a:r>
+            <a:endParaRPr lang="en-US" sz="780" dirty="0"/>
+          </a:p>
+        </p:txBody>
+      </p:sp>
+      <p:sp>
+        <p:nvSpPr>
+          <p:cNvPr id="9" name="Shape 7"/>
+          <p:cNvSpPr/>
+          <p:nvPr/>
+        </p:nvSpPr>
+        <p:spPr>
+          <a:xfrm>
+            <a:off x="11228832" y="6364224"/>
+            <a:ext cx="73152" cy="73152"/>
+          </a:xfrm>
+          <a:prstGeom prst="rect">
+            <a:avLst/>
+          </a:prstGeom>
+          <a:solidFill>
+            <a:srgbClr val="F5A623"/>
+          </a:solidFill>
+          <a:ln w="12700">
+            <a:solidFill>
+              <a:srgbClr val="F5A623">
+                <a:alpha val="0"/>
+              </a:srgbClr>
+            </a:solidFill>
+            <a:prstDash val="solid"/>
+          </a:ln>
+        </p:spPr>
+      </p:sp>
+      <p:sp>
+        <p:nvSpPr>
+          <p:cNvPr id="10" name="Text 8"/>
+          <p:cNvSpPr/>
+          <p:nvPr/>
+        </p:nvSpPr>
+        <p:spPr>
+          <a:xfrm>
+            <a:off x="10698480" y="6291072"/>
+            <a:ext cx="502920" cy="164592"/>
+          </a:xfrm>
+          <a:prstGeom prst="rect">
+            <a:avLst/>
+          </a:prstGeom>
+          <a:noFill/>
+          <a:ln/>
+        </p:spPr>
+        <p:txBody>
+          <a:bodyPr wrap="square" rtlCol="0" anchor="ctr"/>
+          <a:lstStyle/>
+          <a:p>
+            <a:pPr algn="r" indent="0" marL="0">
+              <a:buNone/>
+            </a:pPr>
+            <a:r>
+              <a:rPr lang="en-US" sz="820" b="1" dirty="0">
+                <a:solidFill>
+                  <a:srgbClr val="B0BDD0"/>
+                </a:solidFill>
+              </a:rPr>
+              <a:t>25</a:t>
+            </a:r>
+            <a:endParaRPr lang="en-US" sz="820" dirty="0"/>
+          </a:p>
+        </p:txBody>
+      </p:sp>
+      <p:sp>
+        <p:nvSpPr>
+          <p:cNvPr id="11" name="Shape 9"/>
+          <p:cNvSpPr/>
+          <p:nvPr/>
+        </p:nvSpPr>
+        <p:spPr>
+          <a:xfrm>
+            <a:off x="621792" y="1536192"/>
+            <a:ext cx="5230368" cy="2139696"/>
+          </a:xfrm>
+          <a:prstGeom prst="roundRect">
+            <a:avLst>
+              <a:gd name="adj" fmla="val 2991"/>
+            </a:avLst>
+          </a:prstGeom>
+          <a:solidFill>
+            <a:srgbClr val="162035"/>
+          </a:solidFill>
+          <a:ln w="12700">
+            <a:solidFill>
+              <a:srgbClr val="2A3F5F"/>
+            </a:solidFill>
+            <a:prstDash val="solid"/>
+          </a:ln>
+          <a:effectLst>
+            <a:outerShdw sx="100000" sy="100000" kx="0" ky="0" algn="bl" rotWithShape="0" blurRad="19050" dist="4445" dir="2700000">
+              <a:srgbClr val="000000">
+                <a:alpha val="10000"/>
+              </a:srgbClr>
+            </a:outerShdw>
+          </a:effectLst>
+        </p:spPr>
+      </p:sp>
+      <p:sp>
+        <p:nvSpPr>
+          <p:cNvPr id="12" name="Text 10"/>
+          <p:cNvSpPr/>
+          <p:nvPr/>
+        </p:nvSpPr>
+        <p:spPr>
+          <a:xfrm>
+            <a:off x="804672" y="1664208"/>
+            <a:ext cx="4864608" cy="219456"/>
+          </a:xfrm>
+          <a:prstGeom prst="rect">
+            <a:avLst/>
+          </a:prstGeom>
+          <a:noFill/>
+          <a:ln/>
+        </p:spPr>
+        <p:txBody>
+          <a:bodyPr wrap="square" rtlCol="0" anchor="ctr"/>
+          <a:lstStyle/>
+          <a:p>
+            <a:pPr indent="0" marL="0">
+              <a:buNone/>
+            </a:pPr>
+            <a:r>
+              <a:rPr lang="en-US" sz="1250" b="1" dirty="0">
+                <a:solidFill>
+                  <a:srgbClr val="F5A623"/>
+                </a:solidFill>
+              </a:rPr>
+              <a:t>KAIROS 是什么</a:t>
+            </a:r>
+            <a:endParaRPr lang="en-US" sz="1250" dirty="0"/>
+          </a:p>
+        </p:txBody>
+      </p:sp>
+      <p:sp>
+        <p:nvSpPr>
+          <p:cNvPr id="13" name="Text 11"/>
+          <p:cNvSpPr/>
+          <p:nvPr/>
+        </p:nvSpPr>
+        <p:spPr>
+          <a:xfrm>
+            <a:off x="804672" y="1956816"/>
+            <a:ext cx="4864608" cy="1627632"/>
+          </a:xfrm>
+          <a:prstGeom prst="rect">
+            <a:avLst/>
+          </a:prstGeom>
+          <a:noFill/>
+          <a:ln/>
+        </p:spPr>
+        <p:txBody>
+          <a:bodyPr wrap="square" lIns="0" tIns="0" rIns="0" bIns="0" rtlCol="0" anchor="t">
+            <a:normAutofit/>
+          </a:bodyPr>
+          <a:lstStyle/>
+          <a:p>
+            <a:pPr indent="0" marL="0">
+              <a:buNone/>
+            </a:pPr>
+            <a:r>
+              <a:rPr lang="en-US" sz="1100" dirty="0">
+                <a:solidFill>
+                  <a:srgbClr val="C4CDD8"/>
+                </a:solidFill>
+              </a:rPr>
+              <a:t>• assistant/ 目录下的独立运行模块</a:t>
+            </a:r>
+            <a:endParaRPr lang="en-US" sz="1100" dirty="0"/>
+          </a:p>
+          <a:p>
+            <a:pPr indent="0" marL="0">
+              <a:buNone/>
+            </a:pPr>
+            <a:r>
+              <a:rPr lang="en-US" sz="1100" dirty="0">
+                <a:solidFill>
+                  <a:srgbClr val="C4CDD8"/>
+                </a:solidFill>
+              </a:rPr>
+              <a:t>• assistant/index.js：isAssistantMode() / initializeAssistantTeam()</a:t>
+            </a:r>
+            <a:endParaRPr lang="en-US" sz="1100" dirty="0"/>
+          </a:p>
+          <a:p>
+            <a:pPr indent="0" marL="0">
+              <a:buNone/>
+            </a:pPr>
+            <a:r>
+              <a:rPr lang="en-US" sz="1100" dirty="0">
+                <a:solidFill>
+                  <a:srgbClr val="C4CDD8"/>
+                </a:solidFill>
+              </a:rPr>
+              <a:t>• assistant/gate.js：isKairosEnabled()——GrowthBook 动态开关</a:t>
+            </a:r>
+            <a:endParaRPr lang="en-US" sz="1100" dirty="0"/>
+          </a:p>
+          <a:p>
+            <a:pPr indent="0" marL="0">
+              <a:buNone/>
+            </a:pPr>
+            <a:r>
+              <a:rPr lang="en-US" sz="1100" dirty="0">
+                <a:solidFill>
+                  <a:srgbClr val="C4CDD8"/>
+                </a:solidFill>
+              </a:rPr>
+              <a:t>• assistant/sessionHistory.ts：会话历史翻页 API</a:t>
+            </a:r>
+            <a:endParaRPr lang="en-US" sz="1100" dirty="0"/>
+          </a:p>
+          <a:p>
+            <a:pPr indent="0" marL="0">
+              <a:buNone/>
+            </a:pPr>
+            <a:r>
+              <a:rPr lang="en-US" sz="1100" dirty="0">
+                <a:solidFill>
+                  <a:srgbClr val="C4CDD8"/>
+                </a:solidFill>
+              </a:rPr>
+              <a:t>• 通过 --assistant 命令行参数强制启用</a:t>
+            </a:r>
+            <a:endParaRPr lang="en-US" sz="1100" dirty="0"/>
+          </a:p>
+          <a:p>
+            <a:pPr indent="0" marL="0">
+              <a:buNone/>
+            </a:pPr>
+            <a:r>
+              <a:rPr lang="en-US" sz="1100" dirty="0">
+                <a:solidFill>
+                  <a:srgbClr val="C4CDD8"/>
+                </a:solidFill>
+              </a:rPr>
+              <a:t>• defaultView: 'chat' 时触发 brief-only 模式</a:t>
+            </a:r>
+            <a:endParaRPr lang="en-US" sz="1100" dirty="0"/>
+          </a:p>
+        </p:txBody>
+      </p:sp>
+      <p:sp>
+        <p:nvSpPr>
+          <p:cNvPr id="14" name="Shape 12"/>
+          <p:cNvSpPr/>
+          <p:nvPr/>
+        </p:nvSpPr>
+        <p:spPr>
+          <a:xfrm>
+            <a:off x="621792" y="3822192"/>
+            <a:ext cx="5230368" cy="2176272"/>
+          </a:xfrm>
+          <a:prstGeom prst="roundRect">
+            <a:avLst>
+              <a:gd name="adj" fmla="val 2941"/>
+            </a:avLst>
+          </a:prstGeom>
+          <a:solidFill>
+            <a:srgbClr val="162035"/>
+          </a:solidFill>
+          <a:ln w="12700">
+            <a:solidFill>
+              <a:srgbClr val="2A3F5F"/>
+            </a:solidFill>
+            <a:prstDash val="solid"/>
+          </a:ln>
+          <a:effectLst>
+            <a:outerShdw sx="100000" sy="100000" kx="0" ky="0" algn="bl" rotWithShape="0" blurRad="19050" dist="4445" dir="2700000">
+              <a:srgbClr val="000000">
+                <a:alpha val="10000"/>
+              </a:srgbClr>
+            </a:outerShdw>
+          </a:effectLst>
+        </p:spPr>
+      </p:sp>
+      <p:sp>
+        <p:nvSpPr>
+          <p:cNvPr id="15" name="Text 13"/>
+          <p:cNvSpPr/>
+          <p:nvPr/>
+        </p:nvSpPr>
+        <p:spPr>
+          <a:xfrm>
+            <a:off x="804672" y="3950208"/>
+            <a:ext cx="4864608" cy="219456"/>
+          </a:xfrm>
+          <a:prstGeom prst="rect">
+            <a:avLst/>
+          </a:prstGeom>
+          <a:noFill/>
+          <a:ln/>
+        </p:spPr>
+        <p:txBody>
+          <a:bodyPr wrap="square" rtlCol="0" anchor="ctr"/>
+          <a:lstStyle/>
+          <a:p>
+            <a:pPr indent="0" marL="0">
+              <a:buNone/>
+            </a:pPr>
+            <a:r>
+              <a:rPr lang="en-US" sz="1250" b="1" dirty="0">
+                <a:solidFill>
+                  <a:srgbClr val="F87171"/>
+                </a:solidFill>
+              </a:rPr>
+              <a:t>与 Coding Agent 模式的差异</a:t>
+            </a:r>
+            <a:endParaRPr lang="en-US" sz="1250" dirty="0"/>
+          </a:p>
+        </p:txBody>
+      </p:sp>
+      <p:sp>
+        <p:nvSpPr>
+          <p:cNvPr id="16" name="Text 14"/>
+          <p:cNvSpPr/>
+          <p:nvPr/>
+        </p:nvSpPr>
+        <p:spPr>
+          <a:xfrm>
+            <a:off x="804672" y="4242816"/>
+            <a:ext cx="4864608" cy="1664208"/>
+          </a:xfrm>
+          <a:prstGeom prst="rect">
+            <a:avLst/>
+          </a:prstGeom>
+          <a:noFill/>
+          <a:ln/>
+        </p:spPr>
+        <p:txBody>
+          <a:bodyPr wrap="square" lIns="0" tIns="0" rIns="0" bIns="0" rtlCol="0" anchor="t">
+            <a:normAutofit/>
+          </a:bodyPr>
+          <a:lstStyle/>
+          <a:p>
+            <a:pPr indent="0" marL="0">
+              <a:buNone/>
+            </a:pPr>
+            <a:r>
+              <a:rPr lang="en-US" sz="1100" dirty="0">
+                <a:solidFill>
+                  <a:srgbClr val="C4CDD8"/>
+                </a:solidFill>
+              </a:rPr>
+              <a:t>• 独立 assistantTeamContext——不共用 coding agent team</a:t>
+            </a:r>
+            <a:endParaRPr lang="en-US" sz="1100" dirty="0"/>
+          </a:p>
+          <a:p>
+            <a:pPr indent="0" marL="0">
+              <a:buNone/>
+            </a:pPr>
+            <a:r>
+              <a:rPr lang="en-US" sz="1100" dirty="0">
+                <a:solidFill>
+                  <a:srgbClr val="C4CDD8"/>
+                </a:solidFill>
+              </a:rPr>
+              <a:t>• 有 pendingAssistantChat（session discover 逻辑）</a:t>
+            </a:r>
+            <a:endParaRPr lang="en-US" sz="1100" dirty="0"/>
+          </a:p>
+          <a:p>
+            <a:pPr indent="0" marL="0">
+              <a:buNone/>
+            </a:pPr>
+            <a:r>
+              <a:rPr lang="en-US" sz="1100" dirty="0">
+                <a:solidFill>
+                  <a:srgbClr val="C4CDD8"/>
+                </a:solidFill>
+              </a:rPr>
+              <a:t>• assistantActivationPath 影响工具可见性</a:t>
+            </a:r>
+            <a:endParaRPr lang="en-US" sz="1100" dirty="0"/>
+          </a:p>
+          <a:p>
+            <a:pPr indent="0" marL="0">
+              <a:buNone/>
+            </a:pPr>
+            <a:r>
+              <a:rPr lang="en-US" sz="1100" dirty="0">
+                <a:solidFill>
+                  <a:srgbClr val="C4CDD8"/>
+                </a:solidFill>
+              </a:rPr>
+              <a:t>• getUserMsgOptIn() 控制 brief-only 初始状态</a:t>
+            </a:r>
+            <a:endParaRPr lang="en-US" sz="1100" dirty="0"/>
+          </a:p>
+          <a:p>
+            <a:pPr indent="0" marL="0">
+              <a:buNone/>
+            </a:pPr>
+            <a:r>
+              <a:rPr lang="en-US" sz="1100" dirty="0">
+                <a:solidFill>
+                  <a:srgbClr val="C4CDD8"/>
+                </a:solidFill>
+              </a:rPr>
+              <a:t>• KAIROS_BRIEF / KAIROS_CHANNELS 是子特性开关</a:t>
+            </a:r>
+            <a:endParaRPr lang="en-US" sz="1100" dirty="0"/>
+          </a:p>
+        </p:txBody>
+      </p:sp>
+      <p:sp>
+        <p:nvSpPr>
+          <p:cNvPr id="17" name="Shape 15"/>
+          <p:cNvSpPr/>
+          <p:nvPr/>
+        </p:nvSpPr>
+        <p:spPr>
+          <a:xfrm>
+            <a:off x="5998464" y="1536192"/>
+            <a:ext cx="5577840" cy="1389888"/>
+          </a:xfrm>
+          <a:prstGeom prst="roundRect">
+            <a:avLst>
+              <a:gd name="adj" fmla="val 4605"/>
+            </a:avLst>
+          </a:prstGeom>
+          <a:solidFill>
+            <a:srgbClr val="1A2640"/>
+          </a:solidFill>
+          <a:ln w="12700">
+            <a:solidFill>
+              <a:srgbClr val="2A3F5F"/>
+            </a:solidFill>
+            <a:prstDash val="solid"/>
+          </a:ln>
+          <a:effectLst>
+            <a:outerShdw sx="100000" sy="100000" kx="0" ky="0" algn="bl" rotWithShape="0" blurRad="19050" dist="4445" dir="2700000">
+              <a:srgbClr val="000000">
+                <a:alpha val="10000"/>
+              </a:srgbClr>
+            </a:outerShdw>
+          </a:effectLst>
+        </p:spPr>
+      </p:sp>
+      <p:sp>
+        <p:nvSpPr>
+          <p:cNvPr id="18" name="Text 16"/>
+          <p:cNvSpPr/>
+          <p:nvPr/>
+        </p:nvSpPr>
+        <p:spPr>
+          <a:xfrm>
+            <a:off x="6181344" y="1664208"/>
+            <a:ext cx="5212080" cy="219456"/>
+          </a:xfrm>
+          <a:prstGeom prst="rect">
+            <a:avLst/>
+          </a:prstGeom>
+          <a:noFill/>
+          <a:ln/>
+        </p:spPr>
+        <p:txBody>
+          <a:bodyPr wrap="square" rtlCol="0" anchor="ctr"/>
+          <a:lstStyle/>
+          <a:p>
+            <a:pPr indent="0" marL="0">
+              <a:buNone/>
+            </a:pPr>
+            <a:r>
+              <a:rPr lang="en-US" sz="1250" b="1" dirty="0">
+                <a:solidFill>
+                  <a:srgbClr val="A78BFA"/>
+                </a:solidFill>
+              </a:rPr>
+              <a:t>关联子特性</a:t>
+            </a:r>
+            <a:endParaRPr lang="en-US" sz="1250" dirty="0"/>
+          </a:p>
+        </p:txBody>
+      </p:sp>
+      <p:sp>
+        <p:nvSpPr>
+          <p:cNvPr id="19" name="Text 17"/>
+          <p:cNvSpPr/>
+          <p:nvPr/>
+        </p:nvSpPr>
+        <p:spPr>
+          <a:xfrm>
+            <a:off x="6181344" y="1956816"/>
+            <a:ext cx="5212080" cy="877824"/>
+          </a:xfrm>
+          <a:prstGeom prst="rect">
+            <a:avLst/>
+          </a:prstGeom>
+          <a:noFill/>
+          <a:ln/>
+        </p:spPr>
+        <p:txBody>
+          <a:bodyPr wrap="square" lIns="0" tIns="0" rIns="0" bIns="0" rtlCol="0" anchor="t">
+            <a:normAutofit/>
+          </a:bodyPr>
+          <a:lstStyle/>
+          <a:p>
+            <a:pPr indent="0" marL="0">
+              <a:buNone/>
+            </a:pPr>
+            <a:r>
+              <a:rPr lang="en-US" sz="1100" dirty="0">
+                <a:solidFill>
+                  <a:srgbClr val="C4CDD8"/>
+                </a:solidFill>
+              </a:rPr>
+              <a:t>• KAIROS_BRIEF — BriefTool 可见性（检查点汇报）</a:t>
+            </a:r>
+            <a:endParaRPr lang="en-US" sz="1100" dirty="0"/>
+          </a:p>
+          <a:p>
+            <a:pPr indent="0" marL="0">
+              <a:buNone/>
+            </a:pPr>
+            <a:r>
+              <a:rPr lang="en-US" sz="1100" dirty="0">
+                <a:solidFill>
+                  <a:srgbClr val="C4CDD8"/>
+                </a:solidFill>
+              </a:rPr>
+              <a:t>• KAIROS_CHANNELS — 允许 --channels / --dangerously-load-development-channels</a:t>
+            </a:r>
+            <a:endParaRPr lang="en-US" sz="1100" dirty="0"/>
+          </a:p>
+          <a:p>
+            <a:pPr indent="0" marL="0">
+              <a:buNone/>
+            </a:pPr>
+            <a:r>
+              <a:rPr lang="en-US" sz="1100" dirty="0">
+                <a:solidFill>
+                  <a:srgbClr val="C4CDD8"/>
+                </a:solidFill>
+              </a:rPr>
+              <a:t>• PROACTIVE — 主动触发，与 KAIROS 部分逻辑共享</a:t>
+            </a:r>
+            <a:endParaRPr lang="en-US" sz="1100" dirty="0"/>
+          </a:p>
+        </p:txBody>
+      </p:sp>
+      <p:sp>
+        <p:nvSpPr>
+          <p:cNvPr id="20" name="Shape 18"/>
+          <p:cNvSpPr/>
+          <p:nvPr/>
+        </p:nvSpPr>
+        <p:spPr>
+          <a:xfrm>
+            <a:off x="5998464" y="3072384"/>
+            <a:ext cx="5577840" cy="1426464"/>
+          </a:xfrm>
+          <a:prstGeom prst="roundRect">
+            <a:avLst>
+              <a:gd name="adj" fmla="val 4487"/>
+            </a:avLst>
+          </a:prstGeom>
+          <a:solidFill>
+            <a:srgbClr val="162035"/>
+          </a:solidFill>
+          <a:ln w="12700">
+            <a:solidFill>
+              <a:srgbClr val="2A3F5F"/>
+            </a:solidFill>
+            <a:prstDash val="solid"/>
+          </a:ln>
+          <a:effectLst>
+            <a:outerShdw sx="100000" sy="100000" kx="0" ky="0" algn="bl" rotWithShape="0" blurRad="19050" dist="4445" dir="2700000">
+              <a:srgbClr val="000000">
+                <a:alpha val="10000"/>
+              </a:srgbClr>
+            </a:outerShdw>
+          </a:effectLst>
+        </p:spPr>
+      </p:sp>
+      <p:sp>
+        <p:nvSpPr>
+          <p:cNvPr id="21" name="Text 19"/>
+          <p:cNvSpPr/>
+          <p:nvPr/>
+        </p:nvSpPr>
+        <p:spPr>
+          <a:xfrm>
+            <a:off x="6181344" y="3200400"/>
+            <a:ext cx="5212080" cy="219456"/>
+          </a:xfrm>
+          <a:prstGeom prst="rect">
+            <a:avLst/>
+          </a:prstGeom>
+          <a:noFill/>
+          <a:ln/>
+        </p:spPr>
+        <p:txBody>
+          <a:bodyPr wrap="square" rtlCol="0" anchor="ctr"/>
+          <a:lstStyle/>
+          <a:p>
+            <a:pPr indent="0" marL="0">
+              <a:buNone/>
+            </a:pPr>
+            <a:r>
+              <a:rPr lang="en-US" sz="1250" b="1" dirty="0">
+                <a:solidFill>
+                  <a:srgbClr val="22D3EE"/>
+                </a:solidFill>
+              </a:rPr>
+              <a:t>源码直接可见的信号</a:t>
+            </a:r>
+            <a:endParaRPr lang="en-US" sz="1250" dirty="0"/>
+          </a:p>
+        </p:txBody>
+      </p:sp>
+      <p:sp>
+        <p:nvSpPr>
+          <p:cNvPr id="22" name="Text 20"/>
+          <p:cNvSpPr/>
+          <p:nvPr/>
+        </p:nvSpPr>
+        <p:spPr>
+          <a:xfrm>
+            <a:off x="6181344" y="3493008"/>
+            <a:ext cx="5212080" cy="914400"/>
+          </a:xfrm>
+          <a:prstGeom prst="rect">
+            <a:avLst/>
+          </a:prstGeom>
+          <a:noFill/>
+          <a:ln/>
+        </p:spPr>
+        <p:txBody>
+          <a:bodyPr wrap="square" lIns="0" tIns="0" rIns="0" bIns="0" rtlCol="0" anchor="t">
+            <a:normAutofit/>
+          </a:bodyPr>
+          <a:lstStyle/>
+          <a:p>
+            <a:pPr indent="0" marL="0">
+              <a:buNone/>
+            </a:pPr>
+            <a:r>
+              <a:rPr lang="en-US" sz="1100" dirty="0">
+                <a:solidFill>
+                  <a:srgbClr val="C4CDD8"/>
+                </a:solidFill>
+              </a:rPr>
+              <a:t>• main.tsx 78 行：Dead code elimination 注释</a:t>
+            </a:r>
+            <a:endParaRPr lang="en-US" sz="1100" dirty="0"/>
+          </a:p>
+          <a:p>
+            <a:pPr indent="0" marL="0">
+              <a:buNone/>
+            </a:pPr>
+            <a:r>
+              <a:rPr lang="en-US" sz="1100" dirty="0">
+                <a:solidFill>
+                  <a:srgbClr val="C4CDD8"/>
+                </a:solidFill>
+              </a:rPr>
+              <a:t>•   — 说明 KAIROS 模块在外部构建中被剔除</a:t>
+            </a:r>
+            <a:endParaRPr lang="en-US" sz="1100" dirty="0"/>
+          </a:p>
+          <a:p>
+            <a:pPr indent="0" marL="0">
+              <a:buNone/>
+            </a:pPr>
+            <a:r>
+              <a:rPr lang="en-US" sz="1100" dirty="0">
+                <a:solidFill>
+                  <a:srgbClr val="C4CDD8"/>
+                </a:solidFill>
+              </a:rPr>
+              <a:t>• tengu_kairos GrowthBook 标志控制实际启用</a:t>
+            </a:r>
+            <a:endParaRPr lang="en-US" sz="1100" dirty="0"/>
+          </a:p>
+          <a:p>
+            <a:pPr indent="0" marL="0">
+              <a:buNone/>
+            </a:pPr>
+            <a:r>
+              <a:rPr lang="en-US" sz="1100" dirty="0">
+                <a:solidFill>
+                  <a:srgbClr val="C4CDD8"/>
+                </a:solidFill>
+              </a:rPr>
+              <a:t>• session history 使用 ccr-byoc-2025-07-29 beta 头</a:t>
+            </a:r>
+            <a:endParaRPr lang="en-US" sz="1100" dirty="0"/>
+          </a:p>
+        </p:txBody>
+      </p:sp>
+      <p:sp>
+        <p:nvSpPr>
+          <p:cNvPr id="23" name="Shape 21"/>
+          <p:cNvSpPr/>
+          <p:nvPr/>
+        </p:nvSpPr>
+        <p:spPr>
+          <a:xfrm>
+            <a:off x="5998464" y="4645152"/>
+            <a:ext cx="5577840" cy="1353312"/>
+          </a:xfrm>
+          <a:prstGeom prst="roundRect">
+            <a:avLst>
+              <a:gd name="adj" fmla="val 4730"/>
+            </a:avLst>
+          </a:prstGeom>
+          <a:solidFill>
+            <a:srgbClr val="1A2640"/>
+          </a:solidFill>
+          <a:ln w="12700">
+            <a:solidFill>
+              <a:srgbClr val="2A3F5F"/>
+            </a:solidFill>
+            <a:prstDash val="solid"/>
+          </a:ln>
+          <a:effectLst>
+            <a:outerShdw sx="100000" sy="100000" kx="0" ky="0" algn="bl" rotWithShape="0" blurRad="19050" dist="4445" dir="2700000">
+              <a:srgbClr val="000000">
+                <a:alpha val="10000"/>
+              </a:srgbClr>
+            </a:outerShdw>
+          </a:effectLst>
+        </p:spPr>
+      </p:sp>
+      <p:sp>
+        <p:nvSpPr>
+          <p:cNvPr id="24" name="Text 22"/>
+          <p:cNvSpPr/>
+          <p:nvPr/>
+        </p:nvSpPr>
+        <p:spPr>
+          <a:xfrm>
+            <a:off x="6181344" y="4773168"/>
+            <a:ext cx="5212080" cy="219456"/>
+          </a:xfrm>
+          <a:prstGeom prst="rect">
+            <a:avLst/>
+          </a:prstGeom>
+          <a:noFill/>
+          <a:ln/>
+        </p:spPr>
+        <p:txBody>
+          <a:bodyPr wrap="square" rtlCol="0" anchor="ctr"/>
+          <a:lstStyle/>
+          <a:p>
+            <a:pPr indent="0" marL="0">
+              <a:buNone/>
+            </a:pPr>
+            <a:r>
+              <a:rPr lang="en-US" sz="1250" b="1" dirty="0">
+                <a:solidFill>
+                  <a:srgbClr val="F5A623"/>
+                </a:solidFill>
+              </a:rPr>
+              <a:t>可以合理推断</a:t>
+            </a:r>
+            <a:endParaRPr lang="en-US" sz="1250" dirty="0"/>
+          </a:p>
+        </p:txBody>
+      </p:sp>
+      <p:sp>
+        <p:nvSpPr>
+          <p:cNvPr id="25" name="Text 23"/>
+          <p:cNvSpPr/>
+          <p:nvPr/>
+        </p:nvSpPr>
+        <p:spPr>
+          <a:xfrm>
+            <a:off x="6181344" y="5065776"/>
+            <a:ext cx="5212080" cy="841248"/>
+          </a:xfrm>
+          <a:prstGeom prst="rect">
+            <a:avLst/>
+          </a:prstGeom>
+          <a:noFill/>
+          <a:ln/>
+        </p:spPr>
+        <p:txBody>
+          <a:bodyPr wrap="square" lIns="0" tIns="0" rIns="0" bIns="0" rtlCol="0" anchor="t">
+            <a:normAutofit/>
+          </a:bodyPr>
+          <a:lstStyle/>
+          <a:p>
+            <a:pPr indent="0" marL="0">
+              <a:buNone/>
+            </a:pPr>
+            <a:r>
+              <a:rPr lang="en-US" sz="1100" dirty="0">
+                <a:solidFill>
+                  <a:srgbClr val="C4CDD8"/>
+                </a:solidFill>
+              </a:rPr>
+              <a:t>• KAIROS 是 Claude.ai 对话能力接入 Claude Code 的通道</a:t>
+            </a:r>
+            <a:endParaRPr lang="en-US" sz="1100" dirty="0"/>
+          </a:p>
+          <a:p>
+            <a:pPr indent="0" marL="0">
+              <a:buNone/>
+            </a:pPr>
+            <a:r>
+              <a:rPr lang="en-US" sz="1100" dirty="0">
+                <a:solidFill>
+                  <a:srgbClr val="C4CDD8"/>
+                </a:solidFill>
+              </a:rPr>
+              <a:t>• 与 Bridge/Remote 共同构成多 surface 战略</a:t>
+            </a:r>
+            <a:endParaRPr lang="en-US" sz="1100" dirty="0"/>
+          </a:p>
+          <a:p>
+            <a:pPr indent="0" marL="0">
+              <a:buNone/>
+            </a:pPr>
+            <a:r>
+              <a:rPr lang="en-US" sz="1100" dirty="0">
+                <a:solidFill>
+                  <a:srgbClr val="C4CDD8"/>
+                </a:solidFill>
+              </a:rPr>
+              <a:t>• 目前仅对内部或白名单用户开放</a:t>
+            </a:r>
+            <a:endParaRPr lang="en-US" sz="1100" dirty="0"/>
+          </a:p>
+        </p:txBody>
+      </p:sp>
+    </p:spTree>
+  </p:cSld>
+  <p:clrMapOvr>
+    <a:masterClrMapping/>
+  </p:clrMapOvr>
+</p:sld>
+</file>
+
+<file path=ppt/slides/slide26.xml><?xml version="1.0" encoding="utf-8"?>
+<p:sld xmlns:a="http://schemas.openxmlformats.org/drawingml/2006/main" xmlns:r="http://schemas.openxmlformats.org/officeDocument/2006/relationships" xmlns:p="http://schemas.openxmlformats.org/presentationml/2006/main">
+  <p:cSld name="Slide 26">
+    <p:bg>
+      <p:bgPr>
+        <a:solidFill>
+          <a:srgbClr val="09111F"/>
+        </a:solidFill>
+      </p:bgPr>
+    </p:bg>
+    <p:spTree>
+      <p:nvGrpSpPr>
+        <p:cNvPr id="1" name=""/>
+        <p:cNvGrpSpPr/>
+        <p:nvPr/>
+      </p:nvGrpSpPr>
+      <p:grpSpPr>
+        <a:xfrm>
+          <a:off x="0" y="0"/>
+          <a:ext cx="0" cy="0"/>
+          <a:chOff x="0" y="0"/>
+          <a:chExt cx="0" cy="0"/>
+        </a:xfrm>
+      </p:grpSpPr>
+      <p:sp>
+        <p:nvSpPr>
+          <p:cNvPr id="2" name="Shape 0"/>
+          <p:cNvSpPr/>
+          <p:nvPr/>
+        </p:nvSpPr>
+        <p:spPr>
+          <a:xfrm>
+            <a:off x="0" y="0"/>
+            <a:ext cx="12191695" cy="91440"/>
+          </a:xfrm>
+          <a:prstGeom prst="rect">
+            <a:avLst/>
+          </a:prstGeom>
+          <a:solidFill>
+            <a:srgbClr val="4B8EF5"/>
+          </a:solidFill>
+          <a:ln w="12700">
+            <a:solidFill>
+              <a:srgbClr val="4B8EF5">
+                <a:alpha val="0"/>
+              </a:srgbClr>
+            </a:solidFill>
+            <a:prstDash val="solid"/>
+          </a:ln>
+        </p:spPr>
+      </p:sp>
+      <p:sp>
+        <p:nvSpPr>
+          <p:cNvPr id="3" name="Shape 1"/>
+          <p:cNvSpPr/>
+          <p:nvPr/>
+        </p:nvSpPr>
+        <p:spPr>
+          <a:xfrm>
+            <a:off x="621792" y="274320"/>
+            <a:ext cx="909828" cy="201168"/>
+          </a:xfrm>
+          <a:prstGeom prst="roundRect">
+            <a:avLst>
+              <a:gd name="adj" fmla="val 18182"/>
+            </a:avLst>
+          </a:prstGeom>
+          <a:solidFill>
+            <a:srgbClr val="1E2E4A"/>
+          </a:solidFill>
+          <a:ln w="12700">
+            <a:solidFill>
+              <a:srgbClr val="4B8EF5"/>
+            </a:solidFill>
+            <a:prstDash val="solid"/>
+          </a:ln>
+        </p:spPr>
+      </p:sp>
+      <p:sp>
+        <p:nvSpPr>
+          <p:cNvPr id="4" name="Text 2"/>
+          <p:cNvSpPr/>
+          <p:nvPr/>
+        </p:nvSpPr>
+        <p:spPr>
+          <a:xfrm>
+            <a:off x="658368" y="288036"/>
+            <a:ext cx="3200400" cy="164592"/>
+          </a:xfrm>
+          <a:prstGeom prst="rect">
+            <a:avLst/>
+          </a:prstGeom>
+          <a:noFill/>
+          <a:ln/>
+        </p:spPr>
+        <p:txBody>
+          <a:bodyPr wrap="square" rtlCol="0" anchor="ctr"/>
+          <a:lstStyle/>
+          <a:p>
+            <a:pPr indent="0" marL="0">
+              <a:buNone/>
+            </a:pPr>
+            <a:r>
+              <a:rPr lang="en-US" sz="950" b="1" dirty="0">
+                <a:solidFill>
+                  <a:srgbClr val="4B8EF5"/>
+                </a:solidFill>
+              </a:rPr>
+              <a:t>总结 · 01</a:t>
+            </a:r>
+            <a:endParaRPr lang="en-US" sz="950" dirty="0"/>
+          </a:p>
+        </p:txBody>
+      </p:sp>
+      <p:sp>
+        <p:nvSpPr>
+          <p:cNvPr id="5" name="Text 3"/>
+          <p:cNvSpPr/>
+          <p:nvPr/>
+        </p:nvSpPr>
+        <p:spPr>
+          <a:xfrm>
+            <a:off x="658368" y="548640"/>
+            <a:ext cx="10515600" cy="530352"/>
+          </a:xfrm>
+          <a:prstGeom prst="rect">
+            <a:avLst/>
+          </a:prstGeom>
+          <a:noFill/>
+          <a:ln/>
+        </p:spPr>
+        <p:txBody>
+          <a:bodyPr wrap="square" rtlCol="0" anchor="ctr">
+            <a:normAutofit/>
+          </a:bodyPr>
+          <a:lstStyle/>
+          <a:p>
+            <a:pPr indent="0" marL="0">
+              <a:buNone/>
+            </a:pPr>
+            <a:r>
+              <a:rPr lang="en-US" sz="2200" b="1" dirty="0">
+                <a:solidFill>
+                  <a:srgbClr val="E8EDF5"/>
+                </a:solidFill>
+              </a:rPr>
+              <a:t>如何继续阅读源码：建议按这条顺序推进</a:t>
+            </a:r>
+            <a:endParaRPr lang="en-US" sz="2200" dirty="0"/>
+          </a:p>
+        </p:txBody>
+      </p:sp>
+      <p:sp>
+        <p:nvSpPr>
+          <p:cNvPr id="6" name="Text 4"/>
+          <p:cNvSpPr/>
+          <p:nvPr/>
+        </p:nvSpPr>
+        <p:spPr>
+          <a:xfrm>
+            <a:off x="658368" y="1115568"/>
+            <a:ext cx="10515600" cy="256032"/>
+          </a:xfrm>
+          <a:prstGeom prst="rect">
+            <a:avLst/>
+          </a:prstGeom>
+          <a:noFill/>
+          <a:ln/>
+        </p:spPr>
+        <p:txBody>
+          <a:bodyPr wrap="square" rtlCol="0" anchor="ctr"/>
+          <a:lstStyle/>
+          <a:p>
+            <a:pPr indent="0" marL="0">
+              <a:buNone/>
+            </a:pPr>
+            <a:r>
+              <a:rPr lang="en-US" sz="1150" dirty="0">
+                <a:solidFill>
+                  <a:srgbClr val="8A9BB5"/>
+                </a:solidFill>
+              </a:rPr>
+              <a:t>先建立全局模型，再逐层下钻——避免在细节里迷失。</a:t>
+            </a:r>
+            <a:endParaRPr lang="en-US" sz="1150" dirty="0"/>
+          </a:p>
+        </p:txBody>
+      </p:sp>
+      <p:sp>
+        <p:nvSpPr>
+          <p:cNvPr id="7" name="Shape 5"/>
+          <p:cNvSpPr/>
+          <p:nvPr/>
+        </p:nvSpPr>
+        <p:spPr>
+          <a:xfrm>
+            <a:off x="594360" y="6254496"/>
+            <a:ext cx="11002975" cy="13716"/>
+          </a:xfrm>
+          <a:prstGeom prst="rect">
+            <a:avLst/>
+          </a:prstGeom>
+          <a:solidFill>
+            <a:srgbClr val="2A3F5F"/>
+          </a:solidFill>
+          <a:ln w="12700">
+            <a:solidFill>
+              <a:srgbClr val="2A3F5F">
+                <a:alpha val="0"/>
+              </a:srgbClr>
+            </a:solidFill>
+            <a:prstDash val="solid"/>
+          </a:ln>
+        </p:spPr>
+      </p:sp>
+      <p:sp>
+        <p:nvSpPr>
+          <p:cNvPr id="8" name="Text 6"/>
+          <p:cNvSpPr/>
+          <p:nvPr/>
+        </p:nvSpPr>
+        <p:spPr>
+          <a:xfrm>
+            <a:off x="658368" y="6309360"/>
+            <a:ext cx="7772400" cy="164592"/>
+          </a:xfrm>
+          <a:prstGeom prst="rect">
+            <a:avLst/>
+          </a:prstGeom>
+          <a:noFill/>
+          <a:ln/>
+        </p:spPr>
+        <p:txBody>
+          <a:bodyPr wrap="square" rtlCol="0" anchor="ctr"/>
+          <a:lstStyle/>
+          <a:p>
+            <a:pPr indent="0" marL="0">
+              <a:buNone/>
+            </a:pPr>
+            <a:r>
+              <a:rPr lang="en-US" sz="780" dirty="0">
+                <a:solidFill>
+                  <a:srgbClr val="8A9BB5"/>
+                </a:solidFill>
+              </a:rPr>
+              <a:t>Claude Code Sourcemap 源码解读 · 仅供研究</a:t>
+            </a:r>
+            <a:endParaRPr lang="en-US" sz="780" dirty="0"/>
+          </a:p>
+        </p:txBody>
+      </p:sp>
+      <p:sp>
+        <p:nvSpPr>
+          <p:cNvPr id="9" name="Shape 7"/>
+          <p:cNvSpPr/>
+          <p:nvPr/>
+        </p:nvSpPr>
+        <p:spPr>
+          <a:xfrm>
+            <a:off x="11228832" y="6364224"/>
+            <a:ext cx="73152" cy="73152"/>
+          </a:xfrm>
+          <a:prstGeom prst="rect">
+            <a:avLst/>
+          </a:prstGeom>
+          <a:solidFill>
+            <a:srgbClr val="4B8EF5"/>
+          </a:solidFill>
+          <a:ln w="12700">
+            <a:solidFill>
+              <a:srgbClr val="4B8EF5">
+                <a:alpha val="0"/>
+              </a:srgbClr>
+            </a:solidFill>
+            <a:prstDash val="solid"/>
+          </a:ln>
+        </p:spPr>
+      </p:sp>
+      <p:sp>
+        <p:nvSpPr>
+          <p:cNvPr id="10" name="Text 8"/>
+          <p:cNvSpPr/>
+          <p:nvPr/>
+        </p:nvSpPr>
+        <p:spPr>
+          <a:xfrm>
+            <a:off x="10698480" y="6291072"/>
+            <a:ext cx="502920" cy="164592"/>
+          </a:xfrm>
+          <a:prstGeom prst="rect">
+            <a:avLst/>
+          </a:prstGeom>
+          <a:noFill/>
+          <a:ln/>
+        </p:spPr>
+        <p:txBody>
+          <a:bodyPr wrap="square" rtlCol="0" anchor="ctr"/>
+          <a:lstStyle/>
+          <a:p>
+            <a:pPr algn="r" indent="0" marL="0">
+              <a:buNone/>
+            </a:pPr>
+            <a:r>
+              <a:rPr lang="en-US" sz="820" b="1" dirty="0">
+                <a:solidFill>
+                  <a:srgbClr val="B0BDD0"/>
+                </a:solidFill>
+              </a:rPr>
+              <a:t>26</a:t>
+            </a:r>
+            <a:endParaRPr lang="en-US" sz="820" dirty="0"/>
+          </a:p>
+        </p:txBody>
+      </p:sp>
+      <p:sp>
+        <p:nvSpPr>
+          <p:cNvPr id="11" name="Shape 9"/>
+          <p:cNvSpPr/>
+          <p:nvPr/>
+        </p:nvSpPr>
+        <p:spPr>
+          <a:xfrm>
+            <a:off x="621792" y="1536192"/>
+            <a:ext cx="5623560" cy="4480560"/>
+          </a:xfrm>
+          <a:prstGeom prst="roundRect">
+            <a:avLst>
+              <a:gd name="adj" fmla="val 1633"/>
+            </a:avLst>
+          </a:prstGeom>
+          <a:solidFill>
+            <a:srgbClr val="162035"/>
+          </a:solidFill>
+          <a:ln w="12700">
+            <a:solidFill>
+              <a:srgbClr val="F5A623"/>
+            </a:solidFill>
+            <a:prstDash val="solid"/>
+          </a:ln>
+        </p:spPr>
+      </p:sp>
+      <p:sp>
+        <p:nvSpPr>
+          <p:cNvPr id="12" name="Text 10"/>
+          <p:cNvSpPr/>
+          <p:nvPr/>
+        </p:nvSpPr>
+        <p:spPr>
+          <a:xfrm>
+            <a:off x="804672" y="1664208"/>
+            <a:ext cx="2286000" cy="256032"/>
+          </a:xfrm>
+          <a:prstGeom prst="rect">
+            <a:avLst/>
+          </a:prstGeom>
+          <a:noFill/>
+          <a:ln/>
+        </p:spPr>
+        <p:txBody>
+          <a:bodyPr wrap="square" rtlCol="0" anchor="ctr"/>
+          <a:lstStyle/>
+          <a:p>
+            <a:pPr indent="0" marL="0">
+              <a:buNone/>
+            </a:pPr>
+            <a:r>
+              <a:rPr lang="en-US" sz="1300" b="1" dirty="0">
+                <a:solidFill>
+                  <a:srgbClr val="F5A623"/>
+                </a:solidFill>
+              </a:rPr>
+              <a:t>第一轮</a:t>
+            </a:r>
+            <a:endParaRPr lang="en-US" sz="1300" dirty="0"/>
+          </a:p>
+        </p:txBody>
+      </p:sp>
+      <p:sp>
+        <p:nvSpPr>
+          <p:cNvPr id="13" name="Text 11"/>
+          <p:cNvSpPr/>
+          <p:nvPr/>
+        </p:nvSpPr>
+        <p:spPr>
+          <a:xfrm>
+            <a:off x="804672" y="1956816"/>
+            <a:ext cx="5257800" cy="237744"/>
+          </a:xfrm>
+          <a:prstGeom prst="rect">
+            <a:avLst/>
+          </a:prstGeom>
+          <a:noFill/>
+          <a:ln/>
+        </p:spPr>
+        <p:txBody>
+          <a:bodyPr wrap="square" rtlCol="0" anchor="ctr"/>
+          <a:lstStyle/>
+          <a:p>
+            <a:pPr indent="0" marL="0">
+              <a:buNone/>
+            </a:pPr>
+            <a:r>
+              <a:rPr lang="en-US" sz="1050" dirty="0">
+                <a:solidFill>
+                  <a:srgbClr val="8A9BB5"/>
+                </a:solidFill>
+              </a:rPr>
+              <a:t>建立系统大图（理解 70% 行为）</a:t>
+            </a:r>
+            <a:endParaRPr lang="en-US" sz="1050" dirty="0"/>
+          </a:p>
+        </p:txBody>
+      </p:sp>
+      <p:sp>
+        <p:nvSpPr>
+          <p:cNvPr id="14" name="Shape 12"/>
+          <p:cNvSpPr/>
+          <p:nvPr/>
+        </p:nvSpPr>
+        <p:spPr>
+          <a:xfrm>
+            <a:off x="804672" y="2249424"/>
+            <a:ext cx="5257800" cy="9144"/>
+          </a:xfrm>
+          <a:prstGeom prst="rect">
+            <a:avLst/>
+          </a:prstGeom>
+          <a:solidFill>
+            <a:srgbClr val="2A3F5F"/>
+          </a:solidFill>
+          <a:ln w="12700">
+            <a:solidFill>
+              <a:srgbClr val="2A3F5F">
+                <a:alpha val="0"/>
+              </a:srgbClr>
+            </a:solidFill>
+            <a:prstDash val="solid"/>
+          </a:ln>
+        </p:spPr>
+      </p:sp>
+      <p:sp>
+        <p:nvSpPr>
+          <p:cNvPr id="15" name="Text 13"/>
+          <p:cNvSpPr/>
+          <p:nvPr/>
+        </p:nvSpPr>
+        <p:spPr>
+          <a:xfrm>
+            <a:off x="822960" y="2340864"/>
+            <a:ext cx="5212080" cy="219456"/>
+          </a:xfrm>
+          <a:prstGeom prst="rect">
+            <a:avLst/>
+          </a:prstGeom>
+          <a:noFill/>
+          <a:ln/>
+        </p:spPr>
+        <p:txBody>
+          <a:bodyPr wrap="square" rtlCol="0" anchor="ctr"/>
+          <a:lstStyle/>
+          <a:p>
+            <a:pPr indent="0" marL="0">
+              <a:buNone/>
+            </a:pPr>
+            <a:r>
+              <a:rPr lang="en-US" sz="1020" b="1" dirty="0">
+                <a:solidFill>
+                  <a:srgbClr val="F5A623"/>
+                </a:solidFill>
+                <a:latin typeface="Menlo" pitchFamily="34" charset="0"/>
+                <a:ea typeface="Menlo" pitchFamily="34" charset="-122"/>
+                <a:cs typeface="Menlo" pitchFamily="34" charset="-120"/>
+              </a:rPr>
+              <a:t>entrypoints/cli.tsx</a:t>
+            </a:r>
+            <a:endParaRPr lang="en-US" sz="1020" dirty="0"/>
+          </a:p>
+        </p:txBody>
+      </p:sp>
+      <p:sp>
+        <p:nvSpPr>
+          <p:cNvPr id="16" name="Text 14"/>
+          <p:cNvSpPr/>
+          <p:nvPr/>
+        </p:nvSpPr>
+        <p:spPr>
+          <a:xfrm>
+            <a:off x="822960" y="2569464"/>
+            <a:ext cx="5212080" cy="274320"/>
+          </a:xfrm>
+          <a:prstGeom prst="rect">
+            <a:avLst/>
+          </a:prstGeom>
+          <a:noFill/>
+          <a:ln/>
+        </p:spPr>
+        <p:txBody>
+          <a:bodyPr wrap="square" rtlCol="0" anchor="ctr"/>
+          <a:lstStyle/>
+          <a:p>
+            <a:pPr indent="0" marL="0">
+              <a:buNone/>
+            </a:pPr>
+            <a:r>
+              <a:rPr lang="en-US" sz="980" dirty="0">
+                <a:solidFill>
+                  <a:srgbClr val="C4CDD8"/>
+                </a:solidFill>
+              </a:rPr>
+              <a:t>入口分流逻辑与启动策略</a:t>
+            </a:r>
+            <a:endParaRPr lang="en-US" sz="980" dirty="0"/>
+          </a:p>
+        </p:txBody>
+      </p:sp>
+      <p:sp>
+        <p:nvSpPr>
+          <p:cNvPr id="17" name="Text 15"/>
+          <p:cNvSpPr/>
+          <p:nvPr/>
+        </p:nvSpPr>
+        <p:spPr>
+          <a:xfrm>
+            <a:off x="822960" y="3054096"/>
+            <a:ext cx="5212080" cy="219456"/>
+          </a:xfrm>
+          <a:prstGeom prst="rect">
+            <a:avLst/>
+          </a:prstGeom>
+          <a:noFill/>
+          <a:ln/>
+        </p:spPr>
+        <p:txBody>
+          <a:bodyPr wrap="square" rtlCol="0" anchor="ctr"/>
+          <a:lstStyle/>
+          <a:p>
+            <a:pPr indent="0" marL="0">
+              <a:buNone/>
+            </a:pPr>
+            <a:r>
+              <a:rPr lang="en-US" sz="1020" b="1" dirty="0">
+                <a:solidFill>
+                  <a:srgbClr val="F5A623"/>
+                </a:solidFill>
+                <a:latin typeface="Menlo" pitchFamily="34" charset="0"/>
+                <a:ea typeface="Menlo" pitchFamily="34" charset="-122"/>
+                <a:cs typeface="Menlo" pitchFamily="34" charset="-120"/>
+              </a:rPr>
+              <a:t>main.tsx</a:t>
+            </a:r>
+            <a:endParaRPr lang="en-US" sz="1020" dirty="0"/>
+          </a:p>
+        </p:txBody>
+      </p:sp>
+      <p:sp>
+        <p:nvSpPr>
+          <p:cNvPr id="18" name="Text 16"/>
+          <p:cNvSpPr/>
+          <p:nvPr/>
+        </p:nvSpPr>
+        <p:spPr>
+          <a:xfrm>
+            <a:off x="822960" y="3282696"/>
+            <a:ext cx="5212080" cy="274320"/>
+          </a:xfrm>
+          <a:prstGeom prst="rect">
+            <a:avLst/>
+          </a:prstGeom>
+          <a:noFill/>
+          <a:ln/>
+        </p:spPr>
+        <p:txBody>
+          <a:bodyPr wrap="square" rtlCol="0" anchor="ctr"/>
+          <a:lstStyle/>
+          <a:p>
+            <a:pPr indent="0" marL="0">
+              <a:buNone/>
+            </a:pPr>
+            <a:r>
+              <a:rPr lang="en-US" sz="980" dirty="0">
+                <a:solidFill>
+                  <a:srgbClr val="C4CDD8"/>
+                </a:solidFill>
+              </a:rPr>
+              <a:t>startup 编排全景（4,683 行，建议用 outline view）</a:t>
+            </a:r>
+            <a:endParaRPr lang="en-US" sz="980" dirty="0"/>
+          </a:p>
+        </p:txBody>
+      </p:sp>
+      <p:sp>
+        <p:nvSpPr>
+          <p:cNvPr id="19" name="Text 17"/>
+          <p:cNvSpPr/>
+          <p:nvPr/>
+        </p:nvSpPr>
+        <p:spPr>
+          <a:xfrm>
+            <a:off x="822960" y="3767328"/>
+            <a:ext cx="5212080" cy="219456"/>
+          </a:xfrm>
+          <a:prstGeom prst="rect">
+            <a:avLst/>
+          </a:prstGeom>
+          <a:noFill/>
+          <a:ln/>
+        </p:spPr>
+        <p:txBody>
+          <a:bodyPr wrap="square" rtlCol="0" anchor="ctr"/>
+          <a:lstStyle/>
+          <a:p>
+            <a:pPr indent="0" marL="0">
+              <a:buNone/>
+            </a:pPr>
+            <a:r>
+              <a:rPr lang="en-US" sz="1020" b="1" dirty="0">
+                <a:solidFill>
+                  <a:srgbClr val="F5A623"/>
+                </a:solidFill>
+                <a:latin typeface="Menlo" pitchFamily="34" charset="0"/>
+                <a:ea typeface="Menlo" pitchFamily="34" charset="-122"/>
+                <a:cs typeface="Menlo" pitchFamily="34" charset="-120"/>
+              </a:rPr>
+              <a:t>QueryEngine.ts</a:t>
+            </a:r>
+            <a:endParaRPr lang="en-US" sz="1020" dirty="0"/>
+          </a:p>
+        </p:txBody>
+      </p:sp>
+      <p:sp>
+        <p:nvSpPr>
+          <p:cNvPr id="20" name="Text 18"/>
+          <p:cNvSpPr/>
+          <p:nvPr/>
+        </p:nvSpPr>
+        <p:spPr>
+          <a:xfrm>
+            <a:off x="822960" y="3995928"/>
+            <a:ext cx="5212080" cy="274320"/>
+          </a:xfrm>
+          <a:prstGeom prst="rect">
+            <a:avLst/>
+          </a:prstGeom>
+          <a:noFill/>
+          <a:ln/>
+        </p:spPr>
+        <p:txBody>
+          <a:bodyPr wrap="square" rtlCol="0" anchor="ctr"/>
+          <a:lstStyle/>
+          <a:p>
+            <a:pPr indent="0" marL="0">
+              <a:buNone/>
+            </a:pPr>
+            <a:r>
+              <a:rPr lang="en-US" sz="980" dirty="0">
+                <a:solidFill>
+                  <a:srgbClr val="C4CDD8"/>
+                </a:solidFill>
+              </a:rPr>
+              <a:t>会话对象设计与 SDK 接口</a:t>
+            </a:r>
+            <a:endParaRPr lang="en-US" sz="980" dirty="0"/>
+          </a:p>
+        </p:txBody>
+      </p:sp>
+      <p:sp>
+        <p:nvSpPr>
+          <p:cNvPr id="21" name="Text 19"/>
+          <p:cNvSpPr/>
+          <p:nvPr/>
+        </p:nvSpPr>
+        <p:spPr>
+          <a:xfrm>
+            <a:off x="822960" y="4480560"/>
+            <a:ext cx="5212080" cy="219456"/>
+          </a:xfrm>
+          <a:prstGeom prst="rect">
+            <a:avLst/>
+          </a:prstGeom>
+          <a:noFill/>
+          <a:ln/>
+        </p:spPr>
+        <p:txBody>
+          <a:bodyPr wrap="square" rtlCol="0" anchor="ctr"/>
+          <a:lstStyle/>
+          <a:p>
+            <a:pPr indent="0" marL="0">
+              <a:buNone/>
+            </a:pPr>
+            <a:r>
+              <a:rPr lang="en-US" sz="1020" b="1" dirty="0">
+                <a:solidFill>
+                  <a:srgbClr val="F5A623"/>
+                </a:solidFill>
+                <a:latin typeface="Menlo" pitchFamily="34" charset="0"/>
+                <a:ea typeface="Menlo" pitchFamily="34" charset="-122"/>
+                <a:cs typeface="Menlo" pitchFamily="34" charset="-120"/>
+              </a:rPr>
+              <a:t>query.ts</a:t>
+            </a:r>
+            <a:endParaRPr lang="en-US" sz="1020" dirty="0"/>
+          </a:p>
+        </p:txBody>
+      </p:sp>
+      <p:sp>
+        <p:nvSpPr>
+          <p:cNvPr id="22" name="Text 20"/>
+          <p:cNvSpPr/>
+          <p:nvPr/>
+        </p:nvSpPr>
+        <p:spPr>
+          <a:xfrm>
+            <a:off x="822960" y="4709160"/>
+            <a:ext cx="5212080" cy="274320"/>
+          </a:xfrm>
+          <a:prstGeom prst="rect">
+            <a:avLst/>
+          </a:prstGeom>
+          <a:noFill/>
+          <a:ln/>
+        </p:spPr>
+        <p:txBody>
+          <a:bodyPr wrap="square" rtlCol="0" anchor="ctr"/>
+          <a:lstStyle/>
+          <a:p>
+            <a:pPr indent="0" marL="0">
+              <a:buNone/>
+            </a:pPr>
+            <a:r>
+              <a:rPr lang="en-US" sz="980" dirty="0">
+                <a:solidFill>
+                  <a:srgbClr val="C4CDD8"/>
+                </a:solidFill>
+              </a:rPr>
+              <a:t>agent loop 的真正核心，递归状态机</a:t>
+            </a:r>
+            <a:endParaRPr lang="en-US" sz="980" dirty="0"/>
+          </a:p>
+        </p:txBody>
+      </p:sp>
+      <p:sp>
+        <p:nvSpPr>
+          <p:cNvPr id="23" name="Text 21"/>
+          <p:cNvSpPr/>
+          <p:nvPr/>
+        </p:nvSpPr>
+        <p:spPr>
+          <a:xfrm>
+            <a:off x="822960" y="5193792"/>
+            <a:ext cx="5212080" cy="219456"/>
+          </a:xfrm>
+          <a:prstGeom prst="rect">
+            <a:avLst/>
+          </a:prstGeom>
+          <a:noFill/>
+          <a:ln/>
+        </p:spPr>
+        <p:txBody>
+          <a:bodyPr wrap="square" rtlCol="0" anchor="ctr"/>
+          <a:lstStyle/>
+          <a:p>
+            <a:pPr indent="0" marL="0">
+              <a:buNone/>
+            </a:pPr>
+            <a:r>
+              <a:rPr lang="en-US" sz="1020" b="1" dirty="0">
+                <a:solidFill>
+                  <a:srgbClr val="F5A623"/>
+                </a:solidFill>
+                <a:latin typeface="Menlo" pitchFamily="34" charset="0"/>
+                <a:ea typeface="Menlo" pitchFamily="34" charset="-122"/>
+                <a:cs typeface="Menlo" pitchFamily="34" charset="-120"/>
+              </a:rPr>
+              <a:t>Tool.ts + tools.ts</a:t>
+            </a:r>
+            <a:endParaRPr lang="en-US" sz="1020" dirty="0"/>
+          </a:p>
+        </p:txBody>
+      </p:sp>
+      <p:sp>
+        <p:nvSpPr>
+          <p:cNvPr id="24" name="Text 22"/>
+          <p:cNvSpPr/>
+          <p:nvPr/>
+        </p:nvSpPr>
+        <p:spPr>
+          <a:xfrm>
+            <a:off x="822960" y="5422392"/>
+            <a:ext cx="5212080" cy="274320"/>
+          </a:xfrm>
+          <a:prstGeom prst="rect">
+            <a:avLst/>
+          </a:prstGeom>
+          <a:noFill/>
+          <a:ln/>
+        </p:spPr>
+        <p:txBody>
+          <a:bodyPr wrap="square" rtlCol="0" anchor="ctr"/>
+          <a:lstStyle/>
+          <a:p>
+            <a:pPr indent="0" marL="0">
+              <a:buNone/>
+            </a:pPr>
+            <a:r>
+              <a:rPr lang="en-US" sz="980" dirty="0">
+                <a:solidFill>
+                  <a:srgbClr val="C4CDD8"/>
+                </a:solidFill>
+              </a:rPr>
+              <a:t>tool 抽象模型与 registry</a:t>
+            </a:r>
+            <a:endParaRPr lang="en-US" sz="980" dirty="0"/>
+          </a:p>
+        </p:txBody>
+      </p:sp>
+      <p:sp>
+        <p:nvSpPr>
+          <p:cNvPr id="25" name="Shape 23"/>
+          <p:cNvSpPr/>
+          <p:nvPr/>
+        </p:nvSpPr>
+        <p:spPr>
+          <a:xfrm>
+            <a:off x="6492240" y="1536192"/>
+            <a:ext cx="5623560" cy="4480560"/>
+          </a:xfrm>
+          <a:prstGeom prst="roundRect">
+            <a:avLst>
+              <a:gd name="adj" fmla="val 1633"/>
+            </a:avLst>
+          </a:prstGeom>
+          <a:solidFill>
+            <a:srgbClr val="162035"/>
+          </a:solidFill>
+          <a:ln w="12700">
+            <a:solidFill>
+              <a:srgbClr val="4B8EF5"/>
+            </a:solidFill>
+            <a:prstDash val="solid"/>
+          </a:ln>
+        </p:spPr>
+      </p:sp>
+      <p:sp>
+        <p:nvSpPr>
+          <p:cNvPr id="26" name="Text 24"/>
+          <p:cNvSpPr/>
+          <p:nvPr/>
+        </p:nvSpPr>
+        <p:spPr>
+          <a:xfrm>
+            <a:off x="6675120" y="1664208"/>
+            <a:ext cx="2286000" cy="256032"/>
+          </a:xfrm>
+          <a:prstGeom prst="rect">
+            <a:avLst/>
+          </a:prstGeom>
+          <a:noFill/>
+          <a:ln/>
+        </p:spPr>
+        <p:txBody>
+          <a:bodyPr wrap="square" rtlCol="0" anchor="ctr"/>
+          <a:lstStyle/>
+          <a:p>
+            <a:pPr indent="0" marL="0">
+              <a:buNone/>
+            </a:pPr>
+            <a:r>
+              <a:rPr lang="en-US" sz="1300" b="1" dirty="0">
+                <a:solidFill>
+                  <a:srgbClr val="4B8EF5"/>
+                </a:solidFill>
+              </a:rPr>
+              <a:t>第二轮</a:t>
+            </a:r>
+            <a:endParaRPr lang="en-US" sz="1300" dirty="0"/>
+          </a:p>
+        </p:txBody>
+      </p:sp>
+      <p:sp>
+        <p:nvSpPr>
+          <p:cNvPr id="27" name="Text 25"/>
+          <p:cNvSpPr/>
+          <p:nvPr/>
+        </p:nvSpPr>
+        <p:spPr>
+          <a:xfrm>
+            <a:off x="6675120" y="1956816"/>
+            <a:ext cx="5257800" cy="237744"/>
+          </a:xfrm>
+          <a:prstGeom prst="rect">
+            <a:avLst/>
+          </a:prstGeom>
+          <a:noFill/>
+          <a:ln/>
+        </p:spPr>
+        <p:txBody>
+          <a:bodyPr wrap="square" rtlCol="0" anchor="ctr"/>
+          <a:lstStyle/>
+          <a:p>
+            <a:pPr indent="0" marL="0">
+              <a:buNone/>
+            </a:pPr>
+            <a:r>
+              <a:rPr lang="en-US" sz="1050" dirty="0">
+                <a:solidFill>
+                  <a:srgbClr val="8A9BB5"/>
+                </a:solidFill>
+              </a:rPr>
+              <a:t>攻克执行与扩展层（理解剩余 30%）</a:t>
+            </a:r>
+            <a:endParaRPr lang="en-US" sz="1050" dirty="0"/>
+          </a:p>
+        </p:txBody>
+      </p:sp>
+      <p:sp>
+        <p:nvSpPr>
+          <p:cNvPr id="28" name="Shape 26"/>
+          <p:cNvSpPr/>
+          <p:nvPr/>
+        </p:nvSpPr>
+        <p:spPr>
+          <a:xfrm>
+            <a:off x="6675120" y="2249424"/>
+            <a:ext cx="5257800" cy="9144"/>
+          </a:xfrm>
+          <a:prstGeom prst="rect">
+            <a:avLst/>
+          </a:prstGeom>
+          <a:solidFill>
+            <a:srgbClr val="2A3F5F"/>
+          </a:solidFill>
+          <a:ln w="12700">
+            <a:solidFill>
+              <a:srgbClr val="2A3F5F">
+                <a:alpha val="0"/>
+              </a:srgbClr>
+            </a:solidFill>
+            <a:prstDash val="solid"/>
+          </a:ln>
+        </p:spPr>
+      </p:sp>
+      <p:sp>
+        <p:nvSpPr>
+          <p:cNvPr id="29" name="Text 27"/>
+          <p:cNvSpPr/>
+          <p:nvPr/>
+        </p:nvSpPr>
+        <p:spPr>
+          <a:xfrm>
+            <a:off x="6693408" y="2340864"/>
+            <a:ext cx="5212080" cy="219456"/>
+          </a:xfrm>
+          <a:prstGeom prst="rect">
+            <a:avLst/>
+          </a:prstGeom>
+          <a:noFill/>
+          <a:ln/>
+        </p:spPr>
+        <p:txBody>
+          <a:bodyPr wrap="square" rtlCol="0" anchor="ctr"/>
+          <a:lstStyle/>
+          <a:p>
+            <a:pPr indent="0" marL="0">
+              <a:buNone/>
+            </a:pPr>
+            <a:r>
+              <a:rPr lang="en-US" sz="1020" b="1" dirty="0">
+                <a:solidFill>
+                  <a:srgbClr val="4B8EF5"/>
+                </a:solidFill>
+                <a:latin typeface="Menlo" pitchFamily="34" charset="0"/>
+                <a:ea typeface="Menlo" pitchFamily="34" charset="-122"/>
+                <a:cs typeface="Menlo" pitchFamily="34" charset="-120"/>
+              </a:rPr>
+              <a:t>services/tools/toolExecution.ts</a:t>
+            </a:r>
+            <a:endParaRPr lang="en-US" sz="1020" dirty="0"/>
+          </a:p>
+        </p:txBody>
+      </p:sp>
+      <p:sp>
+        <p:nvSpPr>
+          <p:cNvPr id="30" name="Text 28"/>
+          <p:cNvSpPr/>
+          <p:nvPr/>
+        </p:nvSpPr>
+        <p:spPr>
+          <a:xfrm>
+            <a:off x="6693408" y="2569464"/>
+            <a:ext cx="5212080" cy="274320"/>
+          </a:xfrm>
+          <a:prstGeom prst="rect">
+            <a:avLst/>
+          </a:prstGeom>
+          <a:noFill/>
+          <a:ln/>
+        </p:spPr>
+        <p:txBody>
+          <a:bodyPr wrap="square" rtlCol="0" anchor="ctr"/>
+          <a:lstStyle/>
+          <a:p>
+            <a:pPr indent="0" marL="0">
+              <a:buNone/>
+            </a:pPr>
+            <a:r>
+              <a:rPr lang="en-US" sz="980" dirty="0">
+                <a:solidFill>
+                  <a:srgbClr val="C4CDD8"/>
+                </a:solidFill>
+              </a:rPr>
+              <a:t>工具执行主路径与 hook 编排</a:t>
+            </a:r>
+            <a:endParaRPr lang="en-US" sz="980" dirty="0"/>
+          </a:p>
+        </p:txBody>
+      </p:sp>
+      <p:sp>
+        <p:nvSpPr>
+          <p:cNvPr id="31" name="Text 29"/>
+          <p:cNvSpPr/>
+          <p:nvPr/>
+        </p:nvSpPr>
+        <p:spPr>
+          <a:xfrm>
+            <a:off x="6693408" y="3054096"/>
+            <a:ext cx="5212080" cy="219456"/>
+          </a:xfrm>
+          <a:prstGeom prst="rect">
+            <a:avLst/>
+          </a:prstGeom>
+          <a:noFill/>
+          <a:ln/>
+        </p:spPr>
+        <p:txBody>
+          <a:bodyPr wrap="square" rtlCol="0" anchor="ctr"/>
+          <a:lstStyle/>
+          <a:p>
+            <a:pPr indent="0" marL="0">
+              <a:buNone/>
+            </a:pPr>
+            <a:r>
+              <a:rPr lang="en-US" sz="1020" b="1" dirty="0">
+                <a:solidFill>
+                  <a:srgbClr val="4B8EF5"/>
+                </a:solidFill>
+                <a:latin typeface="Menlo" pitchFamily="34" charset="0"/>
+                <a:ea typeface="Menlo" pitchFamily="34" charset="-122"/>
+                <a:cs typeface="Menlo" pitchFamily="34" charset="-120"/>
+              </a:rPr>
+              <a:t>services/tools/toolHooks.ts</a:t>
+            </a:r>
+            <a:endParaRPr lang="en-US" sz="1020" dirty="0"/>
+          </a:p>
+        </p:txBody>
+      </p:sp>
+      <p:sp>
+        <p:nvSpPr>
+          <p:cNvPr id="32" name="Text 30"/>
+          <p:cNvSpPr/>
+          <p:nvPr/>
+        </p:nvSpPr>
+        <p:spPr>
+          <a:xfrm>
+            <a:off x="6693408" y="3282696"/>
+            <a:ext cx="5212080" cy="274320"/>
+          </a:xfrm>
+          <a:prstGeom prst="rect">
+            <a:avLst/>
+          </a:prstGeom>
+          <a:noFill/>
+          <a:ln/>
+        </p:spPr>
+        <p:txBody>
+          <a:bodyPr wrap="square" rtlCol="0" anchor="ctr"/>
+          <a:lstStyle/>
+          <a:p>
+            <a:pPr indent="0" marL="0">
+              <a:buNone/>
+            </a:pPr>
+            <a:r>
+              <a:rPr lang="en-US" sz="980" dirty="0">
+                <a:solidFill>
+                  <a:srgbClr val="C4CDD8"/>
+                </a:solidFill>
+              </a:rPr>
+              <a:t>Pre/Post hook 协议细节</a:t>
+            </a:r>
+            <a:endParaRPr lang="en-US" sz="980" dirty="0"/>
+          </a:p>
+        </p:txBody>
+      </p:sp>
+      <p:sp>
+        <p:nvSpPr>
+          <p:cNvPr id="33" name="Text 31"/>
+          <p:cNvSpPr/>
+          <p:nvPr/>
+        </p:nvSpPr>
+        <p:spPr>
+          <a:xfrm>
+            <a:off x="6693408" y="3767328"/>
+            <a:ext cx="5212080" cy="219456"/>
+          </a:xfrm>
+          <a:prstGeom prst="rect">
+            <a:avLst/>
+          </a:prstGeom>
+          <a:noFill/>
+          <a:ln/>
+        </p:spPr>
+        <p:txBody>
+          <a:bodyPr wrap="square" rtlCol="0" anchor="ctr"/>
+          <a:lstStyle/>
+          <a:p>
+            <a:pPr indent="0" marL="0">
+              <a:buNone/>
+            </a:pPr>
+            <a:r>
+              <a:rPr lang="en-US" sz="1020" b="1" dirty="0">
+                <a:solidFill>
+                  <a:srgbClr val="4B8EF5"/>
+                </a:solidFill>
+                <a:latin typeface="Menlo" pitchFamily="34" charset="0"/>
+                <a:ea typeface="Menlo" pitchFamily="34" charset="-122"/>
+                <a:cs typeface="Menlo" pitchFamily="34" charset="-120"/>
+              </a:rPr>
+              <a:t>tools/AgentTool/ + utils/swarm/</a:t>
+            </a:r>
+            <a:endParaRPr lang="en-US" sz="1020" dirty="0"/>
+          </a:p>
+        </p:txBody>
+      </p:sp>
+      <p:sp>
+        <p:nvSpPr>
+          <p:cNvPr id="34" name="Text 32"/>
+          <p:cNvSpPr/>
+          <p:nvPr/>
+        </p:nvSpPr>
+        <p:spPr>
+          <a:xfrm>
+            <a:off x="6693408" y="3995928"/>
+            <a:ext cx="5212080" cy="274320"/>
+          </a:xfrm>
+          <a:prstGeom prst="rect">
+            <a:avLst/>
+          </a:prstGeom>
+          <a:noFill/>
+          <a:ln/>
+        </p:spPr>
+        <p:txBody>
+          <a:bodyPr wrap="square" rtlCol="0" anchor="ctr"/>
+          <a:lstStyle/>
+          <a:p>
+            <a:pPr indent="0" marL="0">
+              <a:buNone/>
+            </a:pPr>
+            <a:r>
+              <a:rPr lang="en-US" sz="980" dirty="0">
+                <a:solidFill>
+                  <a:srgbClr val="C4CDD8"/>
+                </a:solidFill>
+              </a:rPr>
+              <a:t>多 Agent 运行时</a:t>
+            </a:r>
+            <a:endParaRPr lang="en-US" sz="980" dirty="0"/>
+          </a:p>
+        </p:txBody>
+      </p:sp>
+      <p:sp>
+        <p:nvSpPr>
+          <p:cNvPr id="35" name="Text 33"/>
+          <p:cNvSpPr/>
+          <p:nvPr/>
+        </p:nvSpPr>
+        <p:spPr>
+          <a:xfrm>
+            <a:off x="6693408" y="4480560"/>
+            <a:ext cx="5212080" cy="219456"/>
+          </a:xfrm>
+          <a:prstGeom prst="rect">
+            <a:avLst/>
+          </a:prstGeom>
+          <a:noFill/>
+          <a:ln/>
+        </p:spPr>
+        <p:txBody>
+          <a:bodyPr wrap="square" rtlCol="0" anchor="ctr"/>
+          <a:lstStyle/>
+          <a:p>
+            <a:pPr indent="0" marL="0">
+              <a:buNone/>
+            </a:pPr>
+            <a:r>
+              <a:rPr lang="en-US" sz="1020" b="1" dirty="0">
+                <a:solidFill>
+                  <a:srgbClr val="4B8EF5"/>
+                </a:solidFill>
+                <a:latin typeface="Menlo" pitchFamily="34" charset="0"/>
+                <a:ea typeface="Menlo" pitchFamily="34" charset="-122"/>
+                <a:cs typeface="Menlo" pitchFamily="34" charset="-120"/>
+              </a:rPr>
+              <a:t>services/mcp/client.ts</a:t>
+            </a:r>
+            <a:endParaRPr lang="en-US" sz="1020" dirty="0"/>
+          </a:p>
+        </p:txBody>
+      </p:sp>
+      <p:sp>
+        <p:nvSpPr>
+          <p:cNvPr id="36" name="Text 34"/>
+          <p:cNvSpPr/>
+          <p:nvPr/>
+        </p:nvSpPr>
+        <p:spPr>
+          <a:xfrm>
+            <a:off x="6693408" y="4709160"/>
+            <a:ext cx="5212080" cy="274320"/>
+          </a:xfrm>
+          <a:prstGeom prst="rect">
+            <a:avLst/>
+          </a:prstGeom>
+          <a:noFill/>
+          <a:ln/>
+        </p:spPr>
+        <p:txBody>
+          <a:bodyPr wrap="square" rtlCol="0" anchor="ctr"/>
+          <a:lstStyle/>
+          <a:p>
+            <a:pPr indent="0" marL="0">
+              <a:buNone/>
+            </a:pPr>
+            <a:r>
+              <a:rPr lang="en-US" sz="980" dirty="0">
+                <a:solidFill>
+                  <a:srgbClr val="C4CDD8"/>
+                </a:solidFill>
+              </a:rPr>
+              <a:t>外部能力接入协议</a:t>
+            </a:r>
+            <a:endParaRPr lang="en-US" sz="980" dirty="0"/>
+          </a:p>
+        </p:txBody>
+      </p:sp>
+      <p:sp>
+        <p:nvSpPr>
+          <p:cNvPr id="37" name="Text 35"/>
+          <p:cNvSpPr/>
+          <p:nvPr/>
+        </p:nvSpPr>
+        <p:spPr>
+          <a:xfrm>
+            <a:off x="6693408" y="5193792"/>
+            <a:ext cx="5212080" cy="219456"/>
+          </a:xfrm>
+          <a:prstGeom prst="rect">
+            <a:avLst/>
+          </a:prstGeom>
+          <a:noFill/>
+          <a:ln/>
+        </p:spPr>
+        <p:txBody>
+          <a:bodyPr wrap="square" rtlCol="0" anchor="ctr"/>
+          <a:lstStyle/>
+          <a:p>
+            <a:pPr indent="0" marL="0">
+              <a:buNone/>
+            </a:pPr>
+            <a:r>
+              <a:rPr lang="en-US" sz="1020" b="1" dirty="0">
+                <a:solidFill>
+                  <a:srgbClr val="4B8EF5"/>
+                </a:solidFill>
+                <a:latin typeface="Menlo" pitchFamily="34" charset="0"/>
+                <a:ea typeface="Menlo" pitchFamily="34" charset="-122"/>
+                <a:cs typeface="Menlo" pitchFamily="34" charset="-120"/>
+              </a:rPr>
+              <a:t>utils/permissions/</a:t>
+            </a:r>
+            <a:endParaRPr lang="en-US" sz="1020" dirty="0"/>
+          </a:p>
+        </p:txBody>
+      </p:sp>
+      <p:sp>
+        <p:nvSpPr>
+          <p:cNvPr id="38" name="Text 36"/>
+          <p:cNvSpPr/>
+          <p:nvPr/>
+        </p:nvSpPr>
+        <p:spPr>
+          <a:xfrm>
+            <a:off x="6693408" y="5422392"/>
+            <a:ext cx="5212080" cy="274320"/>
+          </a:xfrm>
+          <a:prstGeom prst="rect">
+            <a:avLst/>
+          </a:prstGeom>
+          <a:noFill/>
+          <a:ln/>
+        </p:spPr>
+        <p:txBody>
+          <a:bodyPr wrap="square" rtlCol="0" anchor="ctr"/>
+          <a:lstStyle/>
+          <a:p>
+            <a:pPr indent="0" marL="0">
+              <a:buNone/>
+            </a:pPr>
+            <a:r>
+              <a:rPr lang="en-US" sz="980" dirty="0">
+                <a:solidFill>
+                  <a:srgbClr val="C4CDD8"/>
+                </a:solidFill>
+              </a:rPr>
+              <a:t>权限系统全景</a:t>
+            </a:r>
+            <a:endParaRPr lang="en-US" sz="980" dirty="0"/>
+          </a:p>
+        </p:txBody>
+      </p:sp>
+    </p:spTree>
+  </p:cSld>
+  <p:clrMapOvr>
+    <a:masterClrMapping/>
+  </p:clrMapOvr>
+</p:sld>
+</file>
+
+<file path=ppt/slides/slide27.xml><?xml version="1.0" encoding="utf-8"?>
+<p:sld xmlns:a="http://schemas.openxmlformats.org/drawingml/2006/main" xmlns:r="http://schemas.openxmlformats.org/officeDocument/2006/relationships" xmlns:p="http://schemas.openxmlformats.org/presentationml/2006/main">
+  <p:cSld name="Slide 27">
+    <p:bg>
+      <p:bgPr>
+        <a:solidFill>
+          <a:srgbClr val="09111F"/>
+        </a:solidFill>
+      </p:bgPr>
+    </p:bg>
+    <p:spTree>
+      <p:nvGrpSpPr>
+        <p:cNvPr id="1" name=""/>
+        <p:cNvGrpSpPr/>
+        <p:nvPr/>
+      </p:nvGrpSpPr>
+      <p:grpSpPr>
+        <a:xfrm>
+          <a:off x="0" y="0"/>
+          <a:ext cx="0" cy="0"/>
+          <a:chOff x="0" y="0"/>
+          <a:chExt cx="0" cy="0"/>
+        </a:xfrm>
+      </p:grpSpPr>
+      <p:sp>
+        <p:nvSpPr>
+          <p:cNvPr id="2" name="Shape 0"/>
+          <p:cNvSpPr/>
+          <p:nvPr/>
+        </p:nvSpPr>
+        <p:spPr>
+          <a:xfrm>
+            <a:off x="0" y="0"/>
+            <a:ext cx="12191695" cy="91440"/>
+          </a:xfrm>
+          <a:prstGeom prst="rect">
+            <a:avLst/>
+          </a:prstGeom>
+          <a:solidFill>
+            <a:srgbClr val="F5A623"/>
+          </a:solidFill>
+          <a:ln w="12700">
+            <a:solidFill>
+              <a:srgbClr val="F5A623">
+                <a:alpha val="0"/>
+              </a:srgbClr>
+            </a:solidFill>
+            <a:prstDash val="solid"/>
+          </a:ln>
+        </p:spPr>
+      </p:sp>
+      <p:sp>
+        <p:nvSpPr>
+          <p:cNvPr id="3" name="Shape 1"/>
+          <p:cNvSpPr/>
+          <p:nvPr/>
+        </p:nvSpPr>
+        <p:spPr>
+          <a:xfrm>
+            <a:off x="621792" y="274320"/>
+            <a:ext cx="909828" cy="201168"/>
+          </a:xfrm>
+          <a:prstGeom prst="roundRect">
+            <a:avLst>
+              <a:gd name="adj" fmla="val 18182"/>
+            </a:avLst>
+          </a:prstGeom>
+          <a:solidFill>
+            <a:srgbClr val="1E2E4A"/>
+          </a:solidFill>
+          <a:ln w="12700">
+            <a:solidFill>
+              <a:srgbClr val="F5A623"/>
+            </a:solidFill>
+            <a:prstDash val="solid"/>
+          </a:ln>
+        </p:spPr>
+      </p:sp>
+      <p:sp>
+        <p:nvSpPr>
+          <p:cNvPr id="4" name="Text 2"/>
+          <p:cNvSpPr/>
+          <p:nvPr/>
+        </p:nvSpPr>
+        <p:spPr>
+          <a:xfrm>
+            <a:off x="658368" y="288036"/>
+            <a:ext cx="3200400" cy="164592"/>
+          </a:xfrm>
+          <a:prstGeom prst="rect">
+            <a:avLst/>
+          </a:prstGeom>
+          <a:noFill/>
+          <a:ln/>
+        </p:spPr>
+        <p:txBody>
+          <a:bodyPr wrap="square" rtlCol="0" anchor="ctr"/>
+          <a:lstStyle/>
+          <a:p>
+            <a:pPr indent="0" marL="0">
+              <a:buNone/>
+            </a:pPr>
+            <a:r>
+              <a:rPr lang="en-US" sz="950" b="1" dirty="0">
+                <a:solidFill>
+                  <a:srgbClr val="F5A623"/>
+                </a:solidFill>
+              </a:rPr>
+              <a:t>总结 · 02</a:t>
+            </a:r>
+            <a:endParaRPr lang="en-US" sz="950" dirty="0"/>
+          </a:p>
+        </p:txBody>
+      </p:sp>
+      <p:sp>
+        <p:nvSpPr>
+          <p:cNvPr id="5" name="Text 3"/>
+          <p:cNvSpPr/>
+          <p:nvPr/>
+        </p:nvSpPr>
+        <p:spPr>
+          <a:xfrm>
+            <a:off x="658368" y="548640"/>
+            <a:ext cx="10515600" cy="530352"/>
+          </a:xfrm>
+          <a:prstGeom prst="rect">
+            <a:avLst/>
+          </a:prstGeom>
+          <a:noFill/>
+          <a:ln/>
+        </p:spPr>
+        <p:txBody>
+          <a:bodyPr wrap="square" rtlCol="0" anchor="ctr">
+            <a:normAutofit/>
+          </a:bodyPr>
+          <a:lstStyle/>
+          <a:p>
+            <a:pPr indent="0" marL="0">
+              <a:buNone/>
+            </a:pPr>
+            <a:r>
+              <a:rPr lang="en-US" sz="2200" b="1" dirty="0">
+                <a:solidFill>
+                  <a:srgbClr val="E8EDF5"/>
+                </a:solidFill>
+              </a:rPr>
+              <a:t>三个可以直接带走的结论</a:t>
+            </a:r>
+            <a:endParaRPr lang="en-US" sz="2200" dirty="0"/>
+          </a:p>
+        </p:txBody>
+      </p:sp>
+      <p:sp>
+        <p:nvSpPr>
+          <p:cNvPr id="6" name="Text 4"/>
+          <p:cNvSpPr/>
+          <p:nvPr/>
+        </p:nvSpPr>
+        <p:spPr>
+          <a:xfrm>
+            <a:off x="658368" y="1115568"/>
+            <a:ext cx="10515600" cy="256032"/>
+          </a:xfrm>
+          <a:prstGeom prst="rect">
+            <a:avLst/>
+          </a:prstGeom>
+          <a:noFill/>
+          <a:ln/>
+        </p:spPr>
+        <p:txBody>
+          <a:bodyPr wrap="square" rtlCol="0" anchor="ctr"/>
+          <a:lstStyle/>
+          <a:p>
+            <a:pPr indent="0" marL="0">
+              <a:buNone/>
+            </a:pPr>
+            <a:r>
+              <a:rPr lang="en-US" sz="1150" dirty="0">
+                <a:solidFill>
+                  <a:srgbClr val="8A9BB5"/>
+                </a:solidFill>
+              </a:rPr>
+              <a:t>这些结论由源码事实支撑，不是主观评价。</a:t>
+            </a:r>
+            <a:endParaRPr lang="en-US" sz="1150" dirty="0"/>
+          </a:p>
+        </p:txBody>
+      </p:sp>
+      <p:sp>
+        <p:nvSpPr>
+          <p:cNvPr id="7" name="Shape 5"/>
+          <p:cNvSpPr/>
+          <p:nvPr/>
+        </p:nvSpPr>
+        <p:spPr>
+          <a:xfrm>
+            <a:off x="594360" y="6254496"/>
+            <a:ext cx="11002975" cy="13716"/>
+          </a:xfrm>
+          <a:prstGeom prst="rect">
+            <a:avLst/>
+          </a:prstGeom>
+          <a:solidFill>
+            <a:srgbClr val="2A3F5F"/>
+          </a:solidFill>
+          <a:ln w="12700">
+            <a:solidFill>
+              <a:srgbClr val="2A3F5F">
+                <a:alpha val="0"/>
+              </a:srgbClr>
+            </a:solidFill>
+            <a:prstDash val="solid"/>
+          </a:ln>
+        </p:spPr>
+      </p:sp>
+      <p:sp>
+        <p:nvSpPr>
+          <p:cNvPr id="8" name="Text 6"/>
+          <p:cNvSpPr/>
+          <p:nvPr/>
+        </p:nvSpPr>
+        <p:spPr>
+          <a:xfrm>
+            <a:off x="658368" y="6309360"/>
+            <a:ext cx="7772400" cy="164592"/>
+          </a:xfrm>
+          <a:prstGeom prst="rect">
+            <a:avLst/>
+          </a:prstGeom>
+          <a:noFill/>
+          <a:ln/>
+        </p:spPr>
+        <p:txBody>
+          <a:bodyPr wrap="square" rtlCol="0" anchor="ctr"/>
+          <a:lstStyle/>
+          <a:p>
+            <a:pPr indent="0" marL="0">
+              <a:buNone/>
+            </a:pPr>
+            <a:r>
+              <a:rPr lang="en-US" sz="780" dirty="0">
+                <a:solidFill>
+                  <a:srgbClr val="8A9BB5"/>
+                </a:solidFill>
+              </a:rPr>
+              <a:t>Claude Code Sourcemap 源码解读 · 仅供研究</a:t>
+            </a:r>
+            <a:endParaRPr lang="en-US" sz="780" dirty="0"/>
+          </a:p>
+        </p:txBody>
+      </p:sp>
+      <p:sp>
+        <p:nvSpPr>
+          <p:cNvPr id="9" name="Shape 7"/>
+          <p:cNvSpPr/>
+          <p:nvPr/>
+        </p:nvSpPr>
+        <p:spPr>
+          <a:xfrm>
+            <a:off x="11228832" y="6364224"/>
+            <a:ext cx="73152" cy="73152"/>
+          </a:xfrm>
+          <a:prstGeom prst="rect">
+            <a:avLst/>
+          </a:prstGeom>
+          <a:solidFill>
+            <a:srgbClr val="F5A623"/>
+          </a:solidFill>
+          <a:ln w="12700">
+            <a:solidFill>
+              <a:srgbClr val="F5A623">
+                <a:alpha val="0"/>
+              </a:srgbClr>
+            </a:solidFill>
+            <a:prstDash val="solid"/>
+          </a:ln>
+        </p:spPr>
+      </p:sp>
+      <p:sp>
+        <p:nvSpPr>
+          <p:cNvPr id="10" name="Text 8"/>
+          <p:cNvSpPr/>
+          <p:nvPr/>
+        </p:nvSpPr>
+        <p:spPr>
+          <a:xfrm>
+            <a:off x="10698480" y="6291072"/>
+            <a:ext cx="502920" cy="164592"/>
+          </a:xfrm>
+          <a:prstGeom prst="rect">
+            <a:avLst/>
+          </a:prstGeom>
+          <a:noFill/>
+          <a:ln/>
+        </p:spPr>
+        <p:txBody>
+          <a:bodyPr wrap="square" rtlCol="0" anchor="ctr"/>
+          <a:lstStyle/>
+          <a:p>
+            <a:pPr algn="r" indent="0" marL="0">
+              <a:buNone/>
+            </a:pPr>
+            <a:r>
+              <a:rPr lang="en-US" sz="820" b="1" dirty="0">
+                <a:solidFill>
+                  <a:srgbClr val="B0BDD0"/>
+                </a:solidFill>
+              </a:rPr>
+              <a:t>27</a:t>
+            </a:r>
+            <a:endParaRPr lang="en-US" sz="820" dirty="0"/>
+          </a:p>
+        </p:txBody>
+      </p:sp>
+      <p:sp>
+        <p:nvSpPr>
+          <p:cNvPr id="11" name="Shape 9"/>
+          <p:cNvSpPr/>
+          <p:nvPr/>
+        </p:nvSpPr>
+        <p:spPr>
+          <a:xfrm>
+            <a:off x="621792" y="1554480"/>
+            <a:ext cx="10954512" cy="1389888"/>
+          </a:xfrm>
+          <a:prstGeom prst="roundRect">
+            <a:avLst>
+              <a:gd name="adj" fmla="val 4605"/>
+            </a:avLst>
+          </a:prstGeom>
+          <a:solidFill>
+            <a:srgbClr val="162035"/>
+          </a:solidFill>
+          <a:ln w="12700">
+            <a:solidFill>
+              <a:srgbClr val="F5A623"/>
+            </a:solidFill>
+            <a:prstDash val="solid"/>
+          </a:ln>
+        </p:spPr>
+      </p:sp>
+      <p:sp>
+        <p:nvSpPr>
+          <p:cNvPr id="12" name="Shape 10"/>
+          <p:cNvSpPr/>
+          <p:nvPr/>
+        </p:nvSpPr>
+        <p:spPr>
+          <a:xfrm>
+            <a:off x="621792" y="1554480"/>
+            <a:ext cx="804672" cy="1389888"/>
+          </a:xfrm>
+          <a:prstGeom prst="roundRect">
+            <a:avLst>
+              <a:gd name="adj" fmla="val 7955"/>
+            </a:avLst>
+          </a:prstGeom>
+          <a:solidFill>
+            <a:srgbClr val="F5A623"/>
+          </a:solidFill>
+          <a:ln w="12700">
+            <a:solidFill>
+              <a:srgbClr val="F5A623">
+                <a:alpha val="0"/>
+              </a:srgbClr>
+            </a:solidFill>
+            <a:prstDash val="solid"/>
+          </a:ln>
+        </p:spPr>
+      </p:sp>
+      <p:sp>
+        <p:nvSpPr>
+          <p:cNvPr id="13" name="Text 11"/>
+          <p:cNvSpPr/>
+          <p:nvPr/>
+        </p:nvSpPr>
+        <p:spPr>
+          <a:xfrm>
+            <a:off x="621792" y="2029968"/>
+            <a:ext cx="804672" cy="365760"/>
+          </a:xfrm>
+          <a:prstGeom prst="rect">
+            <a:avLst/>
+          </a:prstGeom>
+          <a:noFill/>
+          <a:ln/>
+        </p:spPr>
+        <p:txBody>
+          <a:bodyPr wrap="square" rtlCol="0" anchor="ctr"/>
+          <a:lstStyle/>
+          <a:p>
+            <a:pPr algn="ctr" indent="0" marL="0">
+              <a:buNone/>
+            </a:pPr>
+            <a:r>
+              <a:rPr lang="en-US" sz="1600" b="1" dirty="0">
+                <a:solidFill>
+                  <a:srgbClr val="09111F"/>
+                </a:solidFill>
+              </a:rPr>
+              <a:t>01</a:t>
+            </a:r>
+            <a:endParaRPr lang="en-US" sz="1600" dirty="0"/>
+          </a:p>
+        </p:txBody>
+      </p:sp>
+      <p:sp>
+        <p:nvSpPr>
+          <p:cNvPr id="14" name="Text 12"/>
+          <p:cNvSpPr/>
+          <p:nvPr/>
+        </p:nvSpPr>
+        <p:spPr>
+          <a:xfrm>
+            <a:off x="1572768" y="1664208"/>
+            <a:ext cx="9784080" cy="274320"/>
+          </a:xfrm>
+          <a:prstGeom prst="rect">
+            <a:avLst/>
+          </a:prstGeom>
+          <a:noFill/>
+          <a:ln/>
+        </p:spPr>
+        <p:txBody>
+          <a:bodyPr wrap="square" rtlCol="0" anchor="ctr"/>
+          <a:lstStyle/>
+          <a:p>
+            <a:pPr indent="0" marL="0">
+              <a:buNone/>
+            </a:pPr>
+            <a:r>
+              <a:rPr lang="en-US" sz="1350" b="1" dirty="0">
+                <a:solidFill>
+                  <a:srgbClr val="F5A623"/>
+                </a:solidFill>
+              </a:rPr>
+              <a:t>它是 Terminal Agent Runtime，不是「聊天 CLI」</a:t>
+            </a:r>
+            <a:endParaRPr lang="en-US" sz="1350" dirty="0"/>
+          </a:p>
+        </p:txBody>
+      </p:sp>
+      <p:sp>
+        <p:nvSpPr>
+          <p:cNvPr id="15" name="Text 13"/>
+          <p:cNvSpPr/>
+          <p:nvPr/>
+        </p:nvSpPr>
+        <p:spPr>
+          <a:xfrm>
+            <a:off x="1572768" y="1993392"/>
+            <a:ext cx="9692640" cy="822960"/>
+          </a:xfrm>
+          <a:prstGeom prst="rect">
+            <a:avLst/>
+          </a:prstGeom>
+          <a:noFill/>
+          <a:ln/>
+        </p:spPr>
+        <p:txBody>
+          <a:bodyPr wrap="square" rtlCol="0" anchor="ctr">
+            <a:normAutofit/>
+          </a:bodyPr>
+          <a:lstStyle/>
+          <a:p>
+            <a:pPr indent="0" marL="0">
+              <a:lnSpc>
+                <a:spcPct val="135000"/>
+              </a:lnSpc>
+              <a:buNone/>
+            </a:pPr>
+            <a:r>
+              <a:rPr lang="en-US" sz="1100" dirty="0">
+                <a:solidFill>
+                  <a:srgbClr val="C4CDD8"/>
+                </a:solidFill>
+              </a:rPr>
+              <a:t>系统中心是 QueryEngine / query.ts 构成的递归 Agent Loop，而不是终端 UI 本身。UI、Bridge、SDK 只是不同的 surface，共享同一套推理内核。4,683 行的 main.tsx 启动编排直接说明了这是平台级产品。</a:t>
+            </a:r>
+            <a:endParaRPr lang="en-US" sz="1100" dirty="0"/>
+          </a:p>
+        </p:txBody>
+      </p:sp>
+      <p:sp>
+        <p:nvSpPr>
+          <p:cNvPr id="16" name="Shape 14"/>
+          <p:cNvSpPr/>
+          <p:nvPr/>
+        </p:nvSpPr>
+        <p:spPr>
+          <a:xfrm>
+            <a:off x="621792" y="3108960"/>
+            <a:ext cx="10954512" cy="1389888"/>
+          </a:xfrm>
+          <a:prstGeom prst="roundRect">
+            <a:avLst>
+              <a:gd name="adj" fmla="val 4605"/>
+            </a:avLst>
+          </a:prstGeom>
+          <a:solidFill>
+            <a:srgbClr val="162035"/>
+          </a:solidFill>
+          <a:ln w="12700">
+            <a:solidFill>
+              <a:srgbClr val="FB923C"/>
+            </a:solidFill>
+            <a:prstDash val="solid"/>
+          </a:ln>
+        </p:spPr>
+      </p:sp>
+      <p:sp>
+        <p:nvSpPr>
+          <p:cNvPr id="17" name="Shape 15"/>
+          <p:cNvSpPr/>
+          <p:nvPr/>
+        </p:nvSpPr>
+        <p:spPr>
+          <a:xfrm>
+            <a:off x="621792" y="3108960"/>
+            <a:ext cx="804672" cy="1389888"/>
+          </a:xfrm>
+          <a:prstGeom prst="roundRect">
+            <a:avLst>
+              <a:gd name="adj" fmla="val 7955"/>
+            </a:avLst>
+          </a:prstGeom>
+          <a:solidFill>
+            <a:srgbClr val="FB923C"/>
+          </a:solidFill>
+          <a:ln w="12700">
+            <a:solidFill>
+              <a:srgbClr val="FB923C">
+                <a:alpha val="0"/>
+              </a:srgbClr>
+            </a:solidFill>
+            <a:prstDash val="solid"/>
+          </a:ln>
+        </p:spPr>
+      </p:sp>
+      <p:sp>
+        <p:nvSpPr>
+          <p:cNvPr id="18" name="Text 16"/>
+          <p:cNvSpPr/>
+          <p:nvPr/>
+        </p:nvSpPr>
+        <p:spPr>
+          <a:xfrm>
+            <a:off x="621792" y="3584448"/>
+            <a:ext cx="804672" cy="365760"/>
+          </a:xfrm>
+          <a:prstGeom prst="rect">
+            <a:avLst/>
+          </a:prstGeom>
+          <a:noFill/>
+          <a:ln/>
+        </p:spPr>
+        <p:txBody>
+          <a:bodyPr wrap="square" rtlCol="0" anchor="ctr"/>
+          <a:lstStyle/>
+          <a:p>
+            <a:pPr algn="ctr" indent="0" marL="0">
+              <a:buNone/>
+            </a:pPr>
+            <a:r>
+              <a:rPr lang="en-US" sz="1600" b="1" dirty="0">
+                <a:solidFill>
+                  <a:srgbClr val="09111F"/>
+                </a:solidFill>
+              </a:rPr>
+              <a:t>02</a:t>
+            </a:r>
+            <a:endParaRPr lang="en-US" sz="1600" dirty="0"/>
+          </a:p>
+        </p:txBody>
+      </p:sp>
+      <p:sp>
+        <p:nvSpPr>
+          <p:cNvPr id="19" name="Text 17"/>
+          <p:cNvSpPr/>
+          <p:nvPr/>
+        </p:nvSpPr>
+        <p:spPr>
+          <a:xfrm>
+            <a:off x="1572768" y="3218688"/>
+            <a:ext cx="9784080" cy="274320"/>
+          </a:xfrm>
+          <a:prstGeom prst="rect">
+            <a:avLst/>
+          </a:prstGeom>
+          <a:noFill/>
+          <a:ln/>
+        </p:spPr>
+        <p:txBody>
+          <a:bodyPr wrap="square" rtlCol="0" anchor="ctr"/>
+          <a:lstStyle/>
+          <a:p>
+            <a:pPr indent="0" marL="0">
+              <a:buNone/>
+            </a:pPr>
+            <a:r>
+              <a:rPr lang="en-US" sz="1350" b="1" dirty="0">
+                <a:solidFill>
+                  <a:srgbClr val="FB923C"/>
+                </a:solidFill>
+              </a:rPr>
+              <a:t>权限系统是架构必需品，不是后期添加的防护</a:t>
+            </a:r>
+            <a:endParaRPr lang="en-US" sz="1350" dirty="0"/>
+          </a:p>
+        </p:txBody>
+      </p:sp>
+      <p:sp>
+        <p:nvSpPr>
+          <p:cNvPr id="20" name="Text 18"/>
+          <p:cNvSpPr/>
+          <p:nvPr/>
+        </p:nvSpPr>
+        <p:spPr>
+          <a:xfrm>
+            <a:off x="1572768" y="3547872"/>
+            <a:ext cx="9692640" cy="822960"/>
+          </a:xfrm>
+          <a:prstGeom prst="rect">
+            <a:avLst/>
+          </a:prstGeom>
+          <a:noFill/>
+          <a:ln/>
+        </p:spPr>
+        <p:txBody>
+          <a:bodyPr wrap="square" rtlCol="0" anchor="ctr">
+            <a:normAutofit/>
+          </a:bodyPr>
+          <a:lstStyle/>
+          <a:p>
+            <a:pPr indent="0" marL="0">
+              <a:lnSpc>
+                <a:spcPct val="135000"/>
+              </a:lnSpc>
+              <a:buNone/>
+            </a:pPr>
+            <a:r>
+              <a:rPr lang="en-US" sz="1100" dirty="0">
+                <a:solidFill>
+                  <a:srgbClr val="C4CDD8"/>
+                </a:solidFill>
+              </a:rPr>
+              <a:t>Hook + Rules + Classifier + Mode 四层构成的权限决策树，位于工具执行的主路径上，不是可绕过的 middleware。这使它能同时服务本地开发者、企业策略和 headless 自动化场景。</a:t>
+            </a:r>
+            <a:endParaRPr lang="en-US" sz="1100" dirty="0"/>
+          </a:p>
+        </p:txBody>
+      </p:sp>
+      <p:sp>
+        <p:nvSpPr>
+          <p:cNvPr id="21" name="Shape 19"/>
+          <p:cNvSpPr/>
+          <p:nvPr/>
+        </p:nvSpPr>
+        <p:spPr>
+          <a:xfrm>
+            <a:off x="621792" y="4663440"/>
+            <a:ext cx="10954512" cy="1389888"/>
+          </a:xfrm>
+          <a:prstGeom prst="roundRect">
+            <a:avLst>
+              <a:gd name="adj" fmla="val 4605"/>
+            </a:avLst>
+          </a:prstGeom>
+          <a:solidFill>
+            <a:srgbClr val="162035"/>
+          </a:solidFill>
+          <a:ln w="12700">
+            <a:solidFill>
+              <a:srgbClr val="A78BFA"/>
+            </a:solidFill>
+            <a:prstDash val="solid"/>
+          </a:ln>
+        </p:spPr>
+      </p:sp>
+      <p:sp>
+        <p:nvSpPr>
+          <p:cNvPr id="22" name="Shape 20"/>
+          <p:cNvSpPr/>
+          <p:nvPr/>
+        </p:nvSpPr>
+        <p:spPr>
+          <a:xfrm>
+            <a:off x="621792" y="4663440"/>
+            <a:ext cx="804672" cy="1389888"/>
+          </a:xfrm>
+          <a:prstGeom prst="roundRect">
+            <a:avLst>
+              <a:gd name="adj" fmla="val 7955"/>
+            </a:avLst>
+          </a:prstGeom>
+          <a:solidFill>
+            <a:srgbClr val="A78BFA"/>
+          </a:solidFill>
+          <a:ln w="12700">
+            <a:solidFill>
+              <a:srgbClr val="A78BFA">
+                <a:alpha val="0"/>
+              </a:srgbClr>
+            </a:solidFill>
+            <a:prstDash val="solid"/>
+          </a:ln>
+        </p:spPr>
+      </p:sp>
+      <p:sp>
+        <p:nvSpPr>
+          <p:cNvPr id="23" name="Text 21"/>
+          <p:cNvSpPr/>
+          <p:nvPr/>
+        </p:nvSpPr>
+        <p:spPr>
+          <a:xfrm>
+            <a:off x="621792" y="5138928"/>
+            <a:ext cx="804672" cy="365760"/>
+          </a:xfrm>
+          <a:prstGeom prst="rect">
+            <a:avLst/>
+          </a:prstGeom>
+          <a:noFill/>
+          <a:ln/>
+        </p:spPr>
+        <p:txBody>
+          <a:bodyPr wrap="square" rtlCol="0" anchor="ctr"/>
+          <a:lstStyle/>
+          <a:p>
+            <a:pPr algn="ctr" indent="0" marL="0">
+              <a:buNone/>
+            </a:pPr>
+            <a:r>
+              <a:rPr lang="en-US" sz="1600" b="1" dirty="0">
+                <a:solidFill>
+                  <a:srgbClr val="09111F"/>
+                </a:solidFill>
+              </a:rPr>
+              <a:t>03</a:t>
+            </a:r>
+            <a:endParaRPr lang="en-US" sz="1600" dirty="0"/>
+          </a:p>
+        </p:txBody>
+      </p:sp>
+      <p:sp>
+        <p:nvSpPr>
+          <p:cNvPr id="24" name="Text 22"/>
+          <p:cNvSpPr/>
+          <p:nvPr/>
+        </p:nvSpPr>
+        <p:spPr>
+          <a:xfrm>
+            <a:off x="1572768" y="4773168"/>
+            <a:ext cx="9784080" cy="274320"/>
+          </a:xfrm>
+          <a:prstGeom prst="rect">
+            <a:avLst/>
+          </a:prstGeom>
+          <a:noFill/>
+          <a:ln/>
+        </p:spPr>
+        <p:txBody>
+          <a:bodyPr wrap="square" rtlCol="0" anchor="ctr"/>
+          <a:lstStyle/>
+          <a:p>
+            <a:pPr indent="0" marL="0">
+              <a:buNone/>
+            </a:pPr>
+            <a:r>
+              <a:rPr lang="en-US" sz="1350" b="1" dirty="0">
+                <a:solidFill>
+                  <a:srgbClr val="A78BFA"/>
+                </a:solidFill>
+              </a:rPr>
+              <a:t>多 Agent 是可治理的 Actor 系统，不是并发调用模型</a:t>
+            </a:r>
+            <a:endParaRPr lang="en-US" sz="1350" dirty="0"/>
+          </a:p>
+        </p:txBody>
+      </p:sp>
+      <p:sp>
+        <p:nvSpPr>
+          <p:cNvPr id="25" name="Text 23"/>
+          <p:cNvSpPr/>
+          <p:nvPr/>
+        </p:nvSpPr>
+        <p:spPr>
+          <a:xfrm>
+            <a:off x="1572768" y="5102352"/>
+            <a:ext cx="9692640" cy="822960"/>
+          </a:xfrm>
+          <a:prstGeom prst="rect">
+            <a:avLst/>
+          </a:prstGeom>
+          <a:noFill/>
+          <a:ln/>
+        </p:spPr>
+        <p:txBody>
+          <a:bodyPr wrap="square" rtlCol="0" anchor="ctr">
+            <a:normAutofit/>
+          </a:bodyPr>
+          <a:lstStyle/>
+          <a:p>
+            <a:pPr indent="0" marL="0">
+              <a:lnSpc>
+                <a:spcPct val="135000"/>
+              </a:lnSpc>
+              <a:buNone/>
+            </a:pPr>
+            <a:r>
+              <a:rPr lang="en-US" sz="1100" dirty="0">
+                <a:solidFill>
+                  <a:srgbClr val="C4CDD8"/>
+                </a:solidFill>
+              </a:rPr>
+              <a:t>inProcessRunner 的 Actor 模型（mailbox + task claim + idle loop）+ 权限 bridge 机制，让子代理在不绕开任何治理的情况下真正协作。这才是「multi-agent」从概念变成工程的关键。</a:t>
+            </a:r>
+            <a:endParaRPr lang="en-US" sz="1100" dirty="0"/>
+          </a:p>
+        </p:txBody>
+      </p:sp>
+    </p:spTree>
+  </p:cSld>
+  <p:clrMapOvr>
+    <a:masterClrMapping/>
+  </p:clrMapOvr>
+</p:sld>
+</file>
+
+<file path=ppt/slides/slide28.xml><?xml version="1.0" encoding="utf-8"?>
+<p:sld xmlns:a="http://schemas.openxmlformats.org/drawingml/2006/main" xmlns:r="http://schemas.openxmlformats.org/officeDocument/2006/relationships" xmlns:p="http://schemas.openxmlformats.org/presentationml/2006/main">
+  <p:cSld name="Slide 28">
+    <p:bg>
+      <p:bgPr>
+        <a:solidFill>
+          <a:srgbClr val="09111F"/>
+        </a:solidFill>
+      </p:bgPr>
+    </p:bg>
+    <p:spTree>
+      <p:nvGrpSpPr>
+        <p:cNvPr id="1" name=""/>
+        <p:cNvGrpSpPr/>
+        <p:nvPr/>
+      </p:nvGrpSpPr>
+      <p:grpSpPr>
+        <a:xfrm>
+          <a:off x="0" y="0"/>
+          <a:ext cx="0" cy="0"/>
+          <a:chOff x="0" y="0"/>
+          <a:chExt cx="0" cy="0"/>
+        </a:xfrm>
+      </p:grpSpPr>
+      <p:sp>
+        <p:nvSpPr>
+          <p:cNvPr id="2" name="Shape 0"/>
+          <p:cNvSpPr/>
+          <p:nvPr/>
+        </p:nvSpPr>
+        <p:spPr>
+          <a:xfrm>
+            <a:off x="0" y="0"/>
+            <a:ext cx="12191695" cy="91440"/>
+          </a:xfrm>
+          <a:prstGeom prst="rect">
+            <a:avLst/>
+          </a:prstGeom>
+          <a:solidFill>
             <a:srgbClr val="F5A623"/>
           </a:solidFill>
           <a:ln w="12700">
@@ -21240,7 +25601,7 @@
                   <a:srgbClr val="B0BDD0"/>
                 </a:solidFill>
               </a:rPr>
-              <a:t>24</a:t>
+              <a:t>28</a:t>
             </a:r>
             <a:endParaRPr lang="en-US" sz="820" dirty="0"/>
           </a:p>
